--- a/docs/presentacion/boia-planet.pptx
+++ b/docs/presentacion/boia-planet.pptx
@@ -24,9 +24,16 @@
     <p:sldId id="272" r:id="rId18"/>
     <p:sldId id="273" r:id="rId19"/>
     <p:sldId id="274" r:id="rId20"/>
+    <p:sldId id="275" r:id="rId21"/>
+    <p:sldId id="276" r:id="rId22"/>
+    <p:sldId id="277" r:id="rId23"/>
+    <p:sldId id="278" r:id="rId24"/>
+    <p:sldId id="279" r:id="rId25"/>
+    <p:sldId id="280" r:id="rId26"/>
+    <p:sldId id="281" r:id="rId27"/>
   </p:sldIdLst>
   <p:notesMasterIdLst>
-    <p:notesMasterId r:id="rId21"/>
+    <p:notesMasterId r:id="rId28"/>
   </p:notesMasterIdLst>
   <p:sldSz cx="12192000" cy="6858000"/>
   <p:notesSz cx="6858000" cy="12192000"/>
@@ -125,13 +132,13 @@
   <p:extLst>
     <p:ext uri="{521415D9-36F7-43E2-AB2F-B90AF26B5E84}">
       <p14:sectionLst xmlns:p14="http://schemas.microsoft.com/office/powerpoint/2010/main">
-        <p14:section name="01 · Portada y resumen" id="{11ce071a-bd3c-38b3-4e8c-16bb2d987d83}">
+        <p14:section name="01 · Portada y resumen" id="{e01cd197-d7ec-71ca-6201-8876704d31c2}">
           <p14:sldIdLst>
             <p14:sldId id="256"/>
             <p14:sldId id="257"/>
           </p14:sldIdLst>
         </p14:section>
-        <p14:section name="02 · Landing" id="{9bb40953-11b1-83f6-eb15-51bee47fa436}">
+        <p14:section name="02 · Landing" id="{d24a7b35-2de3-f598-4569-0aaeff0a8409}">
           <p14:sldIdLst>
             <p14:sldId id="258"/>
             <p14:sldId id="259"/>
@@ -140,40 +147,47 @@
             <p14:sldId id="262"/>
           </p14:sldIdLst>
         </p14:section>
-        <p14:section name="03 · Páginas" id="{e1e7e821-ef37-7034-b0ee-e4f61eb20460}">
+        <p14:section name="03 · Páginas" id="{5da56ff6-5840-b07a-6b49-9ebcb8e14fd2}">
           <p14:sldIdLst>
             <p14:sldId id="263"/>
             <p14:sldId id="264"/>
+            <p14:sldId id="265"/>
+            <p14:sldId id="266"/>
+            <p14:sldId id="267"/>
+            <p14:sldId id="268"/>
+            <p14:sldId id="269"/>
+            <p14:sldId id="270"/>
+            <p14:sldId id="271"/>
           </p14:sldIdLst>
         </p14:section>
-        <p14:section name="04 · Carnet BOIA y Ranking" id="{68fb6967-394a-ce48-77cc-eb53123d9876}">
+        <p14:section name="04 · Carnet BOIA y Ranking" id="{60bd391c-18c9-7abf-4415-64245149c33e}">
           <p14:sldIdLst>
-            <p14:sldId id="265"/>
-            <p14:sldId id="266"/>
+            <p14:sldId id="272"/>
+            <p14:sldId id="273"/>
           </p14:sldIdLst>
         </p14:section>
-        <p14:section name="05 · El océano" id="{fef93d1b-4d68-1d2f-9e66-2d4a0448d0b0}">
+        <p14:section name="05 · El océano" id="{7fc305df-3176-031f-1fbf-a1c97650527a}">
           <p14:sldIdLst>
-            <p14:sldId id="267"/>
-            <p14:sldId id="268"/>
+            <p14:sldId id="274"/>
+            <p14:sldId id="275"/>
           </p14:sldIdLst>
         </p14:section>
-        <p14:section name="06 · Minijuegos" id="{328f49b7-5e76-642e-f475-7381c4e05ec5}">
+        <p14:section name="06 · Minijuegos" id="{c69f1005-087e-5d39-12a3-db26c812fb11}">
           <p14:sldIdLst>
-            <p14:sldId id="269"/>
-            <p14:sldId id="270"/>
+            <p14:sldId id="276"/>
+            <p14:sldId id="277"/>
           </p14:sldIdLst>
         </p14:section>
-        <p14:section name="07 · Admin" id="{318399f7-db05-fcd6-4840-3f8b417bf625}">
+        <p14:section name="07 · Admin" id="{a4a30ea6-ebe0-c3d1-7e64-00c4621e77c4}">
           <p14:sldIdLst>
-            <p14:sldId id="271"/>
-            <p14:sldId id="272"/>
+            <p14:sldId id="278"/>
+            <p14:sldId id="279"/>
           </p14:sldIdLst>
         </p14:section>
-        <p14:section name="08 · Hoja de ruta para salir" id="{19830cfd-1085-2a89-b913-06b0b2d2eef3}">
+        <p14:section name="08 · Hoja de ruta para salir" id="{d8abe97d-17e0-58f7-8d10-7ff599ca3175}">
           <p14:sldIdLst>
-            <p14:sldId id="273"/>
-            <p14:sldId id="274"/>
+            <p14:sldId id="280"/>
+            <p14:sldId id="281"/>
           </p14:sldIdLst>
         </p14:section>
       </p14:sectionLst>
@@ -670,8 +684,9 @@
           <a:p>
             <a:r>
               <a:rPr lang="en-US" dirty="0"/>
-              <a:t>- Portada de la parte.
-- La completa la tarea T207.</a:t>
+              <a:t>- Halloween y SONIDO no se venden en la web: entradas en la puerta y 2 € de descuento con el Carnet BOIA.
+- El aviso invita a hacerse el Carnet; es una forma de conseguir socios.
+- Nochevieja sigue con la compra de prueba, que no cobra nada.</a:t>
             </a:r>
             <a:endParaRPr lang="en-US" dirty="0"/>
           </a:p>
@@ -759,8 +774,9 @@
           <a:p>
             <a:r>
               <a:rPr lang="en-US" dirty="0"/>
-              <a:t>- Diapositiva provisional.
-- Se quita al escribir la parte.</a:t>
+              <a:t>- La lista sale con iniciales en vez de foto y un Spotify de muestra en uno de cada dos.
+- El enlace de artistas es uno solo: quien crea su Carnet con él lleva el sello «ARTISTA».
+- Con cuentas, el Admin crea el enlace y puede cambiarlo; el anterior deja de valer.</a:t>
             </a:r>
             <a:endParaRPr lang="en-US" dirty="0"/>
           </a:p>
@@ -848,8 +864,9 @@
           <a:p>
             <a:r>
               <a:rPr lang="en-US" dirty="0"/>
-              <a:t>- Portada de la parte.
-- La completa la tarea T208.</a:t>
+              <a:t>- Fotos: una galería por isla y evento; desde cada isla del mar se llega a sus fotos.
+- El Admin ya puede subir fotos reales a un evento; hoy todas son recuadros de muestra.
+- Tienda: no se vende online; «Comprar» manda a escribir por Instagram a @boia.planet.</a:t>
             </a:r>
             <a:endParaRPr lang="en-US" dirty="0"/>
           </a:p>
@@ -937,8 +954,8 @@
           <a:p>
             <a:r>
               <a:rPr lang="en-US" dirty="0"/>
-              <a:t>- Diapositiva provisional.
-- Se quita al escribir la parte.</a:t>
+              <a:t>- El aviso de arriba evita que alguien lo tome por real mientras tanto.
+- Hace falta un profesional que revise los textos con los datos de BOIA.</a:t>
             </a:r>
             <a:endParaRPr lang="en-US" dirty="0"/>
           </a:p>
@@ -1026,8 +1043,8 @@
           <a:p>
             <a:r>
               <a:rPr lang="en-US" dirty="0"/>
-              <a:t>- Portada de la parte.
-- La completa la tarea T209.</a:t>
+              <a:t>- Halloween es el primer evento real: su cartel es lo más urgente.
+- Las fotos de artistas pueden esperar: las iniciales quedan dignas.</a:t>
             </a:r>
             <a:endParaRPr lang="en-US" dirty="0"/>
           </a:p>
@@ -1115,8 +1132,8 @@
           <a:p>
             <a:r>
               <a:rPr lang="en-US" dirty="0"/>
-              <a:t>- Diapositiva provisional.
-- Se quita al escribir la parte.</a:t>
+              <a:t>- Sin legales reales no se puede publicar: es lo que más tarda, hay que empezar ya.
+- Las fotos de la tienda y de eventos dan mucha vida: mejor pocas y buenas.</a:t>
             </a:r>
             <a:endParaRPr lang="en-US" dirty="0"/>
           </a:p>
@@ -1204,8 +1221,8 @@
           <a:p>
             <a:r>
               <a:rPr lang="en-US" dirty="0"/>
-              <a:t>- Portada de la parte.
-- La completa la tarea T210.</a:t>
+              <a:t>- Las propuestas salen del código y de los documentos: son ideas, no decisiones; Hernán las revisa.
+- Lo que se decida entra en la hoja de ruta de la parte 8.</a:t>
             </a:r>
             <a:endParaRPr lang="en-US" dirty="0"/>
           </a:p>
@@ -1293,8 +1310,8 @@
           <a:p>
             <a:r>
               <a:rPr lang="en-US" dirty="0"/>
-              <a:t>- Diapositiva provisional.
-- Se quita al escribir la parte.</a:t>
+              <a:t>- Portada de la parte.
+- La completa la tarea T207.</a:t>
             </a:r>
             <a:endParaRPr lang="en-US" dirty="0"/>
           </a:p>
@@ -1382,8 +1399,8 @@
           <a:p>
             <a:r>
               <a:rPr lang="en-US" dirty="0"/>
-              <a:t>- Portada de la parte.
-- La completa la tarea T211.</a:t>
+              <a:t>- Diapositiva provisional.
+- Se quita al escribir la parte.</a:t>
             </a:r>
             <a:endParaRPr lang="en-US" dirty="0"/>
           </a:p>
@@ -1471,8 +1488,8 @@
           <a:p>
             <a:r>
               <a:rPr lang="en-US" dirty="0"/>
-              <a:t>- Diapositiva provisional.
-- Se quita al escribir la parte.</a:t>
+              <a:t>- Portada de la parte.
+- La completa la tarea T208.</a:t>
             </a:r>
             <a:endParaRPr lang="en-US" dirty="0"/>
           </a:p>
@@ -1603,6 +1620,629 @@
 </p:notes>
 </file>
 
+<file path=ppt/notesSlides/notesSlide20.xml><?xml version="1.0" encoding="utf-8"?>
+<p:notes xmlns:a="http://schemas.openxmlformats.org/drawingml/2006/main" xmlns:r="http://schemas.openxmlformats.org/officeDocument/2006/relationships" xmlns:p="http://schemas.openxmlformats.org/presentationml/2006/main">
+  <p:cSld>
+    <p:spTree>
+      <p:nvGrpSpPr>
+        <p:cNvPr id="1" name=""/>
+        <p:cNvGrpSpPr/>
+        <p:nvPr/>
+      </p:nvGrpSpPr>
+      <p:grpSpPr>
+        <a:xfrm>
+          <a:off x="0" y="0"/>
+          <a:ext cx="0" cy="0"/>
+          <a:chOff x="0" y="0"/>
+          <a:chExt cx="0" cy="0"/>
+        </a:xfrm>
+      </p:grpSpPr>
+      <p:sp>
+        <p:nvSpPr>
+          <p:cNvPr id="2" name="Slide Image Placeholder 1"/>
+          <p:cNvSpPr>
+            <a:spLocks noGrp="1" noRot="1" noChangeAspect="1"/>
+          </p:cNvSpPr>
+          <p:nvPr>
+            <p:ph type="sldImg"/>
+          </p:nvPr>
+        </p:nvSpPr>
+        <p:spPr/>
+      </p:sp>
+      <p:sp>
+        <p:nvSpPr>
+          <p:cNvPr id="3" name="Notes Placeholder 2"/>
+          <p:cNvSpPr>
+            <a:spLocks noGrp="1"/>
+          </p:cNvSpPr>
+          <p:nvPr>
+            <p:ph type="body" idx="1"/>
+          </p:nvPr>
+        </p:nvSpPr>
+        <p:spPr/>
+        <p:txBody>
+          <a:bodyPr/>
+          <a:lstStyle/>
+          <a:p>
+            <a:r>
+              <a:rPr lang="en-US" dirty="0"/>
+              <a:t>- Diapositiva provisional.
+- Se quita al escribir la parte.</a:t>
+            </a:r>
+            <a:endParaRPr lang="en-US" dirty="0"/>
+          </a:p>
+        </p:txBody>
+      </p:sp>
+      <p:sp>
+        <p:nvSpPr>
+          <p:cNvPr id="4" name="Slide Number Placeholder 3"/>
+          <p:cNvSpPr>
+            <a:spLocks noGrp="1"/>
+          </p:cNvSpPr>
+          <p:nvPr>
+            <p:ph type="sldNum" sz="quarter" idx="10"/>
+          </p:nvPr>
+        </p:nvSpPr>
+        <p:spPr/>
+        <p:txBody>
+          <a:bodyPr/>
+          <a:lstStyle/>
+          <a:p>
+            <a:fld id="{F7021451-1387-4CA6-816F-3879F97B5CBC}" type="slidenum">
+              <a:rPr lang="en-US"/>
+              <a:t>20</a:t>
+            </a:fld>
+            <a:endParaRPr lang="en-US"/>
+          </a:p>
+        </p:txBody>
+      </p:sp>
+    </p:spTree>
+    <p:extLst>
+      <p:ext uri="{BB962C8B-B14F-4D97-AF65-F5344CB8AC3E}">
+        <p14:creationId xmlns:p14="http://schemas.microsoft.com/office/powerpoint/2010/main" val="1024086991"/>
+      </p:ext>
+    </p:extLst>
+  </p:cSld>
+  <p:clrMapOvr>
+    <a:masterClrMapping/>
+  </p:clrMapOvr>
+</p:notes>
+</file>
+
+<file path=ppt/notesSlides/notesSlide21.xml><?xml version="1.0" encoding="utf-8"?>
+<p:notes xmlns:a="http://schemas.openxmlformats.org/drawingml/2006/main" xmlns:r="http://schemas.openxmlformats.org/officeDocument/2006/relationships" xmlns:p="http://schemas.openxmlformats.org/presentationml/2006/main">
+  <p:cSld>
+    <p:spTree>
+      <p:nvGrpSpPr>
+        <p:cNvPr id="1" name=""/>
+        <p:cNvGrpSpPr/>
+        <p:nvPr/>
+      </p:nvGrpSpPr>
+      <p:grpSpPr>
+        <a:xfrm>
+          <a:off x="0" y="0"/>
+          <a:ext cx="0" cy="0"/>
+          <a:chOff x="0" y="0"/>
+          <a:chExt cx="0" cy="0"/>
+        </a:xfrm>
+      </p:grpSpPr>
+      <p:sp>
+        <p:nvSpPr>
+          <p:cNvPr id="2" name="Slide Image Placeholder 1"/>
+          <p:cNvSpPr>
+            <a:spLocks noGrp="1" noRot="1" noChangeAspect="1"/>
+          </p:cNvSpPr>
+          <p:nvPr>
+            <p:ph type="sldImg"/>
+          </p:nvPr>
+        </p:nvSpPr>
+        <p:spPr/>
+      </p:sp>
+      <p:sp>
+        <p:nvSpPr>
+          <p:cNvPr id="3" name="Notes Placeholder 2"/>
+          <p:cNvSpPr>
+            <a:spLocks noGrp="1"/>
+          </p:cNvSpPr>
+          <p:nvPr>
+            <p:ph type="body" idx="1"/>
+          </p:nvPr>
+        </p:nvSpPr>
+        <p:spPr/>
+        <p:txBody>
+          <a:bodyPr/>
+          <a:lstStyle/>
+          <a:p>
+            <a:r>
+              <a:rPr lang="en-US" dirty="0"/>
+              <a:t>- Portada de la parte.
+- La completa la tarea T209.</a:t>
+            </a:r>
+            <a:endParaRPr lang="en-US" dirty="0"/>
+          </a:p>
+        </p:txBody>
+      </p:sp>
+      <p:sp>
+        <p:nvSpPr>
+          <p:cNvPr id="4" name="Slide Number Placeholder 3"/>
+          <p:cNvSpPr>
+            <a:spLocks noGrp="1"/>
+          </p:cNvSpPr>
+          <p:nvPr>
+            <p:ph type="sldNum" sz="quarter" idx="10"/>
+          </p:nvPr>
+        </p:nvSpPr>
+        <p:spPr/>
+        <p:txBody>
+          <a:bodyPr/>
+          <a:lstStyle/>
+          <a:p>
+            <a:fld id="{F7021451-1387-4CA6-816F-3879F97B5CBC}" type="slidenum">
+              <a:rPr lang="en-US"/>
+              <a:t>21</a:t>
+            </a:fld>
+            <a:endParaRPr lang="en-US"/>
+          </a:p>
+        </p:txBody>
+      </p:sp>
+    </p:spTree>
+    <p:extLst>
+      <p:ext uri="{BB962C8B-B14F-4D97-AF65-F5344CB8AC3E}">
+        <p14:creationId xmlns:p14="http://schemas.microsoft.com/office/powerpoint/2010/main" val="1024086991"/>
+      </p:ext>
+    </p:extLst>
+  </p:cSld>
+  <p:clrMapOvr>
+    <a:masterClrMapping/>
+  </p:clrMapOvr>
+</p:notes>
+</file>
+
+<file path=ppt/notesSlides/notesSlide22.xml><?xml version="1.0" encoding="utf-8"?>
+<p:notes xmlns:a="http://schemas.openxmlformats.org/drawingml/2006/main" xmlns:r="http://schemas.openxmlformats.org/officeDocument/2006/relationships" xmlns:p="http://schemas.openxmlformats.org/presentationml/2006/main">
+  <p:cSld>
+    <p:spTree>
+      <p:nvGrpSpPr>
+        <p:cNvPr id="1" name=""/>
+        <p:cNvGrpSpPr/>
+        <p:nvPr/>
+      </p:nvGrpSpPr>
+      <p:grpSpPr>
+        <a:xfrm>
+          <a:off x="0" y="0"/>
+          <a:ext cx="0" cy="0"/>
+          <a:chOff x="0" y="0"/>
+          <a:chExt cx="0" cy="0"/>
+        </a:xfrm>
+      </p:grpSpPr>
+      <p:sp>
+        <p:nvSpPr>
+          <p:cNvPr id="2" name="Slide Image Placeholder 1"/>
+          <p:cNvSpPr>
+            <a:spLocks noGrp="1" noRot="1" noChangeAspect="1"/>
+          </p:cNvSpPr>
+          <p:nvPr>
+            <p:ph type="sldImg"/>
+          </p:nvPr>
+        </p:nvSpPr>
+        <p:spPr/>
+      </p:sp>
+      <p:sp>
+        <p:nvSpPr>
+          <p:cNvPr id="3" name="Notes Placeholder 2"/>
+          <p:cNvSpPr>
+            <a:spLocks noGrp="1"/>
+          </p:cNvSpPr>
+          <p:nvPr>
+            <p:ph type="body" idx="1"/>
+          </p:nvPr>
+        </p:nvSpPr>
+        <p:spPr/>
+        <p:txBody>
+          <a:bodyPr/>
+          <a:lstStyle/>
+          <a:p>
+            <a:r>
+              <a:rPr lang="en-US" dirty="0"/>
+              <a:t>- Diapositiva provisional.
+- Se quita al escribir la parte.</a:t>
+            </a:r>
+            <a:endParaRPr lang="en-US" dirty="0"/>
+          </a:p>
+        </p:txBody>
+      </p:sp>
+      <p:sp>
+        <p:nvSpPr>
+          <p:cNvPr id="4" name="Slide Number Placeholder 3"/>
+          <p:cNvSpPr>
+            <a:spLocks noGrp="1"/>
+          </p:cNvSpPr>
+          <p:nvPr>
+            <p:ph type="sldNum" sz="quarter" idx="10"/>
+          </p:nvPr>
+        </p:nvSpPr>
+        <p:spPr/>
+        <p:txBody>
+          <a:bodyPr/>
+          <a:lstStyle/>
+          <a:p>
+            <a:fld id="{F7021451-1387-4CA6-816F-3879F97B5CBC}" type="slidenum">
+              <a:rPr lang="en-US"/>
+              <a:t>22</a:t>
+            </a:fld>
+            <a:endParaRPr lang="en-US"/>
+          </a:p>
+        </p:txBody>
+      </p:sp>
+    </p:spTree>
+    <p:extLst>
+      <p:ext uri="{BB962C8B-B14F-4D97-AF65-F5344CB8AC3E}">
+        <p14:creationId xmlns:p14="http://schemas.microsoft.com/office/powerpoint/2010/main" val="1024086991"/>
+      </p:ext>
+    </p:extLst>
+  </p:cSld>
+  <p:clrMapOvr>
+    <a:masterClrMapping/>
+  </p:clrMapOvr>
+</p:notes>
+</file>
+
+<file path=ppt/notesSlides/notesSlide23.xml><?xml version="1.0" encoding="utf-8"?>
+<p:notes xmlns:a="http://schemas.openxmlformats.org/drawingml/2006/main" xmlns:r="http://schemas.openxmlformats.org/officeDocument/2006/relationships" xmlns:p="http://schemas.openxmlformats.org/presentationml/2006/main">
+  <p:cSld>
+    <p:spTree>
+      <p:nvGrpSpPr>
+        <p:cNvPr id="1" name=""/>
+        <p:cNvGrpSpPr/>
+        <p:nvPr/>
+      </p:nvGrpSpPr>
+      <p:grpSpPr>
+        <a:xfrm>
+          <a:off x="0" y="0"/>
+          <a:ext cx="0" cy="0"/>
+          <a:chOff x="0" y="0"/>
+          <a:chExt cx="0" cy="0"/>
+        </a:xfrm>
+      </p:grpSpPr>
+      <p:sp>
+        <p:nvSpPr>
+          <p:cNvPr id="2" name="Slide Image Placeholder 1"/>
+          <p:cNvSpPr>
+            <a:spLocks noGrp="1" noRot="1" noChangeAspect="1"/>
+          </p:cNvSpPr>
+          <p:nvPr>
+            <p:ph type="sldImg"/>
+          </p:nvPr>
+        </p:nvSpPr>
+        <p:spPr/>
+      </p:sp>
+      <p:sp>
+        <p:nvSpPr>
+          <p:cNvPr id="3" name="Notes Placeholder 2"/>
+          <p:cNvSpPr>
+            <a:spLocks noGrp="1"/>
+          </p:cNvSpPr>
+          <p:nvPr>
+            <p:ph type="body" idx="1"/>
+          </p:nvPr>
+        </p:nvSpPr>
+        <p:spPr/>
+        <p:txBody>
+          <a:bodyPr/>
+          <a:lstStyle/>
+          <a:p>
+            <a:r>
+              <a:rPr lang="en-US" dirty="0"/>
+              <a:t>- Portada de la parte.
+- La completa la tarea T210.</a:t>
+            </a:r>
+            <a:endParaRPr lang="en-US" dirty="0"/>
+          </a:p>
+        </p:txBody>
+      </p:sp>
+      <p:sp>
+        <p:nvSpPr>
+          <p:cNvPr id="4" name="Slide Number Placeholder 3"/>
+          <p:cNvSpPr>
+            <a:spLocks noGrp="1"/>
+          </p:cNvSpPr>
+          <p:nvPr>
+            <p:ph type="sldNum" sz="quarter" idx="10"/>
+          </p:nvPr>
+        </p:nvSpPr>
+        <p:spPr/>
+        <p:txBody>
+          <a:bodyPr/>
+          <a:lstStyle/>
+          <a:p>
+            <a:fld id="{F7021451-1387-4CA6-816F-3879F97B5CBC}" type="slidenum">
+              <a:rPr lang="en-US"/>
+              <a:t>23</a:t>
+            </a:fld>
+            <a:endParaRPr lang="en-US"/>
+          </a:p>
+        </p:txBody>
+      </p:sp>
+    </p:spTree>
+    <p:extLst>
+      <p:ext uri="{BB962C8B-B14F-4D97-AF65-F5344CB8AC3E}">
+        <p14:creationId xmlns:p14="http://schemas.microsoft.com/office/powerpoint/2010/main" val="1024086991"/>
+      </p:ext>
+    </p:extLst>
+  </p:cSld>
+  <p:clrMapOvr>
+    <a:masterClrMapping/>
+  </p:clrMapOvr>
+</p:notes>
+</file>
+
+<file path=ppt/notesSlides/notesSlide24.xml><?xml version="1.0" encoding="utf-8"?>
+<p:notes xmlns:a="http://schemas.openxmlformats.org/drawingml/2006/main" xmlns:r="http://schemas.openxmlformats.org/officeDocument/2006/relationships" xmlns:p="http://schemas.openxmlformats.org/presentationml/2006/main">
+  <p:cSld>
+    <p:spTree>
+      <p:nvGrpSpPr>
+        <p:cNvPr id="1" name=""/>
+        <p:cNvGrpSpPr/>
+        <p:nvPr/>
+      </p:nvGrpSpPr>
+      <p:grpSpPr>
+        <a:xfrm>
+          <a:off x="0" y="0"/>
+          <a:ext cx="0" cy="0"/>
+          <a:chOff x="0" y="0"/>
+          <a:chExt cx="0" cy="0"/>
+        </a:xfrm>
+      </p:grpSpPr>
+      <p:sp>
+        <p:nvSpPr>
+          <p:cNvPr id="2" name="Slide Image Placeholder 1"/>
+          <p:cNvSpPr>
+            <a:spLocks noGrp="1" noRot="1" noChangeAspect="1"/>
+          </p:cNvSpPr>
+          <p:nvPr>
+            <p:ph type="sldImg"/>
+          </p:nvPr>
+        </p:nvSpPr>
+        <p:spPr/>
+      </p:sp>
+      <p:sp>
+        <p:nvSpPr>
+          <p:cNvPr id="3" name="Notes Placeholder 2"/>
+          <p:cNvSpPr>
+            <a:spLocks noGrp="1"/>
+          </p:cNvSpPr>
+          <p:nvPr>
+            <p:ph type="body" idx="1"/>
+          </p:nvPr>
+        </p:nvSpPr>
+        <p:spPr/>
+        <p:txBody>
+          <a:bodyPr/>
+          <a:lstStyle/>
+          <a:p>
+            <a:r>
+              <a:rPr lang="en-US" dirty="0"/>
+              <a:t>- Diapositiva provisional.
+- Se quita al escribir la parte.</a:t>
+            </a:r>
+            <a:endParaRPr lang="en-US" dirty="0"/>
+          </a:p>
+        </p:txBody>
+      </p:sp>
+      <p:sp>
+        <p:nvSpPr>
+          <p:cNvPr id="4" name="Slide Number Placeholder 3"/>
+          <p:cNvSpPr>
+            <a:spLocks noGrp="1"/>
+          </p:cNvSpPr>
+          <p:nvPr>
+            <p:ph type="sldNum" sz="quarter" idx="10"/>
+          </p:nvPr>
+        </p:nvSpPr>
+        <p:spPr/>
+        <p:txBody>
+          <a:bodyPr/>
+          <a:lstStyle/>
+          <a:p>
+            <a:fld id="{F7021451-1387-4CA6-816F-3879F97B5CBC}" type="slidenum">
+              <a:rPr lang="en-US"/>
+              <a:t>24</a:t>
+            </a:fld>
+            <a:endParaRPr lang="en-US"/>
+          </a:p>
+        </p:txBody>
+      </p:sp>
+    </p:spTree>
+    <p:extLst>
+      <p:ext uri="{BB962C8B-B14F-4D97-AF65-F5344CB8AC3E}">
+        <p14:creationId xmlns:p14="http://schemas.microsoft.com/office/powerpoint/2010/main" val="1024086991"/>
+      </p:ext>
+    </p:extLst>
+  </p:cSld>
+  <p:clrMapOvr>
+    <a:masterClrMapping/>
+  </p:clrMapOvr>
+</p:notes>
+</file>
+
+<file path=ppt/notesSlides/notesSlide25.xml><?xml version="1.0" encoding="utf-8"?>
+<p:notes xmlns:a="http://schemas.openxmlformats.org/drawingml/2006/main" xmlns:r="http://schemas.openxmlformats.org/officeDocument/2006/relationships" xmlns:p="http://schemas.openxmlformats.org/presentationml/2006/main">
+  <p:cSld>
+    <p:spTree>
+      <p:nvGrpSpPr>
+        <p:cNvPr id="1" name=""/>
+        <p:cNvGrpSpPr/>
+        <p:nvPr/>
+      </p:nvGrpSpPr>
+      <p:grpSpPr>
+        <a:xfrm>
+          <a:off x="0" y="0"/>
+          <a:ext cx="0" cy="0"/>
+          <a:chOff x="0" y="0"/>
+          <a:chExt cx="0" cy="0"/>
+        </a:xfrm>
+      </p:grpSpPr>
+      <p:sp>
+        <p:nvSpPr>
+          <p:cNvPr id="2" name="Slide Image Placeholder 1"/>
+          <p:cNvSpPr>
+            <a:spLocks noGrp="1" noRot="1" noChangeAspect="1"/>
+          </p:cNvSpPr>
+          <p:nvPr>
+            <p:ph type="sldImg"/>
+          </p:nvPr>
+        </p:nvSpPr>
+        <p:spPr/>
+      </p:sp>
+      <p:sp>
+        <p:nvSpPr>
+          <p:cNvPr id="3" name="Notes Placeholder 2"/>
+          <p:cNvSpPr>
+            <a:spLocks noGrp="1"/>
+          </p:cNvSpPr>
+          <p:nvPr>
+            <p:ph type="body" idx="1"/>
+          </p:nvPr>
+        </p:nvSpPr>
+        <p:spPr/>
+        <p:txBody>
+          <a:bodyPr/>
+          <a:lstStyle/>
+          <a:p>
+            <a:r>
+              <a:rPr lang="en-US" dirty="0"/>
+              <a:t>- Portada de la parte.
+- La completa la tarea T211.</a:t>
+            </a:r>
+            <a:endParaRPr lang="en-US" dirty="0"/>
+          </a:p>
+        </p:txBody>
+      </p:sp>
+      <p:sp>
+        <p:nvSpPr>
+          <p:cNvPr id="4" name="Slide Number Placeholder 3"/>
+          <p:cNvSpPr>
+            <a:spLocks noGrp="1"/>
+          </p:cNvSpPr>
+          <p:nvPr>
+            <p:ph type="sldNum" sz="quarter" idx="10"/>
+          </p:nvPr>
+        </p:nvSpPr>
+        <p:spPr/>
+        <p:txBody>
+          <a:bodyPr/>
+          <a:lstStyle/>
+          <a:p>
+            <a:fld id="{F7021451-1387-4CA6-816F-3879F97B5CBC}" type="slidenum">
+              <a:rPr lang="en-US"/>
+              <a:t>25</a:t>
+            </a:fld>
+            <a:endParaRPr lang="en-US"/>
+          </a:p>
+        </p:txBody>
+      </p:sp>
+    </p:spTree>
+    <p:extLst>
+      <p:ext uri="{BB962C8B-B14F-4D97-AF65-F5344CB8AC3E}">
+        <p14:creationId xmlns:p14="http://schemas.microsoft.com/office/powerpoint/2010/main" val="1024086991"/>
+      </p:ext>
+    </p:extLst>
+  </p:cSld>
+  <p:clrMapOvr>
+    <a:masterClrMapping/>
+  </p:clrMapOvr>
+</p:notes>
+</file>
+
+<file path=ppt/notesSlides/notesSlide26.xml><?xml version="1.0" encoding="utf-8"?>
+<p:notes xmlns:a="http://schemas.openxmlformats.org/drawingml/2006/main" xmlns:r="http://schemas.openxmlformats.org/officeDocument/2006/relationships" xmlns:p="http://schemas.openxmlformats.org/presentationml/2006/main">
+  <p:cSld>
+    <p:spTree>
+      <p:nvGrpSpPr>
+        <p:cNvPr id="1" name=""/>
+        <p:cNvGrpSpPr/>
+        <p:nvPr/>
+      </p:nvGrpSpPr>
+      <p:grpSpPr>
+        <a:xfrm>
+          <a:off x="0" y="0"/>
+          <a:ext cx="0" cy="0"/>
+          <a:chOff x="0" y="0"/>
+          <a:chExt cx="0" cy="0"/>
+        </a:xfrm>
+      </p:grpSpPr>
+      <p:sp>
+        <p:nvSpPr>
+          <p:cNvPr id="2" name="Slide Image Placeholder 1"/>
+          <p:cNvSpPr>
+            <a:spLocks noGrp="1" noRot="1" noChangeAspect="1"/>
+          </p:cNvSpPr>
+          <p:nvPr>
+            <p:ph type="sldImg"/>
+          </p:nvPr>
+        </p:nvSpPr>
+        <p:spPr/>
+      </p:sp>
+      <p:sp>
+        <p:nvSpPr>
+          <p:cNvPr id="3" name="Notes Placeholder 2"/>
+          <p:cNvSpPr>
+            <a:spLocks noGrp="1"/>
+          </p:cNvSpPr>
+          <p:nvPr>
+            <p:ph type="body" idx="1"/>
+          </p:nvPr>
+        </p:nvSpPr>
+        <p:spPr/>
+        <p:txBody>
+          <a:bodyPr/>
+          <a:lstStyle/>
+          <a:p>
+            <a:r>
+              <a:rPr lang="en-US" dirty="0"/>
+              <a:t>- Diapositiva provisional.
+- Se quita al escribir la parte.</a:t>
+            </a:r>
+            <a:endParaRPr lang="en-US" dirty="0"/>
+          </a:p>
+        </p:txBody>
+      </p:sp>
+      <p:sp>
+        <p:nvSpPr>
+          <p:cNvPr id="4" name="Slide Number Placeholder 3"/>
+          <p:cNvSpPr>
+            <a:spLocks noGrp="1"/>
+          </p:cNvSpPr>
+          <p:nvPr>
+            <p:ph type="sldNum" sz="quarter" idx="10"/>
+          </p:nvPr>
+        </p:nvSpPr>
+        <p:spPr/>
+        <p:txBody>
+          <a:bodyPr/>
+          <a:lstStyle/>
+          <a:p>
+            <a:fld id="{F7021451-1387-4CA6-816F-3879F97B5CBC}" type="slidenum">
+              <a:rPr lang="en-US"/>
+              <a:t>26</a:t>
+            </a:fld>
+            <a:endParaRPr lang="en-US"/>
+          </a:p>
+        </p:txBody>
+      </p:sp>
+    </p:spTree>
+    <p:extLst>
+      <p:ext uri="{BB962C8B-B14F-4D97-AF65-F5344CB8AC3E}">
+        <p14:creationId xmlns:p14="http://schemas.microsoft.com/office/powerpoint/2010/main" val="1024086991"/>
+      </p:ext>
+    </p:extLst>
+  </p:cSld>
+  <p:clrMapOvr>
+    <a:masterClrMapping/>
+  </p:clrMapOvr>
+</p:notes>
+</file>
+
 <file path=ppt/notesSlides/notesSlide3.xml><?xml version="1.0" encoding="utf-8"?>
 <p:notes xmlns:a="http://schemas.openxmlformats.org/drawingml/2006/main" xmlns:r="http://schemas.openxmlformats.org/officeDocument/2006/relationships" xmlns:p="http://schemas.openxmlformats.org/presentationml/2006/main">
   <p:cSld>
@@ -2094,8 +2734,8 @@
           <a:p>
             <a:r>
               <a:rPr lang="en-US" dirty="0"/>
-              <a:t>- Portada de la parte.
-- La completa la tarea T206.</a:t>
+              <a:t>- Son páginas sencillas, sin el planeta 3D: cargan rápido y se pueden compartir por WhatsApp.
+- Todo lo que se ve hoy es de muestra salvo los nombres y fechas de los eventos.</a:t>
             </a:r>
             <a:endParaRPr lang="en-US" dirty="0"/>
           </a:p>
@@ -2183,8 +2823,9 @@
           <a:p>
             <a:r>
               <a:rPr lang="en-US" dirty="0"/>
-              <a:t>- Diapositiva provisional.
-- Se quita al escribir la parte.</a:t>
+              <a:t>- Hoy hay tres eventos a la venta: Halloween (31 oct), SONIDO (5 dic) y Nochevieja.
+- Las fechas son reales; horas y precios, de muestra.
+- Si alguien cambia algo en el Admin, la ficha lo enseña en ese navegador.</a:t>
             </a:r>
             <a:endParaRPr lang="en-US" dirty="0"/>
           </a:p>
@@ -3286,32 +3927,148 @@
       </p:grpSpPr>
       <p:sp>
         <p:nvSpPr>
-          <p:cNvPr id="2" name="Shape 0"/>
+          <p:cNvPr id="2" name="Sección"/>
+          <p:cNvSpPr txBox="1"/>
+          <p:nvPr/>
+        </p:nvSpPr>
+        <p:spPr>
+          <a:xfrm>
+            <a:off x="548640" y="411480"/>
+            <a:ext cx="11094415" cy="274320"/>
+          </a:xfrm>
+          <a:prstGeom prst="rect">
+            <a:avLst/>
+          </a:prstGeom>
+          <a:noFill/>
+          <a:ln/>
+        </p:spPr>
+        <p:txBody>
+          <a:bodyPr wrap="square" lIns="0" tIns="0" rIns="0" bIns="0" rtlCol="0" anchor="ctr"/>
+          <a:lstStyle/>
+          <a:p>
+            <a:pPr indent="0" marL="0">
+              <a:buNone/>
+            </a:pPr>
+            <a:r>
+              <a:rPr lang="en-US" sz="1100" b="1" spc="200" kern="0" dirty="0">
+                <a:solidFill>
+                  <a:srgbClr val="EC4F24"/>
+                </a:solidFill>
+                <a:latin typeface="Arial" pitchFamily="34" charset="0"/>
+                <a:ea typeface="Arial" pitchFamily="34" charset="-122"/>
+                <a:cs typeface="Arial" pitchFamily="34" charset="-120"/>
+              </a:rPr>
+              <a:t>03  ·  PÁGINAS  ·  EVENTOS</a:t>
+            </a:r>
+            <a:endParaRPr lang="en-US" sz="1100" dirty="0"/>
+          </a:p>
+        </p:txBody>
+      </p:sp>
+      <p:sp>
+        <p:nvSpPr>
+          <p:cNvPr id="3" name="Text 0"/>
           <p:cNvSpPr/>
-          <p:nvPr/>
-        </p:nvSpPr>
-        <p:spPr>
-          <a:xfrm>
-            <a:off x="8001000" y="1325880"/>
-            <a:ext cx="3749040" cy="3749040"/>
-          </a:xfrm>
-          <a:prstGeom prst="ellipse">
-            <a:avLst/>
+          <p:nvPr>
+            <p:ph idx="101" type="title" hasCustomPrompt="1"/>
+          </p:nvPr>
+        </p:nvSpPr>
+        <p:spPr>
+          <a:xfrm>
+            <a:off x="548640" y="713232"/>
+            <a:ext cx="11094415" cy="960120"/>
+          </a:xfrm>
+          <a:prstGeom prst="rect">
+            <a:avLst/>
+          </a:prstGeom>
+          <a:noFill/>
+          <a:ln/>
+        </p:spPr>
+        <p:txBody>
+          <a:bodyPr wrap="square" lIns="0" tIns="0" rIns="0" bIns="0" rtlCol="0" anchor="t"/>
+          <a:lstStyle/>
+          <a:p>
+            <a:pPr algn="l" indent="0" marL="0">
+              <a:buNone/>
+            </a:pPr>
+            <a:r>
+              <a:rPr lang="en-US" sz="2800" dirty="0">
+                <a:solidFill>
+                  <a:srgbClr val="FFFFFF"/>
+                </a:solidFill>
+                <a:latin typeface="Arial Black" pitchFamily="34" charset="0"/>
+                <a:ea typeface="Arial Black" pitchFamily="34" charset="-122"/>
+                <a:cs typeface="Arial Black" pitchFamily="34" charset="-120"/>
+              </a:rPr>
+              <a:t>Taquilla, actividades y recuerdos</a:t>
+            </a:r>
+            <a:endParaRPr lang="en-US" sz="2800" dirty="0"/>
+          </a:p>
+        </p:txBody>
+      </p:sp>
+      <p:sp>
+        <p:nvSpPr>
+          <p:cNvPr id="4" name="Teléfono"/>
+          <p:cNvSpPr/>
+          <p:nvPr/>
+        </p:nvSpPr>
+        <p:spPr>
+          <a:xfrm>
+            <a:off x="2366569" y="1371600"/>
+            <a:ext cx="1973024" cy="4352544"/>
+          </a:xfrm>
+          <a:prstGeom prst="roundRect">
+            <a:avLst>
+              <a:gd name="adj" fmla="val 12977"/>
+            </a:avLst>
           </a:prstGeom>
           <a:solidFill>
-            <a:srgbClr val="0B1830"/>
+            <a:srgbClr val="05080F"/>
           </a:solidFill>
-          <a:ln w="25400">
+          <a:ln w="15875">
             <a:solidFill>
               <a:srgbClr val="2F4A72"/>
             </a:solidFill>
             <a:prstDash val="solid"/>
           </a:ln>
+          <a:effectLst>
+            <a:outerShdw sx="100000" sy="100000" kx="0" ky="0" algn="bl" rotWithShape="0" blurRad="127000" dist="50800" dir="5400000">
+              <a:srgbClr val="000000">
+                <a:alpha val="45000"/>
+              </a:srgbClr>
+            </a:outerShdw>
+          </a:effectLst>
+        </p:spPr>
+      </p:sp>
+      <p:sp>
+        <p:nvSpPr>
+          <p:cNvPr id="5" name="Shape 3"/>
+          <p:cNvSpPr/>
+          <p:nvPr/>
+        </p:nvSpPr>
+        <p:spPr>
+          <a:xfrm>
+            <a:off x="3078761" y="1453896"/>
+            <a:ext cx="548640" cy="64008"/>
+          </a:xfrm>
+          <a:prstGeom prst="roundRect">
+            <a:avLst>
+              <a:gd name="adj" fmla="val 50000"/>
+            </a:avLst>
+          </a:prstGeom>
+          <a:solidFill>
+            <a:srgbClr val="2F4A72"/>
+          </a:solidFill>
+          <a:ln w="12700">
+            <a:solidFill>
+              <a:srgbClr val="2F4A72"/>
+            </a:solidFill>
+            <a:prstDash val="solid"/>
+          </a:ln>
         </p:spPr>
       </p:sp>
       <p:pic>
         <p:nvPicPr>
-          <p:cNvPr id="3" name="Image 0" descr="La mascota de BOIA">    </p:cNvPr>
+          <p:cNvPr id="6" name="Image 0" descr="Captura de la web">    </p:cNvPr>
           <p:cNvPicPr>
             <a:picLocks noChangeAspect="1"/>
           </p:cNvPicPr>
@@ -3325,8 +4082,8 @@
         </p:blipFill>
         <p:spPr>
           <a:xfrm>
-            <a:off x="8459616" y="1783080"/>
-            <a:ext cx="2831808" cy="2834640"/>
+            <a:off x="2448865" y="1591056"/>
+            <a:ext cx="1808432" cy="3913632"/>
           </a:xfrm>
           <a:prstGeom prst="rect">
             <a:avLst/>
@@ -3335,14 +4092,14 @@
       </p:pic>
       <p:sp>
         <p:nvSpPr>
-          <p:cNvPr id="4" name="Número de parte"/>
+          <p:cNvPr id="7" name="Pie"/>
           <p:cNvSpPr txBox="1"/>
           <p:nvPr/>
         </p:nvSpPr>
         <p:spPr>
           <a:xfrm>
-            <a:off x="548640" y="640080"/>
-            <a:ext cx="3657600" cy="1737360"/>
+            <a:off x="2118858" y="5815584"/>
+            <a:ext cx="2468447" cy="521208"/>
           </a:xfrm>
           <a:prstGeom prst="rect">
             <a:avLst/>
@@ -3351,92 +4108,14 @@
           <a:ln/>
         </p:spPr>
         <p:txBody>
-          <a:bodyPr wrap="square" lIns="0" tIns="0" rIns="0" bIns="0" rtlCol="0" anchor="b"/>
-          <a:lstStyle/>
-          <a:p>
-            <a:pPr indent="0" marL="0">
-              <a:buNone/>
-            </a:pPr>
-            <a:r>
-              <a:rPr lang="en-US" sz="12000" dirty="0">
-                <a:solidFill>
-                  <a:srgbClr val="EC4F24"/>
-                </a:solidFill>
-                <a:latin typeface="Arial Black" pitchFamily="34" charset="0"/>
-                <a:ea typeface="Arial Black" pitchFamily="34" charset="-122"/>
-                <a:cs typeface="Arial Black" pitchFamily="34" charset="-120"/>
-              </a:rPr>
-              <a:t>04</a:t>
-            </a:r>
-            <a:endParaRPr lang="en-US" sz="12000" dirty="0"/>
-          </a:p>
-        </p:txBody>
-      </p:sp>
-      <p:sp>
-        <p:nvSpPr>
-          <p:cNvPr id="5" name="Título"/>
-          <p:cNvSpPr txBox="1"/>
-          <p:nvPr/>
-        </p:nvSpPr>
-        <p:spPr>
-          <a:xfrm>
-            <a:off x="548640" y="2606040"/>
-            <a:ext cx="7315200" cy="1417320"/>
-          </a:xfrm>
-          <a:prstGeom prst="rect">
-            <a:avLst/>
-          </a:prstGeom>
-          <a:noFill/>
-          <a:ln/>
-        </p:spPr>
-        <p:txBody>
           <a:bodyPr wrap="square" lIns="0" tIns="0" rIns="0" bIns="0" rtlCol="0" anchor="t"/>
           <a:lstStyle/>
           <a:p>
-            <a:pPr indent="0" marL="0">
-              <a:buNone/>
-            </a:pPr>
-            <a:r>
-              <a:rPr lang="en-US" sz="4400" dirty="0">
-                <a:solidFill>
-                  <a:srgbClr val="FFFFFF"/>
-                </a:solidFill>
-                <a:latin typeface="Arial Black" pitchFamily="34" charset="0"/>
-                <a:ea typeface="Arial Black" pitchFamily="34" charset="-122"/>
-                <a:cs typeface="Arial Black" pitchFamily="34" charset="-120"/>
-              </a:rPr>
-              <a:t>Carnet BOIA y Ranking</a:t>
-            </a:r>
-            <a:endParaRPr lang="en-US" sz="4400" dirty="0"/>
-          </a:p>
-        </p:txBody>
-      </p:sp>
-      <p:sp>
-        <p:nvSpPr>
-          <p:cNvPr id="6" name="Text 3"/>
-          <p:cNvSpPr txBox="1"/>
-          <p:nvPr/>
-        </p:nvSpPr>
-        <p:spPr>
-          <a:xfrm>
-            <a:off x="548640" y="4114800"/>
-            <a:ext cx="6949440" cy="822960"/>
-          </a:xfrm>
-          <a:prstGeom prst="rect">
-            <a:avLst/>
-          </a:prstGeom>
-          <a:noFill/>
-          <a:ln/>
-        </p:spPr>
-        <p:txBody>
-          <a:bodyPr wrap="square" lIns="0" tIns="0" rIns="0" bIns="0" rtlCol="0" anchor="t"/>
-          <a:lstStyle/>
-          <a:p>
-            <a:pPr indent="0" marL="0">
-              <a:buNone/>
-            </a:pPr>
-            <a:r>
-              <a:rPr lang="en-US" sz="1800" dirty="0">
+            <a:pPr algn="ctr" indent="0" marL="0">
+              <a:buNone/>
+            </a:pPr>
+            <a:r>
+              <a:rPr lang="en-US" sz="1200" dirty="0">
                 <a:solidFill>
                   <a:srgbClr val="C9D4E6"/>
                 </a:solidFill>
@@ -3444,9 +4123,257 @@
                 <a:ea typeface="Arial" pitchFamily="34" charset="-122"/>
                 <a:cs typeface="Arial" pitchFamily="34" charset="-120"/>
               </a:rPr>
-              <a:t>El Carnet con sus sellos, el sello de la fiesta y la clasificación</a:t>
-            </a:r>
-            <a:endParaRPr lang="en-US" sz="1800" dirty="0"/>
+              <a:t>Halloween y SONIDO: sólo en taquilla, 2 € menos</a:t>
+            </a:r>
+            <a:endParaRPr lang="en-US" sz="1200" dirty="0"/>
+          </a:p>
+        </p:txBody>
+      </p:sp>
+      <p:sp>
+        <p:nvSpPr>
+          <p:cNvPr id="8" name="Teléfono"/>
+          <p:cNvSpPr/>
+          <p:nvPr/>
+        </p:nvSpPr>
+        <p:spPr>
+          <a:xfrm>
+            <a:off x="5109336" y="1371600"/>
+            <a:ext cx="1973024" cy="4352544"/>
+          </a:xfrm>
+          <a:prstGeom prst="roundRect">
+            <a:avLst>
+              <a:gd name="adj" fmla="val 12977"/>
+            </a:avLst>
+          </a:prstGeom>
+          <a:solidFill>
+            <a:srgbClr val="05080F"/>
+          </a:solidFill>
+          <a:ln w="15875">
+            <a:solidFill>
+              <a:srgbClr val="2F4A72"/>
+            </a:solidFill>
+            <a:prstDash val="solid"/>
+          </a:ln>
+          <a:effectLst>
+            <a:outerShdw sx="100000" sy="100000" kx="0" ky="0" algn="bl" rotWithShape="0" blurRad="127000" dist="50800" dir="5400000">
+              <a:srgbClr val="000000">
+                <a:alpha val="45000"/>
+              </a:srgbClr>
+            </a:outerShdw>
+          </a:effectLst>
+        </p:spPr>
+      </p:sp>
+      <p:sp>
+        <p:nvSpPr>
+          <p:cNvPr id="9" name="Shape 6"/>
+          <p:cNvSpPr/>
+          <p:nvPr/>
+        </p:nvSpPr>
+        <p:spPr>
+          <a:xfrm>
+            <a:off x="5821528" y="1453896"/>
+            <a:ext cx="548640" cy="64008"/>
+          </a:xfrm>
+          <a:prstGeom prst="roundRect">
+            <a:avLst>
+              <a:gd name="adj" fmla="val 50000"/>
+            </a:avLst>
+          </a:prstGeom>
+          <a:solidFill>
+            <a:srgbClr val="2F4A72"/>
+          </a:solidFill>
+          <a:ln w="12700">
+            <a:solidFill>
+              <a:srgbClr val="2F4A72"/>
+            </a:solidFill>
+            <a:prstDash val="solid"/>
+          </a:ln>
+        </p:spPr>
+      </p:sp>
+      <p:pic>
+        <p:nvPicPr>
+          <p:cNvPr id="10" name="Image 1" descr="Captura de la web">    </p:cNvPr>
+          <p:cNvPicPr>
+            <a:picLocks noChangeAspect="1"/>
+          </p:cNvPicPr>
+          <p:nvPr/>
+        </p:nvPicPr>
+        <p:blipFill>
+          <a:blip r:embed="rId2"/>
+          <a:stretch>
+            <a:fillRect/>
+          </a:stretch>
+        </p:blipFill>
+        <p:spPr>
+          <a:xfrm>
+            <a:off x="5191632" y="1591056"/>
+            <a:ext cx="1808432" cy="3913632"/>
+          </a:xfrm>
+          <a:prstGeom prst="rect">
+            <a:avLst/>
+          </a:prstGeom>
+        </p:spPr>
+      </p:pic>
+      <p:sp>
+        <p:nvSpPr>
+          <p:cNvPr id="11" name="Pie"/>
+          <p:cNvSpPr txBox="1"/>
+          <p:nvPr/>
+        </p:nvSpPr>
+        <p:spPr>
+          <a:xfrm>
+            <a:off x="4861624" y="5815584"/>
+            <a:ext cx="2468447" cy="521208"/>
+          </a:xfrm>
+          <a:prstGeom prst="rect">
+            <a:avLst/>
+          </a:prstGeom>
+          <a:noFill/>
+          <a:ln/>
+        </p:spPr>
+        <p:txBody>
+          <a:bodyPr wrap="square" lIns="0" tIns="0" rIns="0" bIns="0" rtlCol="0" anchor="t"/>
+          <a:lstStyle/>
+          <a:p>
+            <a:pPr algn="ctr" indent="0" marL="0">
+              <a:buNone/>
+            </a:pPr>
+            <a:r>
+              <a:rPr lang="en-US" sz="1200" dirty="0">
+                <a:solidFill>
+                  <a:srgbClr val="C9D4E6"/>
+                </a:solidFill>
+                <a:latin typeface="Arial" pitchFamily="34" charset="0"/>
+                <a:ea typeface="Arial" pitchFamily="34" charset="-122"/>
+                <a:cs typeface="Arial" pitchFamily="34" charset="-120"/>
+              </a:rPr>
+              <a:t>SONIDO: cartel, actividades y compra</a:t>
+            </a:r>
+            <a:endParaRPr lang="en-US" sz="1200" dirty="0"/>
+          </a:p>
+        </p:txBody>
+      </p:sp>
+      <p:sp>
+        <p:nvSpPr>
+          <p:cNvPr id="12" name="Teléfono"/>
+          <p:cNvSpPr/>
+          <p:nvPr/>
+        </p:nvSpPr>
+        <p:spPr>
+          <a:xfrm>
+            <a:off x="7852102" y="1371600"/>
+            <a:ext cx="1973024" cy="4352544"/>
+          </a:xfrm>
+          <a:prstGeom prst="roundRect">
+            <a:avLst>
+              <a:gd name="adj" fmla="val 12977"/>
+            </a:avLst>
+          </a:prstGeom>
+          <a:solidFill>
+            <a:srgbClr val="05080F"/>
+          </a:solidFill>
+          <a:ln w="15875">
+            <a:solidFill>
+              <a:srgbClr val="2F4A72"/>
+            </a:solidFill>
+            <a:prstDash val="solid"/>
+          </a:ln>
+          <a:effectLst>
+            <a:outerShdw sx="100000" sy="100000" kx="0" ky="0" algn="bl" rotWithShape="0" blurRad="127000" dist="50800" dir="5400000">
+              <a:srgbClr val="000000">
+                <a:alpha val="45000"/>
+              </a:srgbClr>
+            </a:outerShdw>
+          </a:effectLst>
+        </p:spPr>
+      </p:sp>
+      <p:sp>
+        <p:nvSpPr>
+          <p:cNvPr id="13" name="Shape 9"/>
+          <p:cNvSpPr/>
+          <p:nvPr/>
+        </p:nvSpPr>
+        <p:spPr>
+          <a:xfrm>
+            <a:off x="8564294" y="1453896"/>
+            <a:ext cx="548640" cy="64008"/>
+          </a:xfrm>
+          <a:prstGeom prst="roundRect">
+            <a:avLst>
+              <a:gd name="adj" fmla="val 50000"/>
+            </a:avLst>
+          </a:prstGeom>
+          <a:solidFill>
+            <a:srgbClr val="2F4A72"/>
+          </a:solidFill>
+          <a:ln w="12700">
+            <a:solidFill>
+              <a:srgbClr val="2F4A72"/>
+            </a:solidFill>
+            <a:prstDash val="solid"/>
+          </a:ln>
+        </p:spPr>
+      </p:sp>
+      <p:pic>
+        <p:nvPicPr>
+          <p:cNvPr id="14" name="Image 2" descr="Captura de la web">    </p:cNvPr>
+          <p:cNvPicPr>
+            <a:picLocks noChangeAspect="1"/>
+          </p:cNvPicPr>
+          <p:nvPr/>
+        </p:nvPicPr>
+        <p:blipFill>
+          <a:blip r:embed="rId3"/>
+          <a:stretch>
+            <a:fillRect/>
+          </a:stretch>
+        </p:blipFill>
+        <p:spPr>
+          <a:xfrm>
+            <a:off x="7934398" y="1591056"/>
+            <a:ext cx="1808432" cy="3913632"/>
+          </a:xfrm>
+          <a:prstGeom prst="rect">
+            <a:avLst/>
+          </a:prstGeom>
+        </p:spPr>
+      </p:pic>
+      <p:sp>
+        <p:nvSpPr>
+          <p:cNvPr id="15" name="Pie"/>
+          <p:cNvSpPr txBox="1"/>
+          <p:nvPr/>
+        </p:nvSpPr>
+        <p:spPr>
+          <a:xfrm>
+            <a:off x="7604391" y="5815584"/>
+            <a:ext cx="2468447" cy="521208"/>
+          </a:xfrm>
+          <a:prstGeom prst="rect">
+            <a:avLst/>
+          </a:prstGeom>
+          <a:noFill/>
+          <a:ln/>
+        </p:spPr>
+        <p:txBody>
+          <a:bodyPr wrap="square" lIns="0" tIns="0" rIns="0" bIns="0" rtlCol="0" anchor="t"/>
+          <a:lstStyle/>
+          <a:p>
+            <a:pPr algn="ctr" indent="0" marL="0">
+              <a:buNone/>
+            </a:pPr>
+            <a:r>
+              <a:rPr lang="en-US" sz="1200" dirty="0">
+                <a:solidFill>
+                  <a:srgbClr val="C9D4E6"/>
+                </a:solidFill>
+                <a:latin typeface="Arial" pitchFamily="34" charset="0"/>
+                <a:ea typeface="Arial" pitchFamily="34" charset="-122"/>
+                <a:cs typeface="Arial" pitchFamily="34" charset="-120"/>
+              </a:rPr>
+              <a:t>Un evento que ya pasó: sus recuerdos</a:t>
+            </a:r>
+            <a:endParaRPr lang="en-US" sz="1200" dirty="0"/>
           </a:p>
         </p:txBody>
       </p:sp>
@@ -3556,7 +4483,7 @@
                 <a:ea typeface="Arial" pitchFamily="34" charset="-122"/>
                 <a:cs typeface="Arial" pitchFamily="34" charset="-120"/>
               </a:rPr>
-              <a:t>04  ·  CARNET BOIA Y RANKING</a:t>
+              <a:t>03  ·  PÁGINAS  ·  ARTISTAS</a:t>
             </a:r>
             <a:endParaRPr lang="en-US" sz="1100" dirty="0"/>
           </a:p>
@@ -3597,7 +4524,7 @@
                 <a:ea typeface="Arial Black" pitchFamily="34" charset="-122"/>
                 <a:cs typeface="Arial Black" pitchFamily="34" charset="-120"/>
               </a:rPr>
-              <a:t>Pendiente</a:t>
+              <a:t>Todos los artistas y su enlace</a:t>
             </a:r>
             <a:endParaRPr lang="en-US" sz="2800" dirty="0"/>
           </a:p>
@@ -3605,77 +4532,68 @@
       </p:sp>
       <p:sp>
         <p:nvSpPr>
-          <p:cNvPr id="4" name="Text 2"/>
-          <p:cNvSpPr txBox="1"/>
-          <p:nvPr/>
-        </p:nvSpPr>
-        <p:spPr>
-          <a:xfrm>
-            <a:off x="548640" y="1828800"/>
-            <a:ext cx="6949440" cy="4251960"/>
-          </a:xfrm>
-          <a:prstGeom prst="rect">
-            <a:avLst/>
-          </a:prstGeom>
-          <a:noFill/>
-          <a:ln/>
-        </p:spPr>
-        <p:txBody>
-          <a:bodyPr wrap="square" lIns="0" tIns="0" rIns="0" bIns="0" rtlCol="0" anchor="t"/>
-          <a:lstStyle/>
-          <a:p>
-            <a:pPr indent="0" marL="0">
-              <a:lnSpc>
-                <a:spcPct val="105000"/>
-              </a:lnSpc>
-              <a:spcAft>
-                <a:spcPts val="1000"/>
-              </a:spcAft>
-              <a:buNone/>
-            </a:pPr>
-            <a:r>
-              <a:rPr lang="en-US" sz="1600" dirty="0">
-                <a:solidFill>
-                  <a:srgbClr val="FFFFFF"/>
-                </a:solidFill>
-                <a:latin typeface="Arial" pitchFamily="34" charset="0"/>
-                <a:ea typeface="Arial" pitchFamily="34" charset="-122"/>
-                <a:cs typeface="Arial" pitchFamily="34" charset="-120"/>
-              </a:rPr>
-              <a:t>Esta parte está por escribir: la escribe la tarea T207.</a:t>
-            </a:r>
-            <a:endParaRPr lang="en-US" sz="1600" dirty="0"/>
-          </a:p>
-        </p:txBody>
-      </p:sp>
-      <p:sp>
-        <p:nvSpPr>
-          <p:cNvPr id="5" name="Shape 3"/>
+          <p:cNvPr id="4" name="Teléfono"/>
           <p:cNvSpPr/>
           <p:nvPr/>
         </p:nvSpPr>
         <p:spPr>
           <a:xfrm>
-            <a:off x="8229600" y="1828800"/>
-            <a:ext cx="3383280" cy="3383280"/>
-          </a:xfrm>
-          <a:prstGeom prst="ellipse">
-            <a:avLst/>
+            <a:off x="3737952" y="1371600"/>
+            <a:ext cx="1973024" cy="4352544"/>
+          </a:xfrm>
+          <a:prstGeom prst="roundRect">
+            <a:avLst>
+              <a:gd name="adj" fmla="val 12977"/>
+            </a:avLst>
           </a:prstGeom>
           <a:solidFill>
-            <a:srgbClr val="07101F"/>
+            <a:srgbClr val="05080F"/>
           </a:solidFill>
-          <a:ln w="25400">
+          <a:ln w="15875">
             <a:solidFill>
               <a:srgbClr val="2F4A72"/>
             </a:solidFill>
             <a:prstDash val="solid"/>
           </a:ln>
+          <a:effectLst>
+            <a:outerShdw sx="100000" sy="100000" kx="0" ky="0" algn="bl" rotWithShape="0" blurRad="127000" dist="50800" dir="5400000">
+              <a:srgbClr val="000000">
+                <a:alpha val="45000"/>
+              </a:srgbClr>
+            </a:outerShdw>
+          </a:effectLst>
+        </p:spPr>
+      </p:sp>
+      <p:sp>
+        <p:nvSpPr>
+          <p:cNvPr id="5" name="Shape 3"/>
+          <p:cNvSpPr/>
+          <p:nvPr/>
+        </p:nvSpPr>
+        <p:spPr>
+          <a:xfrm>
+            <a:off x="4450144" y="1453896"/>
+            <a:ext cx="548640" cy="64008"/>
+          </a:xfrm>
+          <a:prstGeom prst="roundRect">
+            <a:avLst>
+              <a:gd name="adj" fmla="val 50000"/>
+            </a:avLst>
+          </a:prstGeom>
+          <a:solidFill>
+            <a:srgbClr val="2F4A72"/>
+          </a:solidFill>
+          <a:ln w="12700">
+            <a:solidFill>
+              <a:srgbClr val="2F4A72"/>
+            </a:solidFill>
+            <a:prstDash val="solid"/>
+          </a:ln>
         </p:spPr>
       </p:sp>
       <p:pic>
         <p:nvPicPr>
-          <p:cNvPr id="6" name="Image 0" descr="La mascota de BOIA">    </p:cNvPr>
+          <p:cNvPr id="6" name="Image 0" descr="Captura de la web">    </p:cNvPr>
           <p:cNvPicPr>
             <a:picLocks noChangeAspect="1"/>
           </p:cNvPicPr>
@@ -3689,14 +4607,177 @@
         </p:blipFill>
         <p:spPr>
           <a:xfrm>
-            <a:off x="8642359" y="2240280"/>
-            <a:ext cx="2557762" cy="2560320"/>
+            <a:off x="3820248" y="1591056"/>
+            <a:ext cx="1808432" cy="3913632"/>
           </a:xfrm>
           <a:prstGeom prst="rect">
             <a:avLst/>
           </a:prstGeom>
         </p:spPr>
       </p:pic>
+      <p:sp>
+        <p:nvSpPr>
+          <p:cNvPr id="7" name="Pie"/>
+          <p:cNvSpPr txBox="1"/>
+          <p:nvPr/>
+        </p:nvSpPr>
+        <p:spPr>
+          <a:xfrm>
+            <a:off x="3490241" y="5815584"/>
+            <a:ext cx="2468447" cy="521208"/>
+          </a:xfrm>
+          <a:prstGeom prst="rect">
+            <a:avLst/>
+          </a:prstGeom>
+          <a:noFill/>
+          <a:ln/>
+        </p:spPr>
+        <p:txBody>
+          <a:bodyPr wrap="square" lIns="0" tIns="0" rIns="0" bIns="0" rtlCol="0" anchor="t"/>
+          <a:lstStyle/>
+          <a:p>
+            <a:pPr algn="ctr" indent="0" marL="0">
+              <a:buNone/>
+            </a:pPr>
+            <a:r>
+              <a:rPr lang="en-US" sz="1200" dirty="0">
+                <a:solidFill>
+                  <a:srgbClr val="C9D4E6"/>
+                </a:solidFill>
+                <a:latin typeface="Arial" pitchFamily="34" charset="0"/>
+                <a:ea typeface="Arial" pitchFamily="34" charset="-122"/>
+                <a:cs typeface="Arial" pitchFamily="34" charset="-120"/>
+              </a:rPr>
+              <a:t>/artistas: los 26, de la A a la Z</a:t>
+            </a:r>
+            <a:endParaRPr lang="en-US" sz="1200" dirty="0"/>
+          </a:p>
+        </p:txBody>
+      </p:sp>
+      <p:sp>
+        <p:nvSpPr>
+          <p:cNvPr id="8" name="Teléfono"/>
+          <p:cNvSpPr/>
+          <p:nvPr/>
+        </p:nvSpPr>
+        <p:spPr>
+          <a:xfrm>
+            <a:off x="6480719" y="1371600"/>
+            <a:ext cx="1973024" cy="4352544"/>
+          </a:xfrm>
+          <a:prstGeom prst="roundRect">
+            <a:avLst>
+              <a:gd name="adj" fmla="val 12977"/>
+            </a:avLst>
+          </a:prstGeom>
+          <a:solidFill>
+            <a:srgbClr val="05080F"/>
+          </a:solidFill>
+          <a:ln w="15875">
+            <a:solidFill>
+              <a:srgbClr val="2F4A72"/>
+            </a:solidFill>
+            <a:prstDash val="solid"/>
+          </a:ln>
+          <a:effectLst>
+            <a:outerShdw sx="100000" sy="100000" kx="0" ky="0" algn="bl" rotWithShape="0" blurRad="127000" dist="50800" dir="5400000">
+              <a:srgbClr val="000000">
+                <a:alpha val="45000"/>
+              </a:srgbClr>
+            </a:outerShdw>
+          </a:effectLst>
+        </p:spPr>
+      </p:sp>
+      <p:sp>
+        <p:nvSpPr>
+          <p:cNvPr id="9" name="Shape 6"/>
+          <p:cNvSpPr/>
+          <p:nvPr/>
+        </p:nvSpPr>
+        <p:spPr>
+          <a:xfrm>
+            <a:off x="7192911" y="1453896"/>
+            <a:ext cx="548640" cy="64008"/>
+          </a:xfrm>
+          <a:prstGeom prst="roundRect">
+            <a:avLst>
+              <a:gd name="adj" fmla="val 50000"/>
+            </a:avLst>
+          </a:prstGeom>
+          <a:solidFill>
+            <a:srgbClr val="2F4A72"/>
+          </a:solidFill>
+          <a:ln w="12700">
+            <a:solidFill>
+              <a:srgbClr val="2F4A72"/>
+            </a:solidFill>
+            <a:prstDash val="solid"/>
+          </a:ln>
+        </p:spPr>
+      </p:sp>
+      <p:pic>
+        <p:nvPicPr>
+          <p:cNvPr id="10" name="Image 1" descr="Captura de la web">    </p:cNvPr>
+          <p:cNvPicPr>
+            <a:picLocks noChangeAspect="1"/>
+          </p:cNvPicPr>
+          <p:nvPr/>
+        </p:nvPicPr>
+        <p:blipFill>
+          <a:blip r:embed="rId2"/>
+          <a:stretch>
+            <a:fillRect/>
+          </a:stretch>
+        </p:blipFill>
+        <p:spPr>
+          <a:xfrm>
+            <a:off x="6563015" y="1591056"/>
+            <a:ext cx="1808432" cy="3913632"/>
+          </a:xfrm>
+          <a:prstGeom prst="rect">
+            <a:avLst/>
+          </a:prstGeom>
+        </p:spPr>
+      </p:pic>
+      <p:sp>
+        <p:nvSpPr>
+          <p:cNvPr id="11" name="Pie"/>
+          <p:cNvSpPr txBox="1"/>
+          <p:nvPr/>
+        </p:nvSpPr>
+        <p:spPr>
+          <a:xfrm>
+            <a:off x="6233008" y="5815584"/>
+            <a:ext cx="2468447" cy="521208"/>
+          </a:xfrm>
+          <a:prstGeom prst="rect">
+            <a:avLst/>
+          </a:prstGeom>
+          <a:noFill/>
+          <a:ln/>
+        </p:spPr>
+        <p:txBody>
+          <a:bodyPr wrap="square" lIns="0" tIns="0" rIns="0" bIns="0" rtlCol="0" anchor="t"/>
+          <a:lstStyle/>
+          <a:p>
+            <a:pPr algn="ctr" indent="0" marL="0">
+              <a:buNone/>
+            </a:pPr>
+            <a:r>
+              <a:rPr lang="en-US" sz="1200" dirty="0">
+                <a:solidFill>
+                  <a:srgbClr val="C9D4E6"/>
+                </a:solidFill>
+                <a:latin typeface="Arial" pitchFamily="34" charset="0"/>
+                <a:ea typeface="Arial" pitchFamily="34" charset="-122"/>
+                <a:cs typeface="Arial" pitchFamily="34" charset="-120"/>
+              </a:rPr>
+              <a:t>El enlace de artistas abre su alta de Carnet</a:t>
+            </a:r>
+            <a:endParaRPr lang="en-US" sz="1200" dirty="0"/>
+          </a:p>
+        </p:txBody>
+      </p:sp>
       <p:sp>
         <p:nvSpPr>
           <p:cNvPr id="25" name="Slide Number Placeholder 0"/>
@@ -3772,32 +4853,148 @@
       </p:grpSpPr>
       <p:sp>
         <p:nvSpPr>
-          <p:cNvPr id="2" name="Shape 0"/>
+          <p:cNvPr id="2" name="Sección"/>
+          <p:cNvSpPr txBox="1"/>
+          <p:nvPr/>
+        </p:nvSpPr>
+        <p:spPr>
+          <a:xfrm>
+            <a:off x="548640" y="411480"/>
+            <a:ext cx="11094415" cy="274320"/>
+          </a:xfrm>
+          <a:prstGeom prst="rect">
+            <a:avLst/>
+          </a:prstGeom>
+          <a:noFill/>
+          <a:ln/>
+        </p:spPr>
+        <p:txBody>
+          <a:bodyPr wrap="square" lIns="0" tIns="0" rIns="0" bIns="0" rtlCol="0" anchor="ctr"/>
+          <a:lstStyle/>
+          <a:p>
+            <a:pPr indent="0" marL="0">
+              <a:buNone/>
+            </a:pPr>
+            <a:r>
+              <a:rPr lang="en-US" sz="1100" b="1" spc="200" kern="0" dirty="0">
+                <a:solidFill>
+                  <a:srgbClr val="EC4F24"/>
+                </a:solidFill>
+                <a:latin typeface="Arial" pitchFamily="34" charset="0"/>
+                <a:ea typeface="Arial" pitchFamily="34" charset="-122"/>
+                <a:cs typeface="Arial" pitchFamily="34" charset="-120"/>
+              </a:rPr>
+              <a:t>03  ·  PÁGINAS  ·  FOTOS Y TIENDA</a:t>
+            </a:r>
+            <a:endParaRPr lang="en-US" sz="1100" dirty="0"/>
+          </a:p>
+        </p:txBody>
+      </p:sp>
+      <p:sp>
+        <p:nvSpPr>
+          <p:cNvPr id="3" name="Text 0"/>
           <p:cNvSpPr/>
-          <p:nvPr/>
-        </p:nvSpPr>
-        <p:spPr>
-          <a:xfrm>
-            <a:off x="8001000" y="1325880"/>
-            <a:ext cx="3749040" cy="3749040"/>
-          </a:xfrm>
-          <a:prstGeom prst="ellipse">
-            <a:avLst/>
+          <p:nvPr>
+            <p:ph idx="101" type="title" hasCustomPrompt="1"/>
+          </p:nvPr>
+        </p:nvSpPr>
+        <p:spPr>
+          <a:xfrm>
+            <a:off x="548640" y="713232"/>
+            <a:ext cx="11094415" cy="960120"/>
+          </a:xfrm>
+          <a:prstGeom prst="rect">
+            <a:avLst/>
+          </a:prstGeom>
+          <a:noFill/>
+          <a:ln/>
+        </p:spPr>
+        <p:txBody>
+          <a:bodyPr wrap="square" lIns="0" tIns="0" rIns="0" bIns="0" rtlCol="0" anchor="t"/>
+          <a:lstStyle/>
+          <a:p>
+            <a:pPr algn="l" indent="0" marL="0">
+              <a:buNone/>
+            </a:pPr>
+            <a:r>
+              <a:rPr lang="en-US" sz="2800" dirty="0">
+                <a:solidFill>
+                  <a:srgbClr val="FFFFFF"/>
+                </a:solidFill>
+                <a:latin typeface="Arial Black" pitchFamily="34" charset="0"/>
+                <a:ea typeface="Arial Black" pitchFamily="34" charset="-122"/>
+                <a:cs typeface="Arial Black" pitchFamily="34" charset="-120"/>
+              </a:rPr>
+              <a:t>Fotos y eventos, y la tienda</a:t>
+            </a:r>
+            <a:endParaRPr lang="en-US" sz="2800" dirty="0"/>
+          </a:p>
+        </p:txBody>
+      </p:sp>
+      <p:sp>
+        <p:nvSpPr>
+          <p:cNvPr id="4" name="Teléfono"/>
+          <p:cNvSpPr/>
+          <p:nvPr/>
+        </p:nvSpPr>
+        <p:spPr>
+          <a:xfrm>
+            <a:off x="2366569" y="1371600"/>
+            <a:ext cx="1973024" cy="4352544"/>
+          </a:xfrm>
+          <a:prstGeom prst="roundRect">
+            <a:avLst>
+              <a:gd name="adj" fmla="val 12977"/>
+            </a:avLst>
           </a:prstGeom>
           <a:solidFill>
-            <a:srgbClr val="0B1830"/>
+            <a:srgbClr val="05080F"/>
           </a:solidFill>
-          <a:ln w="25400">
+          <a:ln w="15875">
             <a:solidFill>
               <a:srgbClr val="2F4A72"/>
             </a:solidFill>
             <a:prstDash val="solid"/>
           </a:ln>
+          <a:effectLst>
+            <a:outerShdw sx="100000" sy="100000" kx="0" ky="0" algn="bl" rotWithShape="0" blurRad="127000" dist="50800" dir="5400000">
+              <a:srgbClr val="000000">
+                <a:alpha val="45000"/>
+              </a:srgbClr>
+            </a:outerShdw>
+          </a:effectLst>
+        </p:spPr>
+      </p:sp>
+      <p:sp>
+        <p:nvSpPr>
+          <p:cNvPr id="5" name="Shape 3"/>
+          <p:cNvSpPr/>
+          <p:nvPr/>
+        </p:nvSpPr>
+        <p:spPr>
+          <a:xfrm>
+            <a:off x="3078761" y="1453896"/>
+            <a:ext cx="548640" cy="64008"/>
+          </a:xfrm>
+          <a:prstGeom prst="roundRect">
+            <a:avLst>
+              <a:gd name="adj" fmla="val 50000"/>
+            </a:avLst>
+          </a:prstGeom>
+          <a:solidFill>
+            <a:srgbClr val="2F4A72"/>
+          </a:solidFill>
+          <a:ln w="12700">
+            <a:solidFill>
+              <a:srgbClr val="2F4A72"/>
+            </a:solidFill>
+            <a:prstDash val="solid"/>
+          </a:ln>
         </p:spPr>
       </p:sp>
       <p:pic>
         <p:nvPicPr>
-          <p:cNvPr id="3" name="Image 0" descr="La mascota de BOIA">    </p:cNvPr>
+          <p:cNvPr id="6" name="Image 0" descr="Captura de la web">    </p:cNvPr>
           <p:cNvPicPr>
             <a:picLocks noChangeAspect="1"/>
           </p:cNvPicPr>
@@ -3811,8 +5008,8 @@
         </p:blipFill>
         <p:spPr>
           <a:xfrm>
-            <a:off x="8459616" y="1783080"/>
-            <a:ext cx="2831808" cy="2834640"/>
+            <a:off x="2448865" y="1591056"/>
+            <a:ext cx="1808432" cy="3913632"/>
           </a:xfrm>
           <a:prstGeom prst="rect">
             <a:avLst/>
@@ -3821,14 +5018,14 @@
       </p:pic>
       <p:sp>
         <p:nvSpPr>
-          <p:cNvPr id="4" name="Número de parte"/>
+          <p:cNvPr id="7" name="Pie"/>
           <p:cNvSpPr txBox="1"/>
           <p:nvPr/>
         </p:nvSpPr>
         <p:spPr>
           <a:xfrm>
-            <a:off x="548640" y="640080"/>
-            <a:ext cx="3657600" cy="1737360"/>
+            <a:off x="2118858" y="5815584"/>
+            <a:ext cx="2468447" cy="521208"/>
           </a:xfrm>
           <a:prstGeom prst="rect">
             <a:avLst/>
@@ -3837,92 +5034,14 @@
           <a:ln/>
         </p:spPr>
         <p:txBody>
-          <a:bodyPr wrap="square" lIns="0" tIns="0" rIns="0" bIns="0" rtlCol="0" anchor="b"/>
-          <a:lstStyle/>
-          <a:p>
-            <a:pPr indent="0" marL="0">
-              <a:buNone/>
-            </a:pPr>
-            <a:r>
-              <a:rPr lang="en-US" sz="12000" dirty="0">
-                <a:solidFill>
-                  <a:srgbClr val="EC4F24"/>
-                </a:solidFill>
-                <a:latin typeface="Arial Black" pitchFamily="34" charset="0"/>
-                <a:ea typeface="Arial Black" pitchFamily="34" charset="-122"/>
-                <a:cs typeface="Arial Black" pitchFamily="34" charset="-120"/>
-              </a:rPr>
-              <a:t>05</a:t>
-            </a:r>
-            <a:endParaRPr lang="en-US" sz="12000" dirty="0"/>
-          </a:p>
-        </p:txBody>
-      </p:sp>
-      <p:sp>
-        <p:nvSpPr>
-          <p:cNvPr id="5" name="Título"/>
-          <p:cNvSpPr txBox="1"/>
-          <p:nvPr/>
-        </p:nvSpPr>
-        <p:spPr>
-          <a:xfrm>
-            <a:off x="548640" y="2606040"/>
-            <a:ext cx="7315200" cy="1417320"/>
-          </a:xfrm>
-          <a:prstGeom prst="rect">
-            <a:avLst/>
-          </a:prstGeom>
-          <a:noFill/>
-          <a:ln/>
-        </p:spPr>
-        <p:txBody>
           <a:bodyPr wrap="square" lIns="0" tIns="0" rIns="0" bIns="0" rtlCol="0" anchor="t"/>
           <a:lstStyle/>
           <a:p>
-            <a:pPr indent="0" marL="0">
-              <a:buNone/>
-            </a:pPr>
-            <a:r>
-              <a:rPr lang="en-US" sz="4400" dirty="0">
-                <a:solidFill>
-                  <a:srgbClr val="FFFFFF"/>
-                </a:solidFill>
-                <a:latin typeface="Arial Black" pitchFamily="34" charset="0"/>
-                <a:ea typeface="Arial Black" pitchFamily="34" charset="-122"/>
-                <a:cs typeface="Arial Black" pitchFamily="34" charset="-120"/>
-              </a:rPr>
-              <a:t>El océano</a:t>
-            </a:r>
-            <a:endParaRPr lang="en-US" sz="4400" dirty="0"/>
-          </a:p>
-        </p:txBody>
-      </p:sp>
-      <p:sp>
-        <p:nvSpPr>
-          <p:cNvPr id="6" name="Text 3"/>
-          <p:cNvSpPr txBox="1"/>
-          <p:nvPr/>
-        </p:nvSpPr>
-        <p:spPr>
-          <a:xfrm>
-            <a:off x="548640" y="4114800"/>
-            <a:ext cx="6949440" cy="822960"/>
-          </a:xfrm>
-          <a:prstGeom prst="rect">
-            <a:avLst/>
-          </a:prstGeom>
-          <a:noFill/>
-          <a:ln/>
-        </p:spPr>
-        <p:txBody>
-          <a:bodyPr wrap="square" lIns="0" tIns="0" rIns="0" bIns="0" rtlCol="0" anchor="t"/>
-          <a:lstStyle/>
-          <a:p>
-            <a:pPr indent="0" marL="0">
-              <a:buNone/>
-            </a:pPr>
-            <a:r>
-              <a:rPr lang="en-US" sz="1800" dirty="0">
+            <a:pPr algn="ctr" indent="0" marL="0">
+              <a:buNone/>
+            </a:pPr>
+            <a:r>
+              <a:rPr lang="en-US" sz="1200" dirty="0">
                 <a:solidFill>
                   <a:srgbClr val="C9D4E6"/>
                 </a:solidFill>
@@ -3930,9 +5049,257 @@
                 <a:ea typeface="Arial" pitchFamily="34" charset="-122"/>
                 <a:cs typeface="Arial" pitchFamily="34" charset="-120"/>
               </a:rPr>
-              <a:t>El mundo en 3D que se recorre en barco: islas, personajes, secretos y descuentos</a:t>
-            </a:r>
-            <a:endParaRPr lang="en-US" sz="1800" dirty="0"/>
+              <a:t>Fotos por isla y por evento</a:t>
+            </a:r>
+            <a:endParaRPr lang="en-US" sz="1200" dirty="0"/>
+          </a:p>
+        </p:txBody>
+      </p:sp>
+      <p:sp>
+        <p:nvSpPr>
+          <p:cNvPr id="8" name="Teléfono"/>
+          <p:cNvSpPr/>
+          <p:nvPr/>
+        </p:nvSpPr>
+        <p:spPr>
+          <a:xfrm>
+            <a:off x="5109336" y="1371600"/>
+            <a:ext cx="1973024" cy="4352544"/>
+          </a:xfrm>
+          <a:prstGeom prst="roundRect">
+            <a:avLst>
+              <a:gd name="adj" fmla="val 12977"/>
+            </a:avLst>
+          </a:prstGeom>
+          <a:solidFill>
+            <a:srgbClr val="05080F"/>
+          </a:solidFill>
+          <a:ln w="15875">
+            <a:solidFill>
+              <a:srgbClr val="2F4A72"/>
+            </a:solidFill>
+            <a:prstDash val="solid"/>
+          </a:ln>
+          <a:effectLst>
+            <a:outerShdw sx="100000" sy="100000" kx="0" ky="0" algn="bl" rotWithShape="0" blurRad="127000" dist="50800" dir="5400000">
+              <a:srgbClr val="000000">
+                <a:alpha val="45000"/>
+              </a:srgbClr>
+            </a:outerShdw>
+          </a:effectLst>
+        </p:spPr>
+      </p:sp>
+      <p:sp>
+        <p:nvSpPr>
+          <p:cNvPr id="9" name="Shape 6"/>
+          <p:cNvSpPr/>
+          <p:nvPr/>
+        </p:nvSpPr>
+        <p:spPr>
+          <a:xfrm>
+            <a:off x="5821528" y="1453896"/>
+            <a:ext cx="548640" cy="64008"/>
+          </a:xfrm>
+          <a:prstGeom prst="roundRect">
+            <a:avLst>
+              <a:gd name="adj" fmla="val 50000"/>
+            </a:avLst>
+          </a:prstGeom>
+          <a:solidFill>
+            <a:srgbClr val="2F4A72"/>
+          </a:solidFill>
+          <a:ln w="12700">
+            <a:solidFill>
+              <a:srgbClr val="2F4A72"/>
+            </a:solidFill>
+            <a:prstDash val="solid"/>
+          </a:ln>
+        </p:spPr>
+      </p:sp>
+      <p:pic>
+        <p:nvPicPr>
+          <p:cNvPr id="10" name="Image 1" descr="Captura de la web">    </p:cNvPr>
+          <p:cNvPicPr>
+            <a:picLocks noChangeAspect="1"/>
+          </p:cNvPicPr>
+          <p:nvPr/>
+        </p:nvPicPr>
+        <p:blipFill>
+          <a:blip r:embed="rId2"/>
+          <a:stretch>
+            <a:fillRect/>
+          </a:stretch>
+        </p:blipFill>
+        <p:spPr>
+          <a:xfrm>
+            <a:off x="5191632" y="1591056"/>
+            <a:ext cx="1808432" cy="3913632"/>
+          </a:xfrm>
+          <a:prstGeom prst="rect">
+            <a:avLst/>
+          </a:prstGeom>
+        </p:spPr>
+      </p:pic>
+      <p:sp>
+        <p:nvSpPr>
+          <p:cNvPr id="11" name="Pie"/>
+          <p:cNvSpPr txBox="1"/>
+          <p:nvPr/>
+        </p:nvSpPr>
+        <p:spPr>
+          <a:xfrm>
+            <a:off x="4861624" y="5815584"/>
+            <a:ext cx="2468447" cy="521208"/>
+          </a:xfrm>
+          <a:prstGeom prst="rect">
+            <a:avLst/>
+          </a:prstGeom>
+          <a:noFill/>
+          <a:ln/>
+        </p:spPr>
+        <p:txBody>
+          <a:bodyPr wrap="square" lIns="0" tIns="0" rIns="0" bIns="0" rtlCol="0" anchor="t"/>
+          <a:lstStyle/>
+          <a:p>
+            <a:pPr algn="ctr" indent="0" marL="0">
+              <a:buNone/>
+            </a:pPr>
+            <a:r>
+              <a:rPr lang="en-US" sz="1200" dirty="0">
+                <a:solidFill>
+                  <a:srgbClr val="C9D4E6"/>
+                </a:solidFill>
+                <a:latin typeface="Arial" pitchFamily="34" charset="0"/>
+                <a:ea typeface="Arial" pitchFamily="34" charset="-122"/>
+                <a:cs typeface="Arial" pitchFamily="34" charset="-120"/>
+              </a:rPr>
+              <a:t>Tienda: cada producto rota tres fotos</a:t>
+            </a:r>
+            <a:endParaRPr lang="en-US" sz="1200" dirty="0"/>
+          </a:p>
+        </p:txBody>
+      </p:sp>
+      <p:sp>
+        <p:nvSpPr>
+          <p:cNvPr id="12" name="Teléfono"/>
+          <p:cNvSpPr/>
+          <p:nvPr/>
+        </p:nvSpPr>
+        <p:spPr>
+          <a:xfrm>
+            <a:off x="7852102" y="1371600"/>
+            <a:ext cx="1973024" cy="4352544"/>
+          </a:xfrm>
+          <a:prstGeom prst="roundRect">
+            <a:avLst>
+              <a:gd name="adj" fmla="val 12977"/>
+            </a:avLst>
+          </a:prstGeom>
+          <a:solidFill>
+            <a:srgbClr val="05080F"/>
+          </a:solidFill>
+          <a:ln w="15875">
+            <a:solidFill>
+              <a:srgbClr val="2F4A72"/>
+            </a:solidFill>
+            <a:prstDash val="solid"/>
+          </a:ln>
+          <a:effectLst>
+            <a:outerShdw sx="100000" sy="100000" kx="0" ky="0" algn="bl" rotWithShape="0" blurRad="127000" dist="50800" dir="5400000">
+              <a:srgbClr val="000000">
+                <a:alpha val="45000"/>
+              </a:srgbClr>
+            </a:outerShdw>
+          </a:effectLst>
+        </p:spPr>
+      </p:sp>
+      <p:sp>
+        <p:nvSpPr>
+          <p:cNvPr id="13" name="Shape 9"/>
+          <p:cNvSpPr/>
+          <p:nvPr/>
+        </p:nvSpPr>
+        <p:spPr>
+          <a:xfrm>
+            <a:off x="8564294" y="1453896"/>
+            <a:ext cx="548640" cy="64008"/>
+          </a:xfrm>
+          <a:prstGeom prst="roundRect">
+            <a:avLst>
+              <a:gd name="adj" fmla="val 50000"/>
+            </a:avLst>
+          </a:prstGeom>
+          <a:solidFill>
+            <a:srgbClr val="2F4A72"/>
+          </a:solidFill>
+          <a:ln w="12700">
+            <a:solidFill>
+              <a:srgbClr val="2F4A72"/>
+            </a:solidFill>
+            <a:prstDash val="solid"/>
+          </a:ln>
+        </p:spPr>
+      </p:sp>
+      <p:pic>
+        <p:nvPicPr>
+          <p:cNvPr id="14" name="Image 2" descr="Captura de la web">    </p:cNvPr>
+          <p:cNvPicPr>
+            <a:picLocks noChangeAspect="1"/>
+          </p:cNvPicPr>
+          <p:nvPr/>
+        </p:nvPicPr>
+        <p:blipFill>
+          <a:blip r:embed="rId3"/>
+          <a:stretch>
+            <a:fillRect/>
+          </a:stretch>
+        </p:blipFill>
+        <p:spPr>
+          <a:xfrm>
+            <a:off x="7934398" y="1591056"/>
+            <a:ext cx="1808432" cy="3913632"/>
+          </a:xfrm>
+          <a:prstGeom prst="rect">
+            <a:avLst/>
+          </a:prstGeom>
+        </p:spPr>
+      </p:pic>
+      <p:sp>
+        <p:nvSpPr>
+          <p:cNvPr id="15" name="Pie"/>
+          <p:cNvSpPr txBox="1"/>
+          <p:nvPr/>
+        </p:nvSpPr>
+        <p:spPr>
+          <a:xfrm>
+            <a:off x="7604391" y="5815584"/>
+            <a:ext cx="2468447" cy="521208"/>
+          </a:xfrm>
+          <a:prstGeom prst="rect">
+            <a:avLst/>
+          </a:prstGeom>
+          <a:noFill/>
+          <a:ln/>
+        </p:spPr>
+        <p:txBody>
+          <a:bodyPr wrap="square" lIns="0" tIns="0" rIns="0" bIns="0" rtlCol="0" anchor="t"/>
+          <a:lstStyle/>
+          <a:p>
+            <a:pPr algn="ctr" indent="0" marL="0">
+              <a:buNone/>
+            </a:pPr>
+            <a:r>
+              <a:rPr lang="en-US" sz="1200" dirty="0">
+                <a:solidFill>
+                  <a:srgbClr val="C9D4E6"/>
+                </a:solidFill>
+                <a:latin typeface="Arial" pitchFamily="34" charset="0"/>
+                <a:ea typeface="Arial" pitchFamily="34" charset="-122"/>
+                <a:cs typeface="Arial" pitchFamily="34" charset="-120"/>
+              </a:rPr>
+              <a:t>«Comprar»: sólo a la venta en la fiesta</a:t>
+            </a:r>
+            <a:endParaRPr lang="en-US" sz="1200" dirty="0"/>
           </a:p>
         </p:txBody>
       </p:sp>
@@ -4018,7 +5385,7 @@
         <p:spPr>
           <a:xfrm>
             <a:off x="548640" y="411480"/>
-            <a:ext cx="11094415" cy="274320"/>
+            <a:ext cx="6035040" cy="274320"/>
           </a:xfrm>
           <a:prstGeom prst="rect">
             <a:avLst/>
@@ -4042,7 +5409,7 @@
                 <a:ea typeface="Arial" pitchFamily="34" charset="-122"/>
                 <a:cs typeface="Arial" pitchFamily="34" charset="-120"/>
               </a:rPr>
-              <a:t>05  ·  EL OCÉANO</a:t>
+              <a:t>03  ·  PÁGINAS  ·  LEGALES</a:t>
             </a:r>
             <a:endParaRPr lang="en-US" sz="1100" dirty="0"/>
           </a:p>
@@ -4059,7 +5426,7 @@
         <p:spPr>
           <a:xfrm>
             <a:off x="548640" y="713232"/>
-            <a:ext cx="11094415" cy="960120"/>
+            <a:ext cx="6035040" cy="960120"/>
           </a:xfrm>
           <a:prstGeom prst="rect">
             <a:avLst/>
@@ -4083,7 +5450,7 @@
                 <a:ea typeface="Arial Black" pitchFamily="34" charset="-122"/>
                 <a:cs typeface="Arial Black" pitchFamily="34" charset="-120"/>
               </a:rPr>
-              <a:t>Pendiente</a:t>
+              <a:t>Aviso legal, privacidad y cookies</a:t>
             </a:r>
             <a:endParaRPr lang="en-US" sz="2800" dirty="0"/>
           </a:p>
@@ -4098,7 +5465,7 @@
         <p:spPr>
           <a:xfrm>
             <a:off x="548640" y="1828800"/>
-            <a:ext cx="6949440" cy="4251960"/>
+            <a:ext cx="6035040" cy="2880360"/>
           </a:xfrm>
           <a:prstGeom prst="rect">
             <a:avLst/>
@@ -4112,7 +5479,7 @@
           <a:p>
             <a:pPr indent="0" marL="0">
               <a:lnSpc>
-                <a:spcPct val="105000"/>
+                <a:spcPct val="110000"/>
               </a:lnSpc>
               <a:spcAft>
                 <a:spcPts val="1000"/>
@@ -4128,40 +5495,146 @@
                 <a:ea typeface="Arial" pitchFamily="34" charset="-122"/>
                 <a:cs typeface="Arial" pitchFamily="34" charset="-120"/>
               </a:rPr>
-              <a:t>Esta parte está por escribir: la escribe la tarea T208.</a:t>
+              <a:t>Tres páginas enlazadas desde el pie: aviso legal y condiciones de uso, privacidad y cookies. Explican quién está detrás, qué datos se guardan y que no hay cookies de publicidad.</a:t>
             </a:r>
             <a:endParaRPr lang="en-US" sz="1600" dirty="0"/>
           </a:p>
-        </p:txBody>
-      </p:sp>
-      <p:sp>
-        <p:nvSpPr>
-          <p:cNvPr id="5" name="Shape 3"/>
+          <a:p>
+            <a:pPr indent="0" marL="0">
+              <a:lnSpc>
+                <a:spcPct val="110000"/>
+              </a:lnSpc>
+              <a:spcAft>
+                <a:spcPts val="1000"/>
+              </a:spcAft>
+              <a:buNone/>
+            </a:pPr>
+            <a:r>
+              <a:rPr lang="en-US" sz="1600" dirty="0">
+                <a:solidFill>
+                  <a:srgbClr val="FFFFFF"/>
+                </a:solidFill>
+                <a:latin typeface="Arial" pitchFamily="34" charset="0"/>
+                <a:ea typeface="Arial" pitchFamily="34" charset="-122"/>
+                <a:cs typeface="Arial" pitchFamily="34" charset="-120"/>
+              </a:rPr>
+              <a:t>Hoy el titular y sus datos son inventados, y cada página lo avisa arriba en un recuadro. Con cuentas de usuario, la privacidad explica además qué se recoge y para qué.</a:t>
+            </a:r>
+            <a:endParaRPr lang="en-US" sz="1600" dirty="0"/>
+          </a:p>
+        </p:txBody>
+      </p:sp>
+      <p:sp>
+        <p:nvSpPr>
+          <p:cNvPr id="5" name="Destacado"/>
+          <p:cNvSpPr txBox="1"/>
+          <p:nvPr/>
+        </p:nvSpPr>
+        <p:spPr>
+          <a:xfrm>
+            <a:off x="548640" y="4937760"/>
+            <a:ext cx="6035040" cy="1051560"/>
+          </a:xfrm>
+          <a:prstGeom prst="roundRect">
+            <a:avLst>
+              <a:gd name="adj" fmla="val 10435"/>
+            </a:avLst>
+          </a:prstGeom>
+          <a:solidFill>
+            <a:srgbClr val="1A3052"/>
+          </a:solidFill>
+          <a:ln w="12700">
+            <a:solidFill>
+              <a:srgbClr val="2F4A72"/>
+            </a:solidFill>
+          </a:ln>
+        </p:spPr>
+        <p:txBody>
+          <a:bodyPr wrap="square" lIns="127000" tIns="203200" rIns="203200" bIns="127000" rtlCol="0" anchor="ctr"/>
+          <a:lstStyle/>
+          <a:p>
+            <a:pPr indent="0" marL="0">
+              <a:buNone/>
+            </a:pPr>
+            <a:r>
+              <a:rPr lang="en-US" sz="1700" b="1" dirty="0">
+                <a:solidFill>
+                  <a:srgbClr val="FFFFFF"/>
+                </a:solidFill>
+                <a:latin typeface="Arial" pitchFamily="34" charset="0"/>
+                <a:ea typeface="Arial" pitchFamily="34" charset="-122"/>
+                <a:cs typeface="Arial" pitchFamily="34" charset="-120"/>
+              </a:rPr>
+              <a:t>Sin datos legales reales y revisados no se puede publicar.</a:t>
+            </a:r>
+            <a:endParaRPr lang="en-US" sz="1700" dirty="0"/>
+          </a:p>
+        </p:txBody>
+      </p:sp>
+      <p:sp>
+        <p:nvSpPr>
+          <p:cNvPr id="6" name="Teléfono"/>
           <p:cNvSpPr/>
           <p:nvPr/>
         </p:nvSpPr>
         <p:spPr>
           <a:xfrm>
-            <a:off x="8229600" y="1828800"/>
-            <a:ext cx="3383280" cy="3383280"/>
-          </a:xfrm>
-          <a:prstGeom prst="ellipse">
-            <a:avLst/>
+            <a:off x="7984387" y="411480"/>
+            <a:ext cx="2623721" cy="5760720"/>
+          </a:xfrm>
+          <a:prstGeom prst="roundRect">
+            <a:avLst>
+              <a:gd name="adj" fmla="val 9758"/>
+            </a:avLst>
           </a:prstGeom>
           <a:solidFill>
-            <a:srgbClr val="07101F"/>
+            <a:srgbClr val="05080F"/>
           </a:solidFill>
-          <a:ln w="25400">
+          <a:ln w="15875">
             <a:solidFill>
               <a:srgbClr val="2F4A72"/>
             </a:solidFill>
             <a:prstDash val="solid"/>
           </a:ln>
+          <a:effectLst>
+            <a:outerShdw sx="100000" sy="100000" kx="0" ky="0" algn="bl" rotWithShape="0" blurRad="127000" dist="50800" dir="5400000">
+              <a:srgbClr val="000000">
+                <a:alpha val="45000"/>
+              </a:srgbClr>
+            </a:outerShdw>
+          </a:effectLst>
+        </p:spPr>
+      </p:sp>
+      <p:sp>
+        <p:nvSpPr>
+          <p:cNvPr id="7" name="Shape 5"/>
+          <p:cNvSpPr/>
+          <p:nvPr/>
+        </p:nvSpPr>
+        <p:spPr>
+          <a:xfrm>
+            <a:off x="9021928" y="493776"/>
+            <a:ext cx="548640" cy="64008"/>
+          </a:xfrm>
+          <a:prstGeom prst="roundRect">
+            <a:avLst>
+              <a:gd name="adj" fmla="val 50000"/>
+            </a:avLst>
+          </a:prstGeom>
+          <a:solidFill>
+            <a:srgbClr val="2F4A72"/>
+          </a:solidFill>
+          <a:ln w="12700">
+            <a:solidFill>
+              <a:srgbClr val="2F4A72"/>
+            </a:solidFill>
+            <a:prstDash val="solid"/>
+          </a:ln>
         </p:spPr>
       </p:sp>
       <p:pic>
         <p:nvPicPr>
-          <p:cNvPr id="6" name="Image 0" descr="La mascota de BOIA">    </p:cNvPr>
+          <p:cNvPr id="8" name="Image 0" descr="Captura de la web">    </p:cNvPr>
           <p:cNvPicPr>
             <a:picLocks noChangeAspect="1"/>
           </p:cNvPicPr>
@@ -4175,8 +5648,8 @@
         </p:blipFill>
         <p:spPr>
           <a:xfrm>
-            <a:off x="8642359" y="2240280"/>
-            <a:ext cx="2557762" cy="2560320"/>
+            <a:off x="8066683" y="630936"/>
+            <a:ext cx="2459129" cy="5321808"/>
           </a:xfrm>
           <a:prstGeom prst="rect">
             <a:avLst/>
@@ -4258,167 +5731,1032 @@
       </p:grpSpPr>
       <p:sp>
         <p:nvSpPr>
-          <p:cNvPr id="2" name="Shape 0"/>
+          <p:cNvPr id="2" name="Sección"/>
+          <p:cNvSpPr txBox="1"/>
+          <p:nvPr/>
+        </p:nvSpPr>
+        <p:spPr>
+          <a:xfrm>
+            <a:off x="548640" y="411480"/>
+            <a:ext cx="11094415" cy="274320"/>
+          </a:xfrm>
+          <a:prstGeom prst="rect">
+            <a:avLst/>
+          </a:prstGeom>
+          <a:noFill/>
+          <a:ln/>
+        </p:spPr>
+        <p:txBody>
+          <a:bodyPr wrap="square" lIns="0" tIns="0" rIns="0" bIns="0" rtlCol="0" anchor="ctr"/>
+          <a:lstStyle/>
+          <a:p>
+            <a:pPr indent="0" marL="0">
+              <a:buNone/>
+            </a:pPr>
+            <a:r>
+              <a:rPr lang="en-US" sz="1100" b="1" spc="200" kern="0" dirty="0">
+                <a:solidFill>
+                  <a:srgbClr val="EC4F24"/>
+                </a:solidFill>
+                <a:latin typeface="Arial" pitchFamily="34" charset="0"/>
+                <a:ea typeface="Arial" pitchFamily="34" charset="-122"/>
+                <a:cs typeface="Arial" pitchFamily="34" charset="-120"/>
+              </a:rPr>
+              <a:t>03  ·  PÁGINAS  ·  EVENTOS Y ARTISTAS</a:t>
+            </a:r>
+            <a:endParaRPr lang="en-US" sz="1100" dirty="0"/>
+          </a:p>
+        </p:txBody>
+      </p:sp>
+      <p:sp>
+        <p:nvSpPr>
+          <p:cNvPr id="3" name="Text 0"/>
           <p:cNvSpPr/>
-          <p:nvPr/>
-        </p:nvSpPr>
-        <p:spPr>
-          <a:xfrm>
-            <a:off x="8001000" y="1325880"/>
-            <a:ext cx="3749040" cy="3749040"/>
-          </a:xfrm>
-          <a:prstGeom prst="ellipse">
-            <a:avLst/>
+          <p:nvPr>
+            <p:ph idx="101" type="title" hasCustomPrompt="1"/>
+          </p:nvPr>
+        </p:nvSpPr>
+        <p:spPr>
+          <a:xfrm>
+            <a:off x="548640" y="713232"/>
+            <a:ext cx="11094415" cy="960120"/>
+          </a:xfrm>
+          <a:prstGeom prst="rect">
+            <a:avLst/>
+          </a:prstGeom>
+          <a:noFill/>
+          <a:ln/>
+        </p:spPr>
+        <p:txBody>
+          <a:bodyPr wrap="square" lIns="0" tIns="0" rIns="0" bIns="0" rtlCol="0" anchor="t"/>
+          <a:lstStyle/>
+          <a:p>
+            <a:pPr algn="l" indent="0" marL="0">
+              <a:buNone/>
+            </a:pPr>
+            <a:r>
+              <a:rPr lang="en-US" sz="2800" dirty="0">
+                <a:solidFill>
+                  <a:srgbClr val="FFFFFF"/>
+                </a:solidFill>
+                <a:latin typeface="Arial Black" pitchFamily="34" charset="0"/>
+                <a:ea typeface="Arial Black" pitchFamily="34" charset="-122"/>
+                <a:cs typeface="Arial Black" pitchFamily="34" charset="-120"/>
+              </a:rPr>
+              <a:t>Qué falta</a:t>
+            </a:r>
+            <a:endParaRPr lang="en-US" sz="2800" dirty="0"/>
+          </a:p>
+        </p:txBody>
+      </p:sp>
+      <p:sp>
+        <p:nvSpPr>
+          <p:cNvPr id="4" name="Text 2"/>
+          <p:cNvSpPr txBox="1"/>
+          <p:nvPr/>
+        </p:nvSpPr>
+        <p:spPr>
+          <a:xfrm>
+            <a:off x="548640" y="1234440"/>
+            <a:ext cx="11094415" cy="320040"/>
+          </a:xfrm>
+          <a:prstGeom prst="rect">
+            <a:avLst/>
+          </a:prstGeom>
+          <a:noFill/>
+          <a:ln/>
+        </p:spPr>
+        <p:txBody>
+          <a:bodyPr wrap="square" lIns="0" tIns="0" rIns="0" bIns="0" rtlCol="0" anchor="ctr"/>
+          <a:lstStyle/>
+          <a:p>
+            <a:pPr indent="0" marL="0">
+              <a:buNone/>
+            </a:pPr>
+            <a:r>
+              <a:rPr lang="en-US" sz="1300" dirty="0">
+                <a:solidFill>
+                  <a:srgbClr val="C9D4E6"/>
+                </a:solidFill>
+                <a:latin typeface="Arial" pitchFamily="34" charset="0"/>
+                <a:ea typeface="Arial" pitchFamily="34" charset="-122"/>
+                <a:cs typeface="Arial" pitchFamily="34" charset="-120"/>
+              </a:rPr>
+              <a:t>4 necesarios para salir   ·   2 pueden esperar</a:t>
+            </a:r>
+            <a:endParaRPr lang="en-US" sz="1300" dirty="0"/>
+          </a:p>
+        </p:txBody>
+      </p:sp>
+      <p:sp>
+        <p:nvSpPr>
+          <p:cNvPr id="5" name="Fila"/>
+          <p:cNvSpPr/>
+          <p:nvPr/>
+        </p:nvSpPr>
+        <p:spPr>
+          <a:xfrm>
+            <a:off x="548640" y="1737360"/>
+            <a:ext cx="11094415" cy="640080"/>
+          </a:xfrm>
+          <a:prstGeom prst="roundRect">
+            <a:avLst>
+              <a:gd name="adj" fmla="val 14286"/>
+            </a:avLst>
+          </a:prstGeom>
+          <a:solidFill>
+            <a:srgbClr val="1A3052"/>
+          </a:solidFill>
+          <a:ln w="12700">
+            <a:solidFill>
+              <a:srgbClr val="1A3052"/>
+            </a:solidFill>
+            <a:prstDash val="solid"/>
+          </a:ln>
+        </p:spPr>
+      </p:sp>
+      <p:sp>
+        <p:nvSpPr>
+          <p:cNvPr id="6" name="Necesario para salir"/>
+          <p:cNvSpPr txBox="1"/>
+          <p:nvPr/>
+        </p:nvSpPr>
+        <p:spPr>
+          <a:xfrm>
+            <a:off x="731520" y="1883664"/>
+            <a:ext cx="2148840" cy="347472"/>
+          </a:xfrm>
+          <a:prstGeom prst="roundRect">
+            <a:avLst>
+              <a:gd name="adj" fmla="val 50000"/>
+            </a:avLst>
+          </a:prstGeom>
+          <a:solidFill>
+            <a:srgbClr val="EC4F24"/>
+          </a:solidFill>
+          <a:ln w="19050">
+            <a:solidFill>
+              <a:srgbClr val="EC4F24"/>
+            </a:solidFill>
+          </a:ln>
+        </p:spPr>
+        <p:txBody>
+          <a:bodyPr wrap="square" lIns="0" tIns="0" rIns="0" bIns="0" rtlCol="0" anchor="ctr"/>
+          <a:lstStyle/>
+          <a:p>
+            <a:pPr algn="ctr" indent="0" marL="0">
+              <a:buNone/>
+            </a:pPr>
+            <a:r>
+              <a:rPr lang="en-US" sz="1100" b="1" dirty="0">
+                <a:solidFill>
+                  <a:srgbClr val="FFFFFF"/>
+                </a:solidFill>
+                <a:latin typeface="Arial" pitchFamily="34" charset="0"/>
+                <a:ea typeface="Arial" pitchFamily="34" charset="-122"/>
+                <a:cs typeface="Arial" pitchFamily="34" charset="-120"/>
+              </a:rPr>
+              <a:t>Necesario para salir</a:t>
+            </a:r>
+            <a:endParaRPr lang="en-US" sz="1100" dirty="0"/>
+          </a:p>
+        </p:txBody>
+      </p:sp>
+      <p:sp>
+        <p:nvSpPr>
+          <p:cNvPr id="7" name="Text 5"/>
+          <p:cNvSpPr txBox="1"/>
+          <p:nvPr/>
+        </p:nvSpPr>
+        <p:spPr>
+          <a:xfrm>
+            <a:off x="3154680" y="1737360"/>
+            <a:ext cx="6705295" cy="640080"/>
+          </a:xfrm>
+          <a:prstGeom prst="rect">
+            <a:avLst/>
+          </a:prstGeom>
+          <a:noFill/>
+          <a:ln/>
+        </p:spPr>
+        <p:txBody>
+          <a:bodyPr wrap="square" lIns="0" tIns="0" rIns="0" bIns="0" rtlCol="0" anchor="ctr"/>
+          <a:lstStyle/>
+          <a:p>
+            <a:pPr indent="0" marL="0">
+              <a:buNone/>
+            </a:pPr>
+            <a:r>
+              <a:rPr lang="en-US" sz="1500" dirty="0">
+                <a:solidFill>
+                  <a:srgbClr val="FFFFFF"/>
+                </a:solidFill>
+                <a:latin typeface="Arial" pitchFamily="34" charset="0"/>
+                <a:ea typeface="Arial" pitchFamily="34" charset="-122"/>
+                <a:cs typeface="Arial" pitchFamily="34" charset="-120"/>
+              </a:rPr>
+              <a:t>Cartel de Halloween (y de SONIDO y Nochevieja cuando existan)</a:t>
+            </a:r>
+            <a:endParaRPr lang="en-US" sz="1500" dirty="0"/>
+          </a:p>
+        </p:txBody>
+      </p:sp>
+      <p:sp>
+        <p:nvSpPr>
+          <p:cNvPr id="8" name="Quién"/>
+          <p:cNvSpPr txBox="1"/>
+          <p:nvPr/>
+        </p:nvSpPr>
+        <p:spPr>
+          <a:xfrm>
+            <a:off x="9905695" y="1737360"/>
+            <a:ext cx="1554480" cy="640080"/>
+          </a:xfrm>
+          <a:prstGeom prst="rect">
+            <a:avLst/>
+          </a:prstGeom>
+          <a:noFill/>
+          <a:ln/>
+        </p:spPr>
+        <p:txBody>
+          <a:bodyPr wrap="square" lIns="0" tIns="0" rIns="0" bIns="0" rtlCol="0" anchor="ctr"/>
+          <a:lstStyle/>
+          <a:p>
+            <a:pPr algn="r" indent="0" marL="0">
+              <a:buNone/>
+            </a:pPr>
+            <a:r>
+              <a:rPr lang="en-US" sz="1200" b="1" dirty="0">
+                <a:solidFill>
+                  <a:srgbClr val="C9D4E6"/>
+                </a:solidFill>
+                <a:latin typeface="Arial" pitchFamily="34" charset="0"/>
+                <a:ea typeface="Arial" pitchFamily="34" charset="-122"/>
+                <a:cs typeface="Arial" pitchFamily="34" charset="-120"/>
+              </a:rPr>
+              <a:t>Álvaro</a:t>
+            </a:r>
+            <a:endParaRPr lang="en-US" sz="1200" dirty="0"/>
+          </a:p>
+        </p:txBody>
+      </p:sp>
+      <p:sp>
+        <p:nvSpPr>
+          <p:cNvPr id="9" name="Fila"/>
+          <p:cNvSpPr/>
+          <p:nvPr/>
+        </p:nvSpPr>
+        <p:spPr>
+          <a:xfrm>
+            <a:off x="548640" y="2505456"/>
+            <a:ext cx="11094415" cy="640080"/>
+          </a:xfrm>
+          <a:prstGeom prst="roundRect">
+            <a:avLst>
+              <a:gd name="adj" fmla="val 14286"/>
+            </a:avLst>
+          </a:prstGeom>
+          <a:solidFill>
+            <a:srgbClr val="1A3052"/>
+          </a:solidFill>
+          <a:ln w="12700">
+            <a:solidFill>
+              <a:srgbClr val="1A3052"/>
+            </a:solidFill>
+            <a:prstDash val="solid"/>
+          </a:ln>
+        </p:spPr>
+      </p:sp>
+      <p:sp>
+        <p:nvSpPr>
+          <p:cNvPr id="10" name="Necesario para salir"/>
+          <p:cNvSpPr txBox="1"/>
+          <p:nvPr/>
+        </p:nvSpPr>
+        <p:spPr>
+          <a:xfrm>
+            <a:off x="731520" y="2651760"/>
+            <a:ext cx="2148840" cy="347472"/>
+          </a:xfrm>
+          <a:prstGeom prst="roundRect">
+            <a:avLst>
+              <a:gd name="adj" fmla="val 50000"/>
+            </a:avLst>
+          </a:prstGeom>
+          <a:solidFill>
+            <a:srgbClr val="EC4F24"/>
+          </a:solidFill>
+          <a:ln w="19050">
+            <a:solidFill>
+              <a:srgbClr val="EC4F24"/>
+            </a:solidFill>
+          </a:ln>
+        </p:spPr>
+        <p:txBody>
+          <a:bodyPr wrap="square" lIns="0" tIns="0" rIns="0" bIns="0" rtlCol="0" anchor="ctr"/>
+          <a:lstStyle/>
+          <a:p>
+            <a:pPr algn="ctr" indent="0" marL="0">
+              <a:buNone/>
+            </a:pPr>
+            <a:r>
+              <a:rPr lang="en-US" sz="1100" b="1" dirty="0">
+                <a:solidFill>
+                  <a:srgbClr val="FFFFFF"/>
+                </a:solidFill>
+                <a:latin typeface="Arial" pitchFamily="34" charset="0"/>
+                <a:ea typeface="Arial" pitchFamily="34" charset="-122"/>
+                <a:cs typeface="Arial" pitchFamily="34" charset="-120"/>
+              </a:rPr>
+              <a:t>Necesario para salir</a:t>
+            </a:r>
+            <a:endParaRPr lang="en-US" sz="1100" dirty="0"/>
+          </a:p>
+        </p:txBody>
+      </p:sp>
+      <p:sp>
+        <p:nvSpPr>
+          <p:cNvPr id="11" name="Text 9"/>
+          <p:cNvSpPr txBox="1"/>
+          <p:nvPr/>
+        </p:nvSpPr>
+        <p:spPr>
+          <a:xfrm>
+            <a:off x="3154680" y="2505456"/>
+            <a:ext cx="6705295" cy="640080"/>
+          </a:xfrm>
+          <a:prstGeom prst="rect">
+            <a:avLst/>
+          </a:prstGeom>
+          <a:noFill/>
+          <a:ln/>
+        </p:spPr>
+        <p:txBody>
+          <a:bodyPr wrap="square" lIns="0" tIns="0" rIns="0" bIns="0" rtlCol="0" anchor="ctr"/>
+          <a:lstStyle/>
+          <a:p>
+            <a:pPr indent="0" marL="0">
+              <a:buNone/>
+            </a:pPr>
+            <a:r>
+              <a:rPr lang="en-US" sz="1500" dirty="0">
+                <a:solidFill>
+                  <a:srgbClr val="FFFFFF"/>
+                </a:solidFill>
+                <a:latin typeface="Arial" pitchFamily="34" charset="0"/>
+                <a:ea typeface="Arial" pitchFamily="34" charset="-122"/>
+                <a:cs typeface="Arial" pitchFamily="34" charset="-120"/>
+              </a:rPr>
+              <a:t>Confirmar horas, precios y lugar de cada evento (hoy son de muestra)</a:t>
+            </a:r>
+            <a:endParaRPr lang="en-US" sz="1500" dirty="0"/>
+          </a:p>
+        </p:txBody>
+      </p:sp>
+      <p:sp>
+        <p:nvSpPr>
+          <p:cNvPr id="12" name="Quién"/>
+          <p:cNvSpPr txBox="1"/>
+          <p:nvPr/>
+        </p:nvSpPr>
+        <p:spPr>
+          <a:xfrm>
+            <a:off x="9905695" y="2505456"/>
+            <a:ext cx="1554480" cy="640080"/>
+          </a:xfrm>
+          <a:prstGeom prst="rect">
+            <a:avLst/>
+          </a:prstGeom>
+          <a:noFill/>
+          <a:ln/>
+        </p:spPr>
+        <p:txBody>
+          <a:bodyPr wrap="square" lIns="0" tIns="0" rIns="0" bIns="0" rtlCol="0" anchor="ctr"/>
+          <a:lstStyle/>
+          <a:p>
+            <a:pPr algn="r" indent="0" marL="0">
+              <a:buNone/>
+            </a:pPr>
+            <a:r>
+              <a:rPr lang="en-US" sz="1200" b="1" dirty="0">
+                <a:solidFill>
+                  <a:srgbClr val="C9D4E6"/>
+                </a:solidFill>
+                <a:latin typeface="Arial" pitchFamily="34" charset="0"/>
+                <a:ea typeface="Arial" pitchFamily="34" charset="-122"/>
+                <a:cs typeface="Arial" pitchFamily="34" charset="-120"/>
+              </a:rPr>
+              <a:t>Álvaro</a:t>
+            </a:r>
+            <a:endParaRPr lang="en-US" sz="1200" dirty="0"/>
+          </a:p>
+        </p:txBody>
+      </p:sp>
+      <p:sp>
+        <p:nvSpPr>
+          <p:cNvPr id="13" name="Fila"/>
+          <p:cNvSpPr/>
+          <p:nvPr/>
+        </p:nvSpPr>
+        <p:spPr>
+          <a:xfrm>
+            <a:off x="548640" y="3273552"/>
+            <a:ext cx="11094415" cy="640080"/>
+          </a:xfrm>
+          <a:prstGeom prst="roundRect">
+            <a:avLst>
+              <a:gd name="adj" fmla="val 14286"/>
+            </a:avLst>
+          </a:prstGeom>
+          <a:solidFill>
+            <a:srgbClr val="1A3052"/>
+          </a:solidFill>
+          <a:ln w="12700">
+            <a:solidFill>
+              <a:srgbClr val="1A3052"/>
+            </a:solidFill>
+            <a:prstDash val="solid"/>
+          </a:ln>
+        </p:spPr>
+      </p:sp>
+      <p:sp>
+        <p:nvSpPr>
+          <p:cNvPr id="14" name="Necesario para salir"/>
+          <p:cNvSpPr txBox="1"/>
+          <p:nvPr/>
+        </p:nvSpPr>
+        <p:spPr>
+          <a:xfrm>
+            <a:off x="731520" y="3419856"/>
+            <a:ext cx="2148840" cy="347472"/>
+          </a:xfrm>
+          <a:prstGeom prst="roundRect">
+            <a:avLst>
+              <a:gd name="adj" fmla="val 50000"/>
+            </a:avLst>
+          </a:prstGeom>
+          <a:solidFill>
+            <a:srgbClr val="EC4F24"/>
+          </a:solidFill>
+          <a:ln w="19050">
+            <a:solidFill>
+              <a:srgbClr val="EC4F24"/>
+            </a:solidFill>
+          </a:ln>
+        </p:spPr>
+        <p:txBody>
+          <a:bodyPr wrap="square" lIns="0" tIns="0" rIns="0" bIns="0" rtlCol="0" anchor="ctr"/>
+          <a:lstStyle/>
+          <a:p>
+            <a:pPr algn="ctr" indent="0" marL="0">
+              <a:buNone/>
+            </a:pPr>
+            <a:r>
+              <a:rPr lang="en-US" sz="1100" b="1" dirty="0">
+                <a:solidFill>
+                  <a:srgbClr val="FFFFFF"/>
+                </a:solidFill>
+                <a:latin typeface="Arial" pitchFamily="34" charset="0"/>
+                <a:ea typeface="Arial" pitchFamily="34" charset="-122"/>
+                <a:cs typeface="Arial" pitchFamily="34" charset="-120"/>
+              </a:rPr>
+              <a:t>Necesario para salir</a:t>
+            </a:r>
+            <a:endParaRPr lang="en-US" sz="1100" dirty="0"/>
+          </a:p>
+        </p:txBody>
+      </p:sp>
+      <p:sp>
+        <p:nvSpPr>
+          <p:cNvPr id="15" name="Text 13"/>
+          <p:cNvSpPr txBox="1"/>
+          <p:nvPr/>
+        </p:nvSpPr>
+        <p:spPr>
+          <a:xfrm>
+            <a:off x="3154680" y="3273552"/>
+            <a:ext cx="6705295" cy="640080"/>
+          </a:xfrm>
+          <a:prstGeom prst="rect">
+            <a:avLst/>
+          </a:prstGeom>
+          <a:noFill/>
+          <a:ln/>
+        </p:spPr>
+        <p:txBody>
+          <a:bodyPr wrap="square" lIns="0" tIns="0" rIns="0" bIns="0" rtlCol="0" anchor="ctr"/>
+          <a:lstStyle/>
+          <a:p>
+            <a:pPr indent="0" marL="0">
+              <a:buNone/>
+            </a:pPr>
+            <a:r>
+              <a:rPr lang="en-US" sz="1500" dirty="0">
+                <a:solidFill>
+                  <a:srgbClr val="FFFFFF"/>
+                </a:solidFill>
+                <a:latin typeface="Arial" pitchFamily="34" charset="0"/>
+                <a:ea typeface="Arial" pitchFamily="34" charset="-122"/>
+                <a:cs typeface="Arial" pitchFamily="34" charset="-120"/>
+              </a:rPr>
+              <a:t>Elegir la ticketera y poner el enlace real de compra de Nochevieja</a:t>
+            </a:r>
+            <a:endParaRPr lang="en-US" sz="1500" dirty="0"/>
+          </a:p>
+        </p:txBody>
+      </p:sp>
+      <p:sp>
+        <p:nvSpPr>
+          <p:cNvPr id="16" name="Quién"/>
+          <p:cNvSpPr txBox="1"/>
+          <p:nvPr/>
+        </p:nvSpPr>
+        <p:spPr>
+          <a:xfrm>
+            <a:off x="9905695" y="3273552"/>
+            <a:ext cx="1554480" cy="640080"/>
+          </a:xfrm>
+          <a:prstGeom prst="rect">
+            <a:avLst/>
+          </a:prstGeom>
+          <a:noFill/>
+          <a:ln/>
+        </p:spPr>
+        <p:txBody>
+          <a:bodyPr wrap="square" lIns="0" tIns="0" rIns="0" bIns="0" rtlCol="0" anchor="ctr"/>
+          <a:lstStyle/>
+          <a:p>
+            <a:pPr algn="r" indent="0" marL="0">
+              <a:buNone/>
+            </a:pPr>
+            <a:r>
+              <a:rPr lang="en-US" sz="1200" b="1" dirty="0">
+                <a:solidFill>
+                  <a:srgbClr val="C9D4E6"/>
+                </a:solidFill>
+                <a:latin typeface="Arial" pitchFamily="34" charset="0"/>
+                <a:ea typeface="Arial" pitchFamily="34" charset="-122"/>
+                <a:cs typeface="Arial" pitchFamily="34" charset="-120"/>
+              </a:rPr>
+              <a:t>Álvaro</a:t>
+            </a:r>
+            <a:endParaRPr lang="en-US" sz="1200" dirty="0"/>
+          </a:p>
+        </p:txBody>
+      </p:sp>
+      <p:sp>
+        <p:nvSpPr>
+          <p:cNvPr id="17" name="Fila"/>
+          <p:cNvSpPr/>
+          <p:nvPr/>
+        </p:nvSpPr>
+        <p:spPr>
+          <a:xfrm>
+            <a:off x="548640" y="4041648"/>
+            <a:ext cx="11094415" cy="640080"/>
+          </a:xfrm>
+          <a:prstGeom prst="roundRect">
+            <a:avLst>
+              <a:gd name="adj" fmla="val 14286"/>
+            </a:avLst>
+          </a:prstGeom>
+          <a:solidFill>
+            <a:srgbClr val="1A3052"/>
+          </a:solidFill>
+          <a:ln w="12700">
+            <a:solidFill>
+              <a:srgbClr val="1A3052"/>
+            </a:solidFill>
+            <a:prstDash val="solid"/>
+          </a:ln>
+        </p:spPr>
+      </p:sp>
+      <p:sp>
+        <p:nvSpPr>
+          <p:cNvPr id="18" name="Necesario para salir"/>
+          <p:cNvSpPr txBox="1"/>
+          <p:nvPr/>
+        </p:nvSpPr>
+        <p:spPr>
+          <a:xfrm>
+            <a:off x="731520" y="4187952"/>
+            <a:ext cx="2148840" cy="347472"/>
+          </a:xfrm>
+          <a:prstGeom prst="roundRect">
+            <a:avLst>
+              <a:gd name="adj" fmla="val 50000"/>
+            </a:avLst>
+          </a:prstGeom>
+          <a:solidFill>
+            <a:srgbClr val="EC4F24"/>
+          </a:solidFill>
+          <a:ln w="19050">
+            <a:solidFill>
+              <a:srgbClr val="EC4F24"/>
+            </a:solidFill>
+          </a:ln>
+        </p:spPr>
+        <p:txBody>
+          <a:bodyPr wrap="square" lIns="0" tIns="0" rIns="0" bIns="0" rtlCol="0" anchor="ctr"/>
+          <a:lstStyle/>
+          <a:p>
+            <a:pPr algn="ctr" indent="0" marL="0">
+              <a:buNone/>
+            </a:pPr>
+            <a:r>
+              <a:rPr lang="en-US" sz="1100" b="1" dirty="0">
+                <a:solidFill>
+                  <a:srgbClr val="FFFFFF"/>
+                </a:solidFill>
+                <a:latin typeface="Arial" pitchFamily="34" charset="0"/>
+                <a:ea typeface="Arial" pitchFamily="34" charset="-122"/>
+                <a:cs typeface="Arial" pitchFamily="34" charset="-120"/>
+              </a:rPr>
+              <a:t>Necesario para salir</a:t>
+            </a:r>
+            <a:endParaRPr lang="en-US" sz="1100" dirty="0"/>
+          </a:p>
+        </p:txBody>
+      </p:sp>
+      <p:sp>
+        <p:nvSpPr>
+          <p:cNvPr id="19" name="Text 17"/>
+          <p:cNvSpPr txBox="1"/>
+          <p:nvPr/>
+        </p:nvSpPr>
+        <p:spPr>
+          <a:xfrm>
+            <a:off x="3154680" y="4041648"/>
+            <a:ext cx="6705295" cy="640080"/>
+          </a:xfrm>
+          <a:prstGeom prst="rect">
+            <a:avLst/>
+          </a:prstGeom>
+          <a:noFill/>
+          <a:ln/>
+        </p:spPr>
+        <p:txBody>
+          <a:bodyPr wrap="square" lIns="0" tIns="0" rIns="0" bIns="0" rtlCol="0" anchor="ctr"/>
+          <a:lstStyle/>
+          <a:p>
+            <a:pPr indent="0" marL="0">
+              <a:buNone/>
+            </a:pPr>
+            <a:r>
+              <a:rPr lang="en-US" sz="1500" dirty="0">
+                <a:solidFill>
+                  <a:srgbClr val="FFFFFF"/>
+                </a:solidFill>
+                <a:latin typeface="Arial" pitchFamily="34" charset="0"/>
+                <a:ea typeface="Arial" pitchFamily="34" charset="-122"/>
+                <a:cs typeface="Arial" pitchFamily="34" charset="-120"/>
+              </a:rPr>
+              <a:t>Aprobar la taquilla de Halloween y SONIDO: el texto y los 2 € de descuento con Carnet</a:t>
+            </a:r>
+            <a:endParaRPr lang="en-US" sz="1500" dirty="0"/>
+          </a:p>
+        </p:txBody>
+      </p:sp>
+      <p:sp>
+        <p:nvSpPr>
+          <p:cNvPr id="20" name="Quién"/>
+          <p:cNvSpPr txBox="1"/>
+          <p:nvPr/>
+        </p:nvSpPr>
+        <p:spPr>
+          <a:xfrm>
+            <a:off x="9905695" y="4041648"/>
+            <a:ext cx="1554480" cy="640080"/>
+          </a:xfrm>
+          <a:prstGeom prst="rect">
+            <a:avLst/>
+          </a:prstGeom>
+          <a:noFill/>
+          <a:ln/>
+        </p:spPr>
+        <p:txBody>
+          <a:bodyPr wrap="square" lIns="0" tIns="0" rIns="0" bIns="0" rtlCol="0" anchor="ctr"/>
+          <a:lstStyle/>
+          <a:p>
+            <a:pPr algn="r" indent="0" marL="0">
+              <a:buNone/>
+            </a:pPr>
+            <a:r>
+              <a:rPr lang="en-US" sz="1200" b="1" dirty="0">
+                <a:solidFill>
+                  <a:srgbClr val="C9D4E6"/>
+                </a:solidFill>
+                <a:latin typeface="Arial" pitchFamily="34" charset="0"/>
+                <a:ea typeface="Arial" pitchFamily="34" charset="-122"/>
+                <a:cs typeface="Arial" pitchFamily="34" charset="-120"/>
+              </a:rPr>
+              <a:t>Álvaro y socios</a:t>
+            </a:r>
+            <a:endParaRPr lang="en-US" sz="1200" dirty="0"/>
+          </a:p>
+        </p:txBody>
+      </p:sp>
+      <p:sp>
+        <p:nvSpPr>
+          <p:cNvPr id="21" name="Fila"/>
+          <p:cNvSpPr/>
+          <p:nvPr/>
+        </p:nvSpPr>
+        <p:spPr>
+          <a:xfrm>
+            <a:off x="548640" y="4809744"/>
+            <a:ext cx="11094415" cy="640080"/>
+          </a:xfrm>
+          <a:prstGeom prst="roundRect">
+            <a:avLst>
+              <a:gd name="adj" fmla="val 14286"/>
+            </a:avLst>
+          </a:prstGeom>
+          <a:solidFill>
+            <a:srgbClr val="1A3052"/>
+          </a:solidFill>
+          <a:ln w="12700">
+            <a:solidFill>
+              <a:srgbClr val="1A3052"/>
+            </a:solidFill>
+            <a:prstDash val="solid"/>
+          </a:ln>
+        </p:spPr>
+      </p:sp>
+      <p:sp>
+        <p:nvSpPr>
+          <p:cNvPr id="22" name="Puede esperar"/>
+          <p:cNvSpPr txBox="1"/>
+          <p:nvPr/>
+        </p:nvSpPr>
+        <p:spPr>
+          <a:xfrm>
+            <a:off x="731520" y="4956048"/>
+            <a:ext cx="2148840" cy="347472"/>
+          </a:xfrm>
+          <a:prstGeom prst="roundRect">
+            <a:avLst>
+              <a:gd name="adj" fmla="val 50000"/>
+            </a:avLst>
           </a:prstGeom>
           <a:solidFill>
             <a:srgbClr val="0B1830"/>
           </a:solidFill>
-          <a:ln w="25400">
+          <a:ln w="19050">
             <a:solidFill>
-              <a:srgbClr val="2F4A72"/>
+              <a:srgbClr val="B9A6FF"/>
+            </a:solidFill>
+          </a:ln>
+        </p:spPr>
+        <p:txBody>
+          <a:bodyPr wrap="square" lIns="0" tIns="0" rIns="0" bIns="0" rtlCol="0" anchor="ctr"/>
+          <a:lstStyle/>
+          <a:p>
+            <a:pPr algn="ctr" indent="0" marL="0">
+              <a:buNone/>
+            </a:pPr>
+            <a:r>
+              <a:rPr lang="en-US" sz="1100" b="1" dirty="0">
+                <a:solidFill>
+                  <a:srgbClr val="B9A6FF"/>
+                </a:solidFill>
+                <a:latin typeface="Arial" pitchFamily="34" charset="0"/>
+                <a:ea typeface="Arial" pitchFamily="34" charset="-122"/>
+                <a:cs typeface="Arial" pitchFamily="34" charset="-120"/>
+              </a:rPr>
+              <a:t>Puede esperar</a:t>
+            </a:r>
+            <a:endParaRPr lang="en-US" sz="1100" dirty="0"/>
+          </a:p>
+        </p:txBody>
+      </p:sp>
+      <p:sp>
+        <p:nvSpPr>
+          <p:cNvPr id="23" name="Text 21"/>
+          <p:cNvSpPr txBox="1"/>
+          <p:nvPr/>
+        </p:nvSpPr>
+        <p:spPr>
+          <a:xfrm>
+            <a:off x="3154680" y="4809744"/>
+            <a:ext cx="6705295" cy="640080"/>
+          </a:xfrm>
+          <a:prstGeom prst="rect">
+            <a:avLst/>
+          </a:prstGeom>
+          <a:noFill/>
+          <a:ln/>
+        </p:spPr>
+        <p:txBody>
+          <a:bodyPr wrap="square" lIns="0" tIns="0" rIns="0" bIns="0" rtlCol="0" anchor="ctr"/>
+          <a:lstStyle/>
+          <a:p>
+            <a:pPr indent="0" marL="0">
+              <a:buNone/>
+            </a:pPr>
+            <a:r>
+              <a:rPr lang="en-US" sz="1500" dirty="0">
+                <a:solidFill>
+                  <a:srgbClr val="FFFFFF"/>
+                </a:solidFill>
+                <a:latin typeface="Arial" pitchFamily="34" charset="0"/>
+                <a:ea typeface="Arial" pitchFamily="34" charset="-122"/>
+                <a:cs typeface="Arial" pitchFamily="34" charset="-120"/>
+              </a:rPr>
+              <a:t>Fecha del próximo All Day BOIA, para crear su evento</a:t>
+            </a:r>
+            <a:endParaRPr lang="en-US" sz="1500" dirty="0"/>
+          </a:p>
+        </p:txBody>
+      </p:sp>
+      <p:sp>
+        <p:nvSpPr>
+          <p:cNvPr id="24" name="Quién"/>
+          <p:cNvSpPr txBox="1"/>
+          <p:nvPr/>
+        </p:nvSpPr>
+        <p:spPr>
+          <a:xfrm>
+            <a:off x="9905695" y="4809744"/>
+            <a:ext cx="1554480" cy="640080"/>
+          </a:xfrm>
+          <a:prstGeom prst="rect">
+            <a:avLst/>
+          </a:prstGeom>
+          <a:noFill/>
+          <a:ln/>
+        </p:spPr>
+        <p:txBody>
+          <a:bodyPr wrap="square" lIns="0" tIns="0" rIns="0" bIns="0" rtlCol="0" anchor="ctr"/>
+          <a:lstStyle/>
+          <a:p>
+            <a:pPr algn="r" indent="0" marL="0">
+              <a:buNone/>
+            </a:pPr>
+            <a:r>
+              <a:rPr lang="en-US" sz="1200" b="1" dirty="0">
+                <a:solidFill>
+                  <a:srgbClr val="C9D4E6"/>
+                </a:solidFill>
+                <a:latin typeface="Arial" pitchFamily="34" charset="0"/>
+                <a:ea typeface="Arial" pitchFamily="34" charset="-122"/>
+                <a:cs typeface="Arial" pitchFamily="34" charset="-120"/>
+              </a:rPr>
+              <a:t>Álvaro</a:t>
+            </a:r>
+            <a:endParaRPr lang="en-US" sz="1200" dirty="0"/>
+          </a:p>
+        </p:txBody>
+      </p:sp>
+      <p:sp>
+        <p:nvSpPr>
+          <p:cNvPr id="25" name="Fila"/>
+          <p:cNvSpPr/>
+          <p:nvPr/>
+        </p:nvSpPr>
+        <p:spPr>
+          <a:xfrm>
+            <a:off x="548640" y="5577840"/>
+            <a:ext cx="11094415" cy="640080"/>
+          </a:xfrm>
+          <a:prstGeom prst="roundRect">
+            <a:avLst>
+              <a:gd name="adj" fmla="val 14286"/>
+            </a:avLst>
+          </a:prstGeom>
+          <a:solidFill>
+            <a:srgbClr val="1A3052"/>
+          </a:solidFill>
+          <a:ln w="12700">
+            <a:solidFill>
+              <a:srgbClr val="1A3052"/>
             </a:solidFill>
             <a:prstDash val="solid"/>
           </a:ln>
         </p:spPr>
       </p:sp>
-      <p:pic>
-        <p:nvPicPr>
-          <p:cNvPr id="3" name="Image 0" descr="La mascota de BOIA">    </p:cNvPr>
-          <p:cNvPicPr>
-            <a:picLocks noChangeAspect="1"/>
-          </p:cNvPicPr>
-          <p:nvPr/>
-        </p:nvPicPr>
-        <p:blipFill>
-          <a:blip r:embed="rId1"/>
-          <a:stretch>
-            <a:fillRect/>
-          </a:stretch>
-        </p:blipFill>
-        <p:spPr>
-          <a:xfrm>
-            <a:off x="8459616" y="1783080"/>
-            <a:ext cx="2831808" cy="2834640"/>
-          </a:xfrm>
-          <a:prstGeom prst="rect">
-            <a:avLst/>
-          </a:prstGeom>
-        </p:spPr>
-      </p:pic>
-      <p:sp>
-        <p:nvSpPr>
-          <p:cNvPr id="4" name="Número de parte"/>
+      <p:sp>
+        <p:nvSpPr>
+          <p:cNvPr id="26" name="Puede esperar"/>
           <p:cNvSpPr txBox="1"/>
           <p:nvPr/>
         </p:nvSpPr>
         <p:spPr>
           <a:xfrm>
-            <a:off x="548640" y="640080"/>
-            <a:ext cx="3657600" cy="1737360"/>
-          </a:xfrm>
-          <a:prstGeom prst="rect">
-            <a:avLst/>
-          </a:prstGeom>
-          <a:noFill/>
-          <a:ln/>
-        </p:spPr>
-        <p:txBody>
-          <a:bodyPr wrap="square" lIns="0" tIns="0" rIns="0" bIns="0" rtlCol="0" anchor="b"/>
-          <a:lstStyle/>
-          <a:p>
-            <a:pPr indent="0" marL="0">
-              <a:buNone/>
-            </a:pPr>
-            <a:r>
-              <a:rPr lang="en-US" sz="12000" dirty="0">
-                <a:solidFill>
-                  <a:srgbClr val="EC4F24"/>
-                </a:solidFill>
-                <a:latin typeface="Arial Black" pitchFamily="34" charset="0"/>
-                <a:ea typeface="Arial Black" pitchFamily="34" charset="-122"/>
-                <a:cs typeface="Arial Black" pitchFamily="34" charset="-120"/>
-              </a:rPr>
-              <a:t>06</a:t>
-            </a:r>
-            <a:endParaRPr lang="en-US" sz="12000" dirty="0"/>
-          </a:p>
-        </p:txBody>
-      </p:sp>
-      <p:sp>
-        <p:nvSpPr>
-          <p:cNvPr id="5" name="Título"/>
-          <p:cNvSpPr txBox="1"/>
-          <p:nvPr/>
-        </p:nvSpPr>
-        <p:spPr>
-          <a:xfrm>
-            <a:off x="548640" y="2606040"/>
-            <a:ext cx="7315200" cy="1417320"/>
-          </a:xfrm>
-          <a:prstGeom prst="rect">
-            <a:avLst/>
-          </a:prstGeom>
-          <a:noFill/>
-          <a:ln/>
-        </p:spPr>
-        <p:txBody>
-          <a:bodyPr wrap="square" lIns="0" tIns="0" rIns="0" bIns="0" rtlCol="0" anchor="t"/>
-          <a:lstStyle/>
-          <a:p>
-            <a:pPr indent="0" marL="0">
-              <a:buNone/>
-            </a:pPr>
-            <a:r>
-              <a:rPr lang="en-US" sz="4400" dirty="0">
-                <a:solidFill>
-                  <a:srgbClr val="FFFFFF"/>
-                </a:solidFill>
-                <a:latin typeface="Arial Black" pitchFamily="34" charset="0"/>
-                <a:ea typeface="Arial Black" pitchFamily="34" charset="-122"/>
-                <a:cs typeface="Arial Black" pitchFamily="34" charset="-120"/>
-              </a:rPr>
-              <a:t>Minijuegos</a:t>
-            </a:r>
-            <a:endParaRPr lang="en-US" sz="4400" dirty="0"/>
-          </a:p>
-        </p:txBody>
-      </p:sp>
-      <p:sp>
-        <p:nvSpPr>
-          <p:cNvPr id="6" name="Text 3"/>
-          <p:cNvSpPr txBox="1"/>
-          <p:nvPr/>
-        </p:nvSpPr>
-        <p:spPr>
-          <a:xfrm>
-            <a:off x="548640" y="4114800"/>
-            <a:ext cx="6949440" cy="822960"/>
-          </a:xfrm>
-          <a:prstGeom prst="rect">
-            <a:avLst/>
-          </a:prstGeom>
-          <a:noFill/>
-          <a:ln/>
-        </p:spPr>
-        <p:txBody>
-          <a:bodyPr wrap="square" lIns="0" tIns="0" rIns="0" bIns="0" rtlCol="0" anchor="t"/>
-          <a:lstStyle/>
-          <a:p>
-            <a:pPr indent="0" marL="0">
-              <a:buNone/>
-            </a:pPr>
-            <a:r>
-              <a:rPr lang="en-US" sz="1800" dirty="0">
-                <a:solidFill>
-                  <a:srgbClr val="C9D4E6"/>
+            <a:off x="731520" y="5724144"/>
+            <a:ext cx="2148840" cy="347472"/>
+          </a:xfrm>
+          <a:prstGeom prst="roundRect">
+            <a:avLst>
+              <a:gd name="adj" fmla="val 50000"/>
+            </a:avLst>
+          </a:prstGeom>
+          <a:solidFill>
+            <a:srgbClr val="0B1830"/>
+          </a:solidFill>
+          <a:ln w="19050">
+            <a:solidFill>
+              <a:srgbClr val="B9A6FF"/>
+            </a:solidFill>
+          </a:ln>
+        </p:spPr>
+        <p:txBody>
+          <a:bodyPr wrap="square" lIns="0" tIns="0" rIns="0" bIns="0" rtlCol="0" anchor="ctr"/>
+          <a:lstStyle/>
+          <a:p>
+            <a:pPr algn="ctr" indent="0" marL="0">
+              <a:buNone/>
+            </a:pPr>
+            <a:r>
+              <a:rPr lang="en-US" sz="1100" b="1" dirty="0">
+                <a:solidFill>
+                  <a:srgbClr val="B9A6FF"/>
                 </a:solidFill>
                 <a:latin typeface="Arial" pitchFamily="34" charset="0"/>
                 <a:ea typeface="Arial" pitchFamily="34" charset="-122"/>
                 <a:cs typeface="Arial" pitchFamily="34" charset="-120"/>
               </a:rPr>
-              <a:t>Los Rápidos, el Cañón y la Defensa del Castillo</a:t>
-            </a:r>
-            <a:endParaRPr lang="en-US" sz="1800" dirty="0"/>
+              <a:t>Puede esperar</a:t>
+            </a:r>
+            <a:endParaRPr lang="en-US" sz="1100" dirty="0"/>
+          </a:p>
+        </p:txBody>
+      </p:sp>
+      <p:sp>
+        <p:nvSpPr>
+          <p:cNvPr id="27" name="Text 25"/>
+          <p:cNvSpPr txBox="1"/>
+          <p:nvPr/>
+        </p:nvSpPr>
+        <p:spPr>
+          <a:xfrm>
+            <a:off x="3154680" y="5577840"/>
+            <a:ext cx="6705295" cy="640080"/>
+          </a:xfrm>
+          <a:prstGeom prst="rect">
+            <a:avLst/>
+          </a:prstGeom>
+          <a:noFill/>
+          <a:ln/>
+        </p:spPr>
+        <p:txBody>
+          <a:bodyPr wrap="square" lIns="0" tIns="0" rIns="0" bIns="0" rtlCol="0" anchor="ctr"/>
+          <a:lstStyle/>
+          <a:p>
+            <a:pPr indent="0" marL="0">
+              <a:buNone/>
+            </a:pPr>
+            <a:r>
+              <a:rPr lang="en-US" sz="1500" dirty="0">
+                <a:solidFill>
+                  <a:srgbClr val="FFFFFF"/>
+                </a:solidFill>
+                <a:latin typeface="Arial" pitchFamily="34" charset="0"/>
+                <a:ea typeface="Arial" pitchFamily="34" charset="-122"/>
+                <a:cs typeface="Arial" pitchFamily="34" charset="-120"/>
+              </a:rPr>
+              <a:t>Fotos de los 26 artistas y repartir el enlace de artistas (necesita cuentas)</a:t>
+            </a:r>
+            <a:endParaRPr lang="en-US" sz="1500" dirty="0"/>
+          </a:p>
+        </p:txBody>
+      </p:sp>
+      <p:sp>
+        <p:nvSpPr>
+          <p:cNvPr id="28" name="Quién"/>
+          <p:cNvSpPr txBox="1"/>
+          <p:nvPr/>
+        </p:nvSpPr>
+        <p:spPr>
+          <a:xfrm>
+            <a:off x="9905695" y="5577840"/>
+            <a:ext cx="1554480" cy="640080"/>
+          </a:xfrm>
+          <a:prstGeom prst="rect">
+            <a:avLst/>
+          </a:prstGeom>
+          <a:noFill/>
+          <a:ln/>
+        </p:spPr>
+        <p:txBody>
+          <a:bodyPr wrap="square" lIns="0" tIns="0" rIns="0" bIns="0" rtlCol="0" anchor="ctr"/>
+          <a:lstStyle/>
+          <a:p>
+            <a:pPr algn="r" indent="0" marL="0">
+              <a:buNone/>
+            </a:pPr>
+            <a:r>
+              <a:rPr lang="en-US" sz="1200" b="1" dirty="0">
+                <a:solidFill>
+                  <a:srgbClr val="C9D4E6"/>
+                </a:solidFill>
+                <a:latin typeface="Arial" pitchFamily="34" charset="0"/>
+                <a:ea typeface="Arial" pitchFamily="34" charset="-122"/>
+                <a:cs typeface="Arial" pitchFamily="34" charset="-120"/>
+              </a:rPr>
+              <a:t>Álvaro</a:t>
+            </a:r>
+            <a:endParaRPr lang="en-US" sz="1200" dirty="0"/>
           </a:p>
         </p:txBody>
       </p:sp>
@@ -4528,7 +6866,7 @@
                 <a:ea typeface="Arial" pitchFamily="34" charset="-122"/>
                 <a:cs typeface="Arial" pitchFamily="34" charset="-120"/>
               </a:rPr>
-              <a:t>06  ·  MINIJUEGOS</a:t>
+              <a:t>03  ·  PÁGINAS  ·  FOTOS, TIENDA Y LEGALES</a:t>
             </a:r>
             <a:endParaRPr lang="en-US" sz="1100" dirty="0"/>
           </a:p>
@@ -4569,7 +6907,7 @@
                 <a:ea typeface="Arial Black" pitchFamily="34" charset="-122"/>
                 <a:cs typeface="Arial Black" pitchFamily="34" charset="-120"/>
               </a:rPr>
-              <a:t>Pendiente</a:t>
+              <a:t>Qué falta</a:t>
             </a:r>
             <a:endParaRPr lang="en-US" sz="2800" dirty="0"/>
           </a:p>
@@ -4583,8 +6921,8 @@
         </p:nvSpPr>
         <p:spPr>
           <a:xfrm>
-            <a:off x="548640" y="1828800"/>
-            <a:ext cx="6949440" cy="4251960"/>
+            <a:off x="548640" y="1234440"/>
+            <a:ext cx="11094415" cy="320040"/>
           </a:xfrm>
           <a:prstGeom prst="rect">
             <a:avLst/>
@@ -4593,82 +6931,939 @@
           <a:ln/>
         </p:spPr>
         <p:txBody>
-          <a:bodyPr wrap="square" lIns="0" tIns="0" rIns="0" bIns="0" rtlCol="0" anchor="t"/>
+          <a:bodyPr wrap="square" lIns="0" tIns="0" rIns="0" bIns="0" rtlCol="0" anchor="ctr"/>
           <a:lstStyle/>
           <a:p>
             <a:pPr indent="0" marL="0">
-              <a:lnSpc>
-                <a:spcPct val="105000"/>
-              </a:lnSpc>
-              <a:spcAft>
-                <a:spcPts val="1000"/>
-              </a:spcAft>
-              <a:buNone/>
-            </a:pPr>
-            <a:r>
-              <a:rPr lang="en-US" sz="1600" dirty="0">
-                <a:solidFill>
-                  <a:srgbClr val="FFFFFF"/>
+              <a:buNone/>
+            </a:pPr>
+            <a:r>
+              <a:rPr lang="en-US" sz="1300" dirty="0">
+                <a:solidFill>
+                  <a:srgbClr val="C9D4E6"/>
                 </a:solidFill>
                 <a:latin typeface="Arial" pitchFamily="34" charset="0"/>
                 <a:ea typeface="Arial" pitchFamily="34" charset="-122"/>
                 <a:cs typeface="Arial" pitchFamily="34" charset="-120"/>
               </a:rPr>
-              <a:t>Esta parte está por escribir: la escribe la tarea T209.</a:t>
-            </a:r>
-            <a:endParaRPr lang="en-US" sz="1600" dirty="0"/>
-          </a:p>
-        </p:txBody>
-      </p:sp>
-      <p:sp>
-        <p:nvSpPr>
-          <p:cNvPr id="5" name="Shape 3"/>
+              <a:t>5 necesarios para salir   ·   1 puede esperar</a:t>
+            </a:r>
+            <a:endParaRPr lang="en-US" sz="1300" dirty="0"/>
+          </a:p>
+        </p:txBody>
+      </p:sp>
+      <p:sp>
+        <p:nvSpPr>
+          <p:cNvPr id="5" name="Fila"/>
           <p:cNvSpPr/>
           <p:nvPr/>
         </p:nvSpPr>
         <p:spPr>
           <a:xfrm>
-            <a:off x="8229600" y="1828800"/>
-            <a:ext cx="3383280" cy="3383280"/>
-          </a:xfrm>
-          <a:prstGeom prst="ellipse">
-            <a:avLst/>
+            <a:off x="548640" y="1737360"/>
+            <a:ext cx="11094415" cy="640080"/>
+          </a:xfrm>
+          <a:prstGeom prst="roundRect">
+            <a:avLst>
+              <a:gd name="adj" fmla="val 14286"/>
+            </a:avLst>
           </a:prstGeom>
           <a:solidFill>
-            <a:srgbClr val="07101F"/>
+            <a:srgbClr val="1A3052"/>
           </a:solidFill>
-          <a:ln w="25400">
+          <a:ln w="12700">
             <a:solidFill>
-              <a:srgbClr val="2F4A72"/>
+              <a:srgbClr val="1A3052"/>
             </a:solidFill>
             <a:prstDash val="solid"/>
           </a:ln>
         </p:spPr>
       </p:sp>
-      <p:pic>
-        <p:nvPicPr>
-          <p:cNvPr id="6" name="Image 0" descr="La mascota de BOIA">    </p:cNvPr>
-          <p:cNvPicPr>
-            <a:picLocks noChangeAspect="1"/>
-          </p:cNvPicPr>
-          <p:nvPr/>
-        </p:nvPicPr>
-        <p:blipFill>
-          <a:blip r:embed="rId1"/>
-          <a:stretch>
-            <a:fillRect/>
-          </a:stretch>
-        </p:blipFill>
-        <p:spPr>
-          <a:xfrm>
-            <a:off x="8642359" y="2240280"/>
-            <a:ext cx="2557762" cy="2560320"/>
-          </a:xfrm>
-          <a:prstGeom prst="rect">
-            <a:avLst/>
-          </a:prstGeom>
-        </p:spPr>
-      </p:pic>
+      <p:sp>
+        <p:nvSpPr>
+          <p:cNvPr id="6" name="Necesario para salir"/>
+          <p:cNvSpPr txBox="1"/>
+          <p:nvPr/>
+        </p:nvSpPr>
+        <p:spPr>
+          <a:xfrm>
+            <a:off x="731520" y="1883664"/>
+            <a:ext cx="2148840" cy="347472"/>
+          </a:xfrm>
+          <a:prstGeom prst="roundRect">
+            <a:avLst>
+              <a:gd name="adj" fmla="val 50000"/>
+            </a:avLst>
+          </a:prstGeom>
+          <a:solidFill>
+            <a:srgbClr val="EC4F24"/>
+          </a:solidFill>
+          <a:ln w="19050">
+            <a:solidFill>
+              <a:srgbClr val="EC4F24"/>
+            </a:solidFill>
+          </a:ln>
+        </p:spPr>
+        <p:txBody>
+          <a:bodyPr wrap="square" lIns="0" tIns="0" rIns="0" bIns="0" rtlCol="0" anchor="ctr"/>
+          <a:lstStyle/>
+          <a:p>
+            <a:pPr algn="ctr" indent="0" marL="0">
+              <a:buNone/>
+            </a:pPr>
+            <a:r>
+              <a:rPr lang="en-US" sz="1100" b="1" dirty="0">
+                <a:solidFill>
+                  <a:srgbClr val="FFFFFF"/>
+                </a:solidFill>
+                <a:latin typeface="Arial" pitchFamily="34" charset="0"/>
+                <a:ea typeface="Arial" pitchFamily="34" charset="-122"/>
+                <a:cs typeface="Arial" pitchFamily="34" charset="-120"/>
+              </a:rPr>
+              <a:t>Necesario para salir</a:t>
+            </a:r>
+            <a:endParaRPr lang="en-US" sz="1100" dirty="0"/>
+          </a:p>
+        </p:txBody>
+      </p:sp>
+      <p:sp>
+        <p:nvSpPr>
+          <p:cNvPr id="7" name="Text 5"/>
+          <p:cNvSpPr txBox="1"/>
+          <p:nvPr/>
+        </p:nvSpPr>
+        <p:spPr>
+          <a:xfrm>
+            <a:off x="3154680" y="1737360"/>
+            <a:ext cx="6705295" cy="640080"/>
+          </a:xfrm>
+          <a:prstGeom prst="rect">
+            <a:avLst/>
+          </a:prstGeom>
+          <a:noFill/>
+          <a:ln/>
+        </p:spPr>
+        <p:txBody>
+          <a:bodyPr wrap="square" lIns="0" tIns="0" rIns="0" bIns="0" rtlCol="0" anchor="ctr"/>
+          <a:lstStyle/>
+          <a:p>
+            <a:pPr indent="0" marL="0">
+              <a:buNone/>
+            </a:pPr>
+            <a:r>
+              <a:rPr lang="en-US" sz="1500" dirty="0">
+                <a:solidFill>
+                  <a:srgbClr val="FFFFFF"/>
+                </a:solidFill>
+                <a:latin typeface="Arial" pitchFamily="34" charset="0"/>
+                <a:ea typeface="Arial" pitchFamily="34" charset="-122"/>
+                <a:cs typeface="Arial" pitchFamily="34" charset="-120"/>
+              </a:rPr>
+              <a:t>Fotos reales de los eventos pasados para sustituir los recuadros de muestra</a:t>
+            </a:r>
+            <a:endParaRPr lang="en-US" sz="1500" dirty="0"/>
+          </a:p>
+        </p:txBody>
+      </p:sp>
+      <p:sp>
+        <p:nvSpPr>
+          <p:cNvPr id="8" name="Quién"/>
+          <p:cNvSpPr txBox="1"/>
+          <p:nvPr/>
+        </p:nvSpPr>
+        <p:spPr>
+          <a:xfrm>
+            <a:off x="9905695" y="1737360"/>
+            <a:ext cx="1554480" cy="640080"/>
+          </a:xfrm>
+          <a:prstGeom prst="rect">
+            <a:avLst/>
+          </a:prstGeom>
+          <a:noFill/>
+          <a:ln/>
+        </p:spPr>
+        <p:txBody>
+          <a:bodyPr wrap="square" lIns="0" tIns="0" rIns="0" bIns="0" rtlCol="0" anchor="ctr"/>
+          <a:lstStyle/>
+          <a:p>
+            <a:pPr algn="r" indent="0" marL="0">
+              <a:buNone/>
+            </a:pPr>
+            <a:r>
+              <a:rPr lang="en-US" sz="1200" b="1" dirty="0">
+                <a:solidFill>
+                  <a:srgbClr val="C9D4E6"/>
+                </a:solidFill>
+                <a:latin typeface="Arial" pitchFamily="34" charset="0"/>
+                <a:ea typeface="Arial" pitchFamily="34" charset="-122"/>
+                <a:cs typeface="Arial" pitchFamily="34" charset="-120"/>
+              </a:rPr>
+              <a:t>Álvaro y socios</a:t>
+            </a:r>
+            <a:endParaRPr lang="en-US" sz="1200" dirty="0"/>
+          </a:p>
+        </p:txBody>
+      </p:sp>
+      <p:sp>
+        <p:nvSpPr>
+          <p:cNvPr id="9" name="Fila"/>
+          <p:cNvSpPr/>
+          <p:nvPr/>
+        </p:nvSpPr>
+        <p:spPr>
+          <a:xfrm>
+            <a:off x="548640" y="2505456"/>
+            <a:ext cx="11094415" cy="640080"/>
+          </a:xfrm>
+          <a:prstGeom prst="roundRect">
+            <a:avLst>
+              <a:gd name="adj" fmla="val 14286"/>
+            </a:avLst>
+          </a:prstGeom>
+          <a:solidFill>
+            <a:srgbClr val="1A3052"/>
+          </a:solidFill>
+          <a:ln w="12700">
+            <a:solidFill>
+              <a:srgbClr val="1A3052"/>
+            </a:solidFill>
+            <a:prstDash val="solid"/>
+          </a:ln>
+        </p:spPr>
+      </p:sp>
+      <p:sp>
+        <p:nvSpPr>
+          <p:cNvPr id="10" name="Necesario para salir"/>
+          <p:cNvSpPr txBox="1"/>
+          <p:nvPr/>
+        </p:nvSpPr>
+        <p:spPr>
+          <a:xfrm>
+            <a:off x="731520" y="2651760"/>
+            <a:ext cx="2148840" cy="347472"/>
+          </a:xfrm>
+          <a:prstGeom prst="roundRect">
+            <a:avLst>
+              <a:gd name="adj" fmla="val 50000"/>
+            </a:avLst>
+          </a:prstGeom>
+          <a:solidFill>
+            <a:srgbClr val="EC4F24"/>
+          </a:solidFill>
+          <a:ln w="19050">
+            <a:solidFill>
+              <a:srgbClr val="EC4F24"/>
+            </a:solidFill>
+          </a:ln>
+        </p:spPr>
+        <p:txBody>
+          <a:bodyPr wrap="square" lIns="0" tIns="0" rIns="0" bIns="0" rtlCol="0" anchor="ctr"/>
+          <a:lstStyle/>
+          <a:p>
+            <a:pPr algn="ctr" indent="0" marL="0">
+              <a:buNone/>
+            </a:pPr>
+            <a:r>
+              <a:rPr lang="en-US" sz="1100" b="1" dirty="0">
+                <a:solidFill>
+                  <a:srgbClr val="FFFFFF"/>
+                </a:solidFill>
+                <a:latin typeface="Arial" pitchFamily="34" charset="0"/>
+                <a:ea typeface="Arial" pitchFamily="34" charset="-122"/>
+                <a:cs typeface="Arial" pitchFamily="34" charset="-120"/>
+              </a:rPr>
+              <a:t>Necesario para salir</a:t>
+            </a:r>
+            <a:endParaRPr lang="en-US" sz="1100" dirty="0"/>
+          </a:p>
+        </p:txBody>
+      </p:sp>
+      <p:sp>
+        <p:nvSpPr>
+          <p:cNvPr id="11" name="Text 9"/>
+          <p:cNvSpPr txBox="1"/>
+          <p:nvPr/>
+        </p:nvSpPr>
+        <p:spPr>
+          <a:xfrm>
+            <a:off x="3154680" y="2505456"/>
+            <a:ext cx="6705295" cy="640080"/>
+          </a:xfrm>
+          <a:prstGeom prst="rect">
+            <a:avLst/>
+          </a:prstGeom>
+          <a:noFill/>
+          <a:ln/>
+        </p:spPr>
+        <p:txBody>
+          <a:bodyPr wrap="square" lIns="0" tIns="0" rIns="0" bIns="0" rtlCol="0" anchor="ctr"/>
+          <a:lstStyle/>
+          <a:p>
+            <a:pPr indent="0" marL="0">
+              <a:buNone/>
+            </a:pPr>
+            <a:r>
+              <a:rPr lang="en-US" sz="1500" dirty="0">
+                <a:solidFill>
+                  <a:srgbClr val="FFFFFF"/>
+                </a:solidFill>
+                <a:latin typeface="Arial" pitchFamily="34" charset="0"/>
+                <a:ea typeface="Arial" pitchFamily="34" charset="-122"/>
+                <a:cs typeface="Arial" pitchFamily="34" charset="-120"/>
+              </a:rPr>
+              <a:t>Fotos de los productos reales de la tienda (sola, otro ángulo, con modelo)</a:t>
+            </a:r>
+            <a:endParaRPr lang="en-US" sz="1500" dirty="0"/>
+          </a:p>
+        </p:txBody>
+      </p:sp>
+      <p:sp>
+        <p:nvSpPr>
+          <p:cNvPr id="12" name="Quién"/>
+          <p:cNvSpPr txBox="1"/>
+          <p:nvPr/>
+        </p:nvSpPr>
+        <p:spPr>
+          <a:xfrm>
+            <a:off x="9905695" y="2505456"/>
+            <a:ext cx="1554480" cy="640080"/>
+          </a:xfrm>
+          <a:prstGeom prst="rect">
+            <a:avLst/>
+          </a:prstGeom>
+          <a:noFill/>
+          <a:ln/>
+        </p:spPr>
+        <p:txBody>
+          <a:bodyPr wrap="square" lIns="0" tIns="0" rIns="0" bIns="0" rtlCol="0" anchor="ctr"/>
+          <a:lstStyle/>
+          <a:p>
+            <a:pPr algn="r" indent="0" marL="0">
+              <a:buNone/>
+            </a:pPr>
+            <a:r>
+              <a:rPr lang="en-US" sz="1200" b="1" dirty="0">
+                <a:solidFill>
+                  <a:srgbClr val="C9D4E6"/>
+                </a:solidFill>
+                <a:latin typeface="Arial" pitchFamily="34" charset="0"/>
+                <a:ea typeface="Arial" pitchFamily="34" charset="-122"/>
+                <a:cs typeface="Arial" pitchFamily="34" charset="-120"/>
+              </a:rPr>
+              <a:t>Álvaro</a:t>
+            </a:r>
+            <a:endParaRPr lang="en-US" sz="1200" dirty="0"/>
+          </a:p>
+        </p:txBody>
+      </p:sp>
+      <p:sp>
+        <p:nvSpPr>
+          <p:cNvPr id="13" name="Fila"/>
+          <p:cNvSpPr/>
+          <p:nvPr/>
+        </p:nvSpPr>
+        <p:spPr>
+          <a:xfrm>
+            <a:off x="548640" y="3273552"/>
+            <a:ext cx="11094415" cy="640080"/>
+          </a:xfrm>
+          <a:prstGeom prst="roundRect">
+            <a:avLst>
+              <a:gd name="adj" fmla="val 14286"/>
+            </a:avLst>
+          </a:prstGeom>
+          <a:solidFill>
+            <a:srgbClr val="1A3052"/>
+          </a:solidFill>
+          <a:ln w="12700">
+            <a:solidFill>
+              <a:srgbClr val="1A3052"/>
+            </a:solidFill>
+            <a:prstDash val="solid"/>
+          </a:ln>
+        </p:spPr>
+      </p:sp>
+      <p:sp>
+        <p:nvSpPr>
+          <p:cNvPr id="14" name="Necesario para salir"/>
+          <p:cNvSpPr txBox="1"/>
+          <p:nvPr/>
+        </p:nvSpPr>
+        <p:spPr>
+          <a:xfrm>
+            <a:off x="731520" y="3419856"/>
+            <a:ext cx="2148840" cy="347472"/>
+          </a:xfrm>
+          <a:prstGeom prst="roundRect">
+            <a:avLst>
+              <a:gd name="adj" fmla="val 50000"/>
+            </a:avLst>
+          </a:prstGeom>
+          <a:solidFill>
+            <a:srgbClr val="EC4F24"/>
+          </a:solidFill>
+          <a:ln w="19050">
+            <a:solidFill>
+              <a:srgbClr val="EC4F24"/>
+            </a:solidFill>
+          </a:ln>
+        </p:spPr>
+        <p:txBody>
+          <a:bodyPr wrap="square" lIns="0" tIns="0" rIns="0" bIns="0" rtlCol="0" anchor="ctr"/>
+          <a:lstStyle/>
+          <a:p>
+            <a:pPr algn="ctr" indent="0" marL="0">
+              <a:buNone/>
+            </a:pPr>
+            <a:r>
+              <a:rPr lang="en-US" sz="1100" b="1" dirty="0">
+                <a:solidFill>
+                  <a:srgbClr val="FFFFFF"/>
+                </a:solidFill>
+                <a:latin typeface="Arial" pitchFamily="34" charset="0"/>
+                <a:ea typeface="Arial" pitchFamily="34" charset="-122"/>
+                <a:cs typeface="Arial" pitchFamily="34" charset="-120"/>
+              </a:rPr>
+              <a:t>Necesario para salir</a:t>
+            </a:r>
+            <a:endParaRPr lang="en-US" sz="1100" dirty="0"/>
+          </a:p>
+        </p:txBody>
+      </p:sp>
+      <p:sp>
+        <p:nvSpPr>
+          <p:cNvPr id="15" name="Text 13"/>
+          <p:cNvSpPr txBox="1"/>
+          <p:nvPr/>
+        </p:nvSpPr>
+        <p:spPr>
+          <a:xfrm>
+            <a:off x="3154680" y="3273552"/>
+            <a:ext cx="6705295" cy="640080"/>
+          </a:xfrm>
+          <a:prstGeom prst="rect">
+            <a:avLst/>
+          </a:prstGeom>
+          <a:noFill/>
+          <a:ln/>
+        </p:spPr>
+        <p:txBody>
+          <a:bodyPr wrap="square" lIns="0" tIns="0" rIns="0" bIns="0" rtlCol="0" anchor="ctr"/>
+          <a:lstStyle/>
+          <a:p>
+            <a:pPr indent="0" marL="0">
+              <a:buNone/>
+            </a:pPr>
+            <a:r>
+              <a:rPr lang="en-US" sz="1500" dirty="0">
+                <a:solidFill>
+                  <a:srgbClr val="FFFFFF"/>
+                </a:solidFill>
+                <a:latin typeface="Arial" pitchFamily="34" charset="0"/>
+                <a:ea typeface="Arial" pitchFamily="34" charset="-122"/>
+                <a:cs typeface="Arial" pitchFamily="34" charset="-120"/>
+              </a:rPr>
+              <a:t>Confirmar el Instagram real al que se escribe para comprar en la tienda</a:t>
+            </a:r>
+            <a:endParaRPr lang="en-US" sz="1500" dirty="0"/>
+          </a:p>
+        </p:txBody>
+      </p:sp>
+      <p:sp>
+        <p:nvSpPr>
+          <p:cNvPr id="16" name="Quién"/>
+          <p:cNvSpPr txBox="1"/>
+          <p:nvPr/>
+        </p:nvSpPr>
+        <p:spPr>
+          <a:xfrm>
+            <a:off x="9905695" y="3273552"/>
+            <a:ext cx="1554480" cy="640080"/>
+          </a:xfrm>
+          <a:prstGeom prst="rect">
+            <a:avLst/>
+          </a:prstGeom>
+          <a:noFill/>
+          <a:ln/>
+        </p:spPr>
+        <p:txBody>
+          <a:bodyPr wrap="square" lIns="0" tIns="0" rIns="0" bIns="0" rtlCol="0" anchor="ctr"/>
+          <a:lstStyle/>
+          <a:p>
+            <a:pPr algn="r" indent="0" marL="0">
+              <a:buNone/>
+            </a:pPr>
+            <a:r>
+              <a:rPr lang="en-US" sz="1200" b="1" dirty="0">
+                <a:solidFill>
+                  <a:srgbClr val="C9D4E6"/>
+                </a:solidFill>
+                <a:latin typeface="Arial" pitchFamily="34" charset="0"/>
+                <a:ea typeface="Arial" pitchFamily="34" charset="-122"/>
+                <a:cs typeface="Arial" pitchFamily="34" charset="-120"/>
+              </a:rPr>
+              <a:t>Álvaro</a:t>
+            </a:r>
+            <a:endParaRPr lang="en-US" sz="1200" dirty="0"/>
+          </a:p>
+        </p:txBody>
+      </p:sp>
+      <p:sp>
+        <p:nvSpPr>
+          <p:cNvPr id="17" name="Fila"/>
+          <p:cNvSpPr/>
+          <p:nvPr/>
+        </p:nvSpPr>
+        <p:spPr>
+          <a:xfrm>
+            <a:off x="548640" y="4041648"/>
+            <a:ext cx="11094415" cy="640080"/>
+          </a:xfrm>
+          <a:prstGeom prst="roundRect">
+            <a:avLst>
+              <a:gd name="adj" fmla="val 14286"/>
+            </a:avLst>
+          </a:prstGeom>
+          <a:solidFill>
+            <a:srgbClr val="1A3052"/>
+          </a:solidFill>
+          <a:ln w="12700">
+            <a:solidFill>
+              <a:srgbClr val="1A3052"/>
+            </a:solidFill>
+            <a:prstDash val="solid"/>
+          </a:ln>
+        </p:spPr>
+      </p:sp>
+      <p:sp>
+        <p:nvSpPr>
+          <p:cNvPr id="18" name="Necesario para salir"/>
+          <p:cNvSpPr txBox="1"/>
+          <p:nvPr/>
+        </p:nvSpPr>
+        <p:spPr>
+          <a:xfrm>
+            <a:off x="731520" y="4187952"/>
+            <a:ext cx="2148840" cy="347472"/>
+          </a:xfrm>
+          <a:prstGeom prst="roundRect">
+            <a:avLst>
+              <a:gd name="adj" fmla="val 50000"/>
+            </a:avLst>
+          </a:prstGeom>
+          <a:solidFill>
+            <a:srgbClr val="EC4F24"/>
+          </a:solidFill>
+          <a:ln w="19050">
+            <a:solidFill>
+              <a:srgbClr val="EC4F24"/>
+            </a:solidFill>
+          </a:ln>
+        </p:spPr>
+        <p:txBody>
+          <a:bodyPr wrap="square" lIns="0" tIns="0" rIns="0" bIns="0" rtlCol="0" anchor="ctr"/>
+          <a:lstStyle/>
+          <a:p>
+            <a:pPr algn="ctr" indent="0" marL="0">
+              <a:buNone/>
+            </a:pPr>
+            <a:r>
+              <a:rPr lang="en-US" sz="1100" b="1" dirty="0">
+                <a:solidFill>
+                  <a:srgbClr val="FFFFFF"/>
+                </a:solidFill>
+                <a:latin typeface="Arial" pitchFamily="34" charset="0"/>
+                <a:ea typeface="Arial" pitchFamily="34" charset="-122"/>
+                <a:cs typeface="Arial" pitchFamily="34" charset="-120"/>
+              </a:rPr>
+              <a:t>Necesario para salir</a:t>
+            </a:r>
+            <a:endParaRPr lang="en-US" sz="1100" dirty="0"/>
+          </a:p>
+        </p:txBody>
+      </p:sp>
+      <p:sp>
+        <p:nvSpPr>
+          <p:cNvPr id="19" name="Text 17"/>
+          <p:cNvSpPr txBox="1"/>
+          <p:nvPr/>
+        </p:nvSpPr>
+        <p:spPr>
+          <a:xfrm>
+            <a:off x="3154680" y="4041648"/>
+            <a:ext cx="6705295" cy="640080"/>
+          </a:xfrm>
+          <a:prstGeom prst="rect">
+            <a:avLst/>
+          </a:prstGeom>
+          <a:noFill/>
+          <a:ln/>
+        </p:spPr>
+        <p:txBody>
+          <a:bodyPr wrap="square" lIns="0" tIns="0" rIns="0" bIns="0" rtlCol="0" anchor="ctr"/>
+          <a:lstStyle/>
+          <a:p>
+            <a:pPr indent="0" marL="0">
+              <a:buNone/>
+            </a:pPr>
+            <a:r>
+              <a:rPr lang="en-US" sz="1500" dirty="0">
+                <a:solidFill>
+                  <a:srgbClr val="FFFFFF"/>
+                </a:solidFill>
+                <a:latin typeface="Arial" pitchFamily="34" charset="0"/>
+                <a:ea typeface="Arial" pitchFamily="34" charset="-122"/>
+                <a:cs typeface="Arial" pitchFamily="34" charset="-120"/>
+              </a:rPr>
+              <a:t>Datos legales reales (titular, NIF, domicilio, correo) y revisión profesional</a:t>
+            </a:r>
+            <a:endParaRPr lang="en-US" sz="1500" dirty="0"/>
+          </a:p>
+        </p:txBody>
+      </p:sp>
+      <p:sp>
+        <p:nvSpPr>
+          <p:cNvPr id="20" name="Quién"/>
+          <p:cNvSpPr txBox="1"/>
+          <p:nvPr/>
+        </p:nvSpPr>
+        <p:spPr>
+          <a:xfrm>
+            <a:off x="9905695" y="4041648"/>
+            <a:ext cx="1554480" cy="640080"/>
+          </a:xfrm>
+          <a:prstGeom prst="rect">
+            <a:avLst/>
+          </a:prstGeom>
+          <a:noFill/>
+          <a:ln/>
+        </p:spPr>
+        <p:txBody>
+          <a:bodyPr wrap="square" lIns="0" tIns="0" rIns="0" bIns="0" rtlCol="0" anchor="ctr"/>
+          <a:lstStyle/>
+          <a:p>
+            <a:pPr algn="r" indent="0" marL="0">
+              <a:buNone/>
+            </a:pPr>
+            <a:r>
+              <a:rPr lang="en-US" sz="1200" b="1" dirty="0">
+                <a:solidFill>
+                  <a:srgbClr val="C9D4E6"/>
+                </a:solidFill>
+                <a:latin typeface="Arial" pitchFamily="34" charset="0"/>
+                <a:ea typeface="Arial" pitchFamily="34" charset="-122"/>
+                <a:cs typeface="Arial" pitchFamily="34" charset="-120"/>
+              </a:rPr>
+              <a:t>Álvaro</a:t>
+            </a:r>
+            <a:endParaRPr lang="en-US" sz="1200" dirty="0"/>
+          </a:p>
+        </p:txBody>
+      </p:sp>
+      <p:sp>
+        <p:nvSpPr>
+          <p:cNvPr id="21" name="Fila"/>
+          <p:cNvSpPr/>
+          <p:nvPr/>
+        </p:nvSpPr>
+        <p:spPr>
+          <a:xfrm>
+            <a:off x="548640" y="4809744"/>
+            <a:ext cx="11094415" cy="640080"/>
+          </a:xfrm>
+          <a:prstGeom prst="roundRect">
+            <a:avLst>
+              <a:gd name="adj" fmla="val 14286"/>
+            </a:avLst>
+          </a:prstGeom>
+          <a:solidFill>
+            <a:srgbClr val="1A3052"/>
+          </a:solidFill>
+          <a:ln w="12700">
+            <a:solidFill>
+              <a:srgbClr val="1A3052"/>
+            </a:solidFill>
+            <a:prstDash val="solid"/>
+          </a:ln>
+        </p:spPr>
+      </p:sp>
+      <p:sp>
+        <p:nvSpPr>
+          <p:cNvPr id="22" name="Necesario para salir"/>
+          <p:cNvSpPr txBox="1"/>
+          <p:nvPr/>
+        </p:nvSpPr>
+        <p:spPr>
+          <a:xfrm>
+            <a:off x="731520" y="4956048"/>
+            <a:ext cx="2148840" cy="347472"/>
+          </a:xfrm>
+          <a:prstGeom prst="roundRect">
+            <a:avLst>
+              <a:gd name="adj" fmla="val 50000"/>
+            </a:avLst>
+          </a:prstGeom>
+          <a:solidFill>
+            <a:srgbClr val="EC4F24"/>
+          </a:solidFill>
+          <a:ln w="19050">
+            <a:solidFill>
+              <a:srgbClr val="EC4F24"/>
+            </a:solidFill>
+          </a:ln>
+        </p:spPr>
+        <p:txBody>
+          <a:bodyPr wrap="square" lIns="0" tIns="0" rIns="0" bIns="0" rtlCol="0" anchor="ctr"/>
+          <a:lstStyle/>
+          <a:p>
+            <a:pPr algn="ctr" indent="0" marL="0">
+              <a:buNone/>
+            </a:pPr>
+            <a:r>
+              <a:rPr lang="en-US" sz="1100" b="1" dirty="0">
+                <a:solidFill>
+                  <a:srgbClr val="FFFFFF"/>
+                </a:solidFill>
+                <a:latin typeface="Arial" pitchFamily="34" charset="0"/>
+                <a:ea typeface="Arial" pitchFamily="34" charset="-122"/>
+                <a:cs typeface="Arial" pitchFamily="34" charset="-120"/>
+              </a:rPr>
+              <a:t>Necesario para salir</a:t>
+            </a:r>
+            <a:endParaRPr lang="en-US" sz="1100" dirty="0"/>
+          </a:p>
+        </p:txBody>
+      </p:sp>
+      <p:sp>
+        <p:nvSpPr>
+          <p:cNvPr id="23" name="Text 21"/>
+          <p:cNvSpPr txBox="1"/>
+          <p:nvPr/>
+        </p:nvSpPr>
+        <p:spPr>
+          <a:xfrm>
+            <a:off x="3154680" y="4809744"/>
+            <a:ext cx="6705295" cy="640080"/>
+          </a:xfrm>
+          <a:prstGeom prst="rect">
+            <a:avLst/>
+          </a:prstGeom>
+          <a:noFill/>
+          <a:ln/>
+        </p:spPr>
+        <p:txBody>
+          <a:bodyPr wrap="square" lIns="0" tIns="0" rIns="0" bIns="0" rtlCol="0" anchor="ctr"/>
+          <a:lstStyle/>
+          <a:p>
+            <a:pPr indent="0" marL="0">
+              <a:buNone/>
+            </a:pPr>
+            <a:r>
+              <a:rPr lang="en-US" sz="1500" dirty="0">
+                <a:solidFill>
+                  <a:srgbClr val="FFFFFF"/>
+                </a:solidFill>
+                <a:latin typeface="Arial" pitchFamily="34" charset="0"/>
+                <a:ea typeface="Arial" pitchFamily="34" charset="-122"/>
+                <a:cs typeface="Arial" pitchFamily="34" charset="-120"/>
+              </a:rPr>
+              <a:t>Leer y aprobar los textos de estas páginas, que hoy son de muestra</a:t>
+            </a:r>
+            <a:endParaRPr lang="en-US" sz="1500" dirty="0"/>
+          </a:p>
+        </p:txBody>
+      </p:sp>
+      <p:sp>
+        <p:nvSpPr>
+          <p:cNvPr id="24" name="Quién"/>
+          <p:cNvSpPr txBox="1"/>
+          <p:nvPr/>
+        </p:nvSpPr>
+        <p:spPr>
+          <a:xfrm>
+            <a:off x="9905695" y="4809744"/>
+            <a:ext cx="1554480" cy="640080"/>
+          </a:xfrm>
+          <a:prstGeom prst="rect">
+            <a:avLst/>
+          </a:prstGeom>
+          <a:noFill/>
+          <a:ln/>
+        </p:spPr>
+        <p:txBody>
+          <a:bodyPr wrap="square" lIns="0" tIns="0" rIns="0" bIns="0" rtlCol="0" anchor="ctr"/>
+          <a:lstStyle/>
+          <a:p>
+            <a:pPr algn="r" indent="0" marL="0">
+              <a:buNone/>
+            </a:pPr>
+            <a:r>
+              <a:rPr lang="en-US" sz="1200" b="1" dirty="0">
+                <a:solidFill>
+                  <a:srgbClr val="C9D4E6"/>
+                </a:solidFill>
+                <a:latin typeface="Arial" pitchFamily="34" charset="0"/>
+                <a:ea typeface="Arial" pitchFamily="34" charset="-122"/>
+                <a:cs typeface="Arial" pitchFamily="34" charset="-120"/>
+              </a:rPr>
+              <a:t>Álvaro</a:t>
+            </a:r>
+            <a:endParaRPr lang="en-US" sz="1200" dirty="0"/>
+          </a:p>
+        </p:txBody>
+      </p:sp>
+      <p:sp>
+        <p:nvSpPr>
+          <p:cNvPr id="25" name="Fila"/>
+          <p:cNvSpPr/>
+          <p:nvPr/>
+        </p:nvSpPr>
+        <p:spPr>
+          <a:xfrm>
+            <a:off x="548640" y="5577840"/>
+            <a:ext cx="11094415" cy="640080"/>
+          </a:xfrm>
+          <a:prstGeom prst="roundRect">
+            <a:avLst>
+              <a:gd name="adj" fmla="val 14286"/>
+            </a:avLst>
+          </a:prstGeom>
+          <a:solidFill>
+            <a:srgbClr val="1A3052"/>
+          </a:solidFill>
+          <a:ln w="12700">
+            <a:solidFill>
+              <a:srgbClr val="1A3052"/>
+            </a:solidFill>
+            <a:prstDash val="solid"/>
+          </a:ln>
+        </p:spPr>
+      </p:sp>
+      <p:sp>
+        <p:nvSpPr>
+          <p:cNvPr id="26" name="Puede esperar"/>
+          <p:cNvSpPr txBox="1"/>
+          <p:nvPr/>
+        </p:nvSpPr>
+        <p:spPr>
+          <a:xfrm>
+            <a:off x="731520" y="5724144"/>
+            <a:ext cx="2148840" cy="347472"/>
+          </a:xfrm>
+          <a:prstGeom prst="roundRect">
+            <a:avLst>
+              <a:gd name="adj" fmla="val 50000"/>
+            </a:avLst>
+          </a:prstGeom>
+          <a:solidFill>
+            <a:srgbClr val="0B1830"/>
+          </a:solidFill>
+          <a:ln w="19050">
+            <a:solidFill>
+              <a:srgbClr val="B9A6FF"/>
+            </a:solidFill>
+          </a:ln>
+        </p:spPr>
+        <p:txBody>
+          <a:bodyPr wrap="square" lIns="0" tIns="0" rIns="0" bIns="0" rtlCol="0" anchor="ctr"/>
+          <a:lstStyle/>
+          <a:p>
+            <a:pPr algn="ctr" indent="0" marL="0">
+              <a:buNone/>
+            </a:pPr>
+            <a:r>
+              <a:rPr lang="en-US" sz="1100" b="1" dirty="0">
+                <a:solidFill>
+                  <a:srgbClr val="B9A6FF"/>
+                </a:solidFill>
+                <a:latin typeface="Arial" pitchFamily="34" charset="0"/>
+                <a:ea typeface="Arial" pitchFamily="34" charset="-122"/>
+                <a:cs typeface="Arial" pitchFamily="34" charset="-120"/>
+              </a:rPr>
+              <a:t>Puede esperar</a:t>
+            </a:r>
+            <a:endParaRPr lang="en-US" sz="1100" dirty="0"/>
+          </a:p>
+        </p:txBody>
+      </p:sp>
+      <p:sp>
+        <p:nvSpPr>
+          <p:cNvPr id="27" name="Text 25"/>
+          <p:cNvSpPr txBox="1"/>
+          <p:nvPr/>
+        </p:nvSpPr>
+        <p:spPr>
+          <a:xfrm>
+            <a:off x="3154680" y="5577840"/>
+            <a:ext cx="6705295" cy="640080"/>
+          </a:xfrm>
+          <a:prstGeom prst="rect">
+            <a:avLst/>
+          </a:prstGeom>
+          <a:noFill/>
+          <a:ln/>
+        </p:spPr>
+        <p:txBody>
+          <a:bodyPr wrap="square" lIns="0" tIns="0" rIns="0" bIns="0" rtlCol="0" anchor="ctr"/>
+          <a:lstStyle/>
+          <a:p>
+            <a:pPr indent="0" marL="0">
+              <a:buNone/>
+            </a:pPr>
+            <a:r>
+              <a:rPr lang="en-US" sz="1500" dirty="0">
+                <a:solidFill>
+                  <a:srgbClr val="FFFFFF"/>
+                </a:solidFill>
+                <a:latin typeface="Arial" pitchFamily="34" charset="0"/>
+                <a:ea typeface="Arial" pitchFamily="34" charset="-122"/>
+                <a:cs typeface="Arial" pitchFamily="34" charset="-120"/>
+              </a:rPr>
+              <a:t>Probar una subida real de fotos con cuentas de usuario</a:t>
+            </a:r>
+            <a:endParaRPr lang="en-US" sz="1500" dirty="0"/>
+          </a:p>
+        </p:txBody>
+      </p:sp>
+      <p:sp>
+        <p:nvSpPr>
+          <p:cNvPr id="28" name="Quién"/>
+          <p:cNvSpPr txBox="1"/>
+          <p:nvPr/>
+        </p:nvSpPr>
+        <p:spPr>
+          <a:xfrm>
+            <a:off x="9905695" y="5577840"/>
+            <a:ext cx="1554480" cy="640080"/>
+          </a:xfrm>
+          <a:prstGeom prst="rect">
+            <a:avLst/>
+          </a:prstGeom>
+          <a:noFill/>
+          <a:ln/>
+        </p:spPr>
+        <p:txBody>
+          <a:bodyPr wrap="square" lIns="0" tIns="0" rIns="0" bIns="0" rtlCol="0" anchor="ctr"/>
+          <a:lstStyle/>
+          <a:p>
+            <a:pPr algn="r" indent="0" marL="0">
+              <a:buNone/>
+            </a:pPr>
+            <a:r>
+              <a:rPr lang="en-US" sz="1200" b="1" dirty="0">
+                <a:solidFill>
+                  <a:srgbClr val="C9D4E6"/>
+                </a:solidFill>
+                <a:latin typeface="Arial" pitchFamily="34" charset="0"/>
+                <a:ea typeface="Arial" pitchFamily="34" charset="-122"/>
+                <a:cs typeface="Arial" pitchFamily="34" charset="-120"/>
+              </a:rPr>
+              <a:t>Hernán</a:t>
+            </a:r>
+            <a:endParaRPr lang="en-US" sz="1200" dirty="0"/>
+          </a:p>
+        </p:txBody>
+      </p:sp>
       <p:sp>
         <p:nvSpPr>
           <p:cNvPr id="25" name="Slide Number Placeholder 0"/>
@@ -4744,22 +7939,104 @@
       </p:grpSpPr>
       <p:sp>
         <p:nvSpPr>
-          <p:cNvPr id="2" name="Shape 0"/>
+          <p:cNvPr id="2" name="Sección"/>
+          <p:cNvSpPr txBox="1"/>
+          <p:nvPr/>
+        </p:nvSpPr>
+        <p:spPr>
+          <a:xfrm>
+            <a:off x="548640" y="411480"/>
+            <a:ext cx="11094415" cy="274320"/>
+          </a:xfrm>
+          <a:prstGeom prst="rect">
+            <a:avLst/>
+          </a:prstGeom>
+          <a:noFill/>
+          <a:ln/>
+        </p:spPr>
+        <p:txBody>
+          <a:bodyPr wrap="square" lIns="0" tIns="0" rIns="0" bIns="0" rtlCol="0" anchor="ctr"/>
+          <a:lstStyle/>
+          <a:p>
+            <a:pPr indent="0" marL="0">
+              <a:buNone/>
+            </a:pPr>
+            <a:r>
+              <a:rPr lang="en-US" sz="1100" b="1" spc="200" kern="0" dirty="0">
+                <a:solidFill>
+                  <a:srgbClr val="EC4F24"/>
+                </a:solidFill>
+                <a:latin typeface="Arial" pitchFamily="34" charset="0"/>
+                <a:ea typeface="Arial" pitchFamily="34" charset="-122"/>
+                <a:cs typeface="Arial" pitchFamily="34" charset="-120"/>
+              </a:rPr>
+              <a:t>03  ·  PÁGINAS  ·  TODAS LAS PÁGINAS</a:t>
+            </a:r>
+            <a:endParaRPr lang="en-US" sz="1100" dirty="0"/>
+          </a:p>
+        </p:txBody>
+      </p:sp>
+      <p:sp>
+        <p:nvSpPr>
+          <p:cNvPr id="3" name="Text 0"/>
           <p:cNvSpPr/>
-          <p:nvPr/>
-        </p:nvSpPr>
-        <p:spPr>
-          <a:xfrm>
-            <a:off x="8001000" y="1325880"/>
-            <a:ext cx="3749040" cy="3749040"/>
-          </a:xfrm>
-          <a:prstGeom prst="ellipse">
-            <a:avLst/>
+          <p:nvPr>
+            <p:ph idx="101" type="title" hasCustomPrompt="1"/>
+          </p:nvPr>
+        </p:nvSpPr>
+        <p:spPr>
+          <a:xfrm>
+            <a:off x="548640" y="713232"/>
+            <a:ext cx="11094415" cy="960120"/>
+          </a:xfrm>
+          <a:prstGeom prst="rect">
+            <a:avLst/>
+          </a:prstGeom>
+          <a:noFill/>
+          <a:ln/>
+        </p:spPr>
+        <p:txBody>
+          <a:bodyPr wrap="square" lIns="0" tIns="0" rIns="0" bIns="0" rtlCol="0" anchor="t"/>
+          <a:lstStyle/>
+          <a:p>
+            <a:pPr algn="l" indent="0" marL="0">
+              <a:buNone/>
+            </a:pPr>
+            <a:r>
+              <a:rPr lang="en-US" sz="2800" dirty="0">
+                <a:solidFill>
+                  <a:srgbClr val="FFFFFF"/>
+                </a:solidFill>
+                <a:latin typeface="Arial Black" pitchFamily="34" charset="0"/>
+                <a:ea typeface="Arial Black" pitchFamily="34" charset="-122"/>
+                <a:cs typeface="Arial Black" pitchFamily="34" charset="-120"/>
+              </a:rPr>
+              <a:t>Preguntas y propuestas</a:t>
+            </a:r>
+            <a:endParaRPr lang="en-US" sz="2800" dirty="0"/>
+          </a:p>
+        </p:txBody>
+      </p:sp>
+      <p:sp>
+        <p:nvSpPr>
+          <p:cNvPr id="4" name="Preguntas"/>
+          <p:cNvSpPr/>
+          <p:nvPr/>
+        </p:nvSpPr>
+        <p:spPr>
+          <a:xfrm>
+            <a:off x="548640" y="1417320"/>
+            <a:ext cx="5364328" cy="4800600"/>
+          </a:xfrm>
+          <a:prstGeom prst="roundRect">
+            <a:avLst>
+              <a:gd name="adj" fmla="val 2667"/>
+            </a:avLst>
           </a:prstGeom>
           <a:solidFill>
-            <a:srgbClr val="0B1830"/>
+            <a:srgbClr val="1A3052"/>
           </a:solidFill>
-          <a:ln w="25400">
+          <a:ln w="12700">
             <a:solidFill>
               <a:srgbClr val="2F4A72"/>
             </a:solidFill>
@@ -4767,79 +8044,61 @@
           </a:ln>
         </p:spPr>
       </p:sp>
-      <p:pic>
-        <p:nvPicPr>
-          <p:cNvPr id="3" name="Image 0" descr="La mascota de BOIA">    </p:cNvPr>
-          <p:cNvPicPr>
-            <a:picLocks noChangeAspect="1"/>
-          </p:cNvPicPr>
-          <p:nvPr/>
-        </p:nvPicPr>
-        <p:blipFill>
-          <a:blip r:embed="rId1"/>
-          <a:stretch>
-            <a:fillRect/>
-          </a:stretch>
-        </p:blipFill>
-        <p:spPr>
-          <a:xfrm>
-            <a:off x="8459616" y="1783080"/>
-            <a:ext cx="2831808" cy="2834640"/>
-          </a:xfrm>
-          <a:prstGeom prst="rect">
-            <a:avLst/>
-          </a:prstGeom>
-        </p:spPr>
-      </p:pic>
-      <p:sp>
-        <p:nvSpPr>
-          <p:cNvPr id="4" name="Número de parte"/>
+      <p:sp>
+        <p:nvSpPr>
+          <p:cNvPr id="5" name="Text 3"/>
           <p:cNvSpPr txBox="1"/>
           <p:nvPr/>
         </p:nvSpPr>
         <p:spPr>
           <a:xfrm>
-            <a:off x="548640" y="640080"/>
-            <a:ext cx="3657600" cy="1737360"/>
-          </a:xfrm>
-          <a:prstGeom prst="rect">
-            <a:avLst/>
-          </a:prstGeom>
-          <a:noFill/>
-          <a:ln/>
-        </p:spPr>
-        <p:txBody>
-          <a:bodyPr wrap="square" lIns="0" tIns="0" rIns="0" bIns="0" rtlCol="0" anchor="b"/>
-          <a:lstStyle/>
-          <a:p>
-            <a:pPr indent="0" marL="0">
-              <a:buNone/>
-            </a:pPr>
-            <a:r>
-              <a:rPr lang="en-US" sz="12000" dirty="0">
-                <a:solidFill>
-                  <a:srgbClr val="EC4F24"/>
+            <a:off x="822960" y="1691640"/>
+            <a:ext cx="457200" cy="457200"/>
+          </a:xfrm>
+          <a:prstGeom prst="ellipse">
+            <a:avLst/>
+          </a:prstGeom>
+          <a:solidFill>
+            <a:srgbClr val="EC4F24"/>
+          </a:solidFill>
+          <a:ln>
+            <a:solidFill>
+              <a:srgbClr val="EC4F24"/>
+            </a:solidFill>
+          </a:ln>
+        </p:spPr>
+        <p:txBody>
+          <a:bodyPr wrap="square" lIns="0" tIns="0" rIns="0" bIns="0" rtlCol="0" anchor="ctr"/>
+          <a:lstStyle/>
+          <a:p>
+            <a:pPr algn="ctr" indent="0" marL="0">
+              <a:buNone/>
+            </a:pPr>
+            <a:r>
+              <a:rPr lang="en-US" sz="1800" dirty="0">
+                <a:solidFill>
+                  <a:srgbClr val="FFFFFF"/>
                 </a:solidFill>
                 <a:latin typeface="Arial Black" pitchFamily="34" charset="0"/>
                 <a:ea typeface="Arial Black" pitchFamily="34" charset="-122"/>
                 <a:cs typeface="Arial Black" pitchFamily="34" charset="-120"/>
               </a:rPr>
-              <a:t>07</a:t>
-            </a:r>
-            <a:endParaRPr lang="en-US" sz="12000" dirty="0"/>
-          </a:p>
-        </p:txBody>
-      </p:sp>
-      <p:sp>
-        <p:nvSpPr>
-          <p:cNvPr id="5" name="Título"/>
+              <a:t>?</a:t>
+            </a:r>
+            <a:endParaRPr lang="en-US" sz="1800" dirty="0"/>
+          </a:p>
+        </p:txBody>
+      </p:sp>
+      <p:sp>
+        <p:nvSpPr>
+          <p:cNvPr id="6" name="Text 4"/>
           <p:cNvSpPr txBox="1"/>
           <p:nvPr/>
         </p:nvSpPr>
         <p:spPr>
           <a:xfrm>
-            <a:off x="548640" y="2606040"/>
-            <a:ext cx="7315200" cy="1417320"/>
+            <a:off x="1417320" y="1691640"/>
+            <a:ext cx="4267048" cy="457200"/>
           </a:xfrm>
           <a:prstGeom prst="rect">
             <a:avLst/>
@@ -4848,14 +8107,14 @@
           <a:ln/>
         </p:spPr>
         <p:txBody>
-          <a:bodyPr wrap="square" lIns="0" tIns="0" rIns="0" bIns="0" rtlCol="0" anchor="t"/>
+          <a:bodyPr wrap="square" lIns="0" tIns="0" rIns="0" bIns="0" rtlCol="0" anchor="ctr"/>
           <a:lstStyle/>
           <a:p>
             <a:pPr indent="0" marL="0">
               <a:buNone/>
             </a:pPr>
             <a:r>
-              <a:rPr lang="en-US" sz="4400" dirty="0">
+              <a:rPr lang="en-US" sz="2000" dirty="0">
                 <a:solidFill>
                   <a:srgbClr val="FFFFFF"/>
                 </a:solidFill>
@@ -4863,22 +8122,22 @@
                 <a:ea typeface="Arial Black" pitchFamily="34" charset="-122"/>
                 <a:cs typeface="Arial Black" pitchFamily="34" charset="-120"/>
               </a:rPr>
-              <a:t>Admin</a:t>
-            </a:r>
-            <a:endParaRPr lang="en-US" sz="4400" dirty="0"/>
-          </a:p>
-        </p:txBody>
-      </p:sp>
-      <p:sp>
-        <p:nvSpPr>
-          <p:cNvPr id="6" name="Text 3"/>
+              <a:t>Preguntas</a:t>
+            </a:r>
+            <a:endParaRPr lang="en-US" sz="2000" dirty="0"/>
+          </a:p>
+        </p:txBody>
+      </p:sp>
+      <p:sp>
+        <p:nvSpPr>
+          <p:cNvPr id="7" name="Text 5"/>
           <p:cNvSpPr txBox="1"/>
           <p:nvPr/>
         </p:nvSpPr>
         <p:spPr>
           <a:xfrm>
-            <a:off x="548640" y="4114800"/>
-            <a:ext cx="6949440" cy="822960"/>
+            <a:off x="822960" y="2377440"/>
+            <a:ext cx="4815688" cy="3611880"/>
           </a:xfrm>
           <a:prstGeom prst="rect">
             <a:avLst/>
@@ -4890,21 +8149,284 @@
           <a:bodyPr wrap="square" lIns="0" tIns="0" rIns="0" bIns="0" rtlCol="0" anchor="t"/>
           <a:lstStyle/>
           <a:p>
-            <a:pPr indent="0" marL="0">
-              <a:buNone/>
-            </a:pPr>
-            <a:r>
-              <a:rPr lang="en-US" sz="1800" dirty="0">
-                <a:solidFill>
-                  <a:srgbClr val="C9D4E6"/>
+            <a:pPr marL="228600" indent="-228600">
+              <a:spcAft>
+                <a:spcPts val="1200"/>
+              </a:spcAft>
+              <a:buSzPct val="100000"/>
+              <a:buChar char="•"/>
+            </a:pPr>
+            <a:r>
+              <a:rPr lang="en-US" sz="1500" dirty="0">
+                <a:solidFill>
+                  <a:srgbClr val="FFFFFF"/>
                 </a:solidFill>
                 <a:latin typeface="Arial" pitchFamily="34" charset="0"/>
                 <a:ea typeface="Arial" pitchFamily="34" charset="-122"/>
                 <a:cs typeface="Arial" pitchFamily="34" charset="-120"/>
               </a:rPr>
-              <a:t>El panel para cambiar la web sin tocar código</a:t>
+              <a:t>¿La taquilla con 2 € de descuento con Carnet se queda para Halloween y SONIDO, o también Nochevieja?</a:t>
+            </a:r>
+            <a:endParaRPr lang="en-US" sz="1500" dirty="0"/>
+          </a:p>
+          <a:p>
+            <a:pPr marL="228600" indent="-228600">
+              <a:spcAft>
+                <a:spcPts val="1200"/>
+              </a:spcAft>
+              <a:buSzPct val="100000"/>
+              <a:buChar char="•"/>
+            </a:pPr>
+            <a:r>
+              <a:rPr lang="en-US" sz="1500" dirty="0">
+                <a:solidFill>
+                  <a:srgbClr val="FFFFFF"/>
+                </a:solidFill>
+                <a:latin typeface="Arial" pitchFamily="34" charset="0"/>
+                <a:ea typeface="Arial" pitchFamily="34" charset="-122"/>
+                <a:cs typeface="Arial" pitchFamily="34" charset="-120"/>
+              </a:rPr>
+              <a:t>¿Quién de BOIA tiene las fotos de fiestas pasadas y quién elige cuáles salen?</a:t>
+            </a:r>
+            <a:endParaRPr lang="en-US" sz="1500" dirty="0"/>
+          </a:p>
+          <a:p>
+            <a:pPr marL="228600" indent="-228600">
+              <a:spcAft>
+                <a:spcPts val="1200"/>
+              </a:spcAft>
+              <a:buSzPct val="100000"/>
+              <a:buChar char="•"/>
+            </a:pPr>
+            <a:r>
+              <a:rPr lang="en-US" sz="1500" dirty="0">
+                <a:solidFill>
+                  <a:srgbClr val="FFFFFF"/>
+                </a:solidFill>
+                <a:latin typeface="Arial" pitchFamily="34" charset="0"/>
+                <a:ea typeface="Arial" pitchFamily="34" charset="-122"/>
+                <a:cs typeface="Arial" pitchFamily="34" charset="-120"/>
+              </a:rPr>
+              <a:t>¿Qué productos vendemos en la fiesta y quién les hace las fotos?</a:t>
+            </a:r>
+            <a:endParaRPr lang="en-US" sz="1500" dirty="0"/>
+          </a:p>
+          <a:p>
+            <a:pPr marL="228600" indent="-228600">
+              <a:spcAft>
+                <a:spcPts val="1200"/>
+              </a:spcAft>
+              <a:buSzPct val="100000"/>
+              <a:buChar char="•"/>
+            </a:pPr>
+            <a:r>
+              <a:rPr lang="en-US" sz="1500" dirty="0">
+                <a:solidFill>
+                  <a:srgbClr val="FFFFFF"/>
+                </a:solidFill>
+                <a:latin typeface="Arial" pitchFamily="34" charset="0"/>
+                <a:ea typeface="Arial" pitchFamily="34" charset="-122"/>
+                <a:cs typeface="Arial" pitchFamily="34" charset="-120"/>
+              </a:rPr>
+              <a:t>¿Quién es el titular legal de la web (asociación, empresa, persona) y quién revisa los textos?</a:t>
+            </a:r>
+            <a:endParaRPr lang="en-US" sz="1500" dirty="0"/>
+          </a:p>
+        </p:txBody>
+      </p:sp>
+      <p:sp>
+        <p:nvSpPr>
+          <p:cNvPr id="8" name="Propuestas"/>
+          <p:cNvSpPr/>
+          <p:nvPr/>
+        </p:nvSpPr>
+        <p:spPr>
+          <a:xfrm>
+            <a:off x="6278728" y="1417320"/>
+            <a:ext cx="5364328" cy="4800600"/>
+          </a:xfrm>
+          <a:prstGeom prst="roundRect">
+            <a:avLst>
+              <a:gd name="adj" fmla="val 2667"/>
+            </a:avLst>
+          </a:prstGeom>
+          <a:solidFill>
+            <a:srgbClr val="1A3052"/>
+          </a:solidFill>
+          <a:ln w="12700">
+            <a:solidFill>
+              <a:srgbClr val="2F4A72"/>
+            </a:solidFill>
+            <a:prstDash val="solid"/>
+          </a:ln>
+        </p:spPr>
+      </p:sp>
+      <p:sp>
+        <p:nvSpPr>
+          <p:cNvPr id="9" name="Text 7"/>
+          <p:cNvSpPr txBox="1"/>
+          <p:nvPr/>
+        </p:nvSpPr>
+        <p:spPr>
+          <a:xfrm>
+            <a:off x="6553048" y="1691640"/>
+            <a:ext cx="457200" cy="457200"/>
+          </a:xfrm>
+          <a:prstGeom prst="ellipse">
+            <a:avLst/>
+          </a:prstGeom>
+          <a:solidFill>
+            <a:srgbClr val="B9A6FF"/>
+          </a:solidFill>
+          <a:ln>
+            <a:solidFill>
+              <a:srgbClr val="B9A6FF"/>
+            </a:solidFill>
+          </a:ln>
+        </p:spPr>
+        <p:txBody>
+          <a:bodyPr wrap="square" lIns="0" tIns="0" rIns="0" bIns="0" rtlCol="0" anchor="ctr"/>
+          <a:lstStyle/>
+          <a:p>
+            <a:pPr algn="ctr" indent="0" marL="0">
+              <a:buNone/>
+            </a:pPr>
+            <a:r>
+              <a:rPr lang="en-US" sz="1800" dirty="0">
+                <a:solidFill>
+                  <a:srgbClr val="05080F"/>
+                </a:solidFill>
+                <a:latin typeface="Arial Black" pitchFamily="34" charset="0"/>
+                <a:ea typeface="Arial Black" pitchFamily="34" charset="-122"/>
+                <a:cs typeface="Arial Black" pitchFamily="34" charset="-120"/>
+              </a:rPr>
+              <a:t>+</a:t>
             </a:r>
             <a:endParaRPr lang="en-US" sz="1800" dirty="0"/>
+          </a:p>
+        </p:txBody>
+      </p:sp>
+      <p:sp>
+        <p:nvSpPr>
+          <p:cNvPr id="10" name="Text 8"/>
+          <p:cNvSpPr txBox="1"/>
+          <p:nvPr/>
+        </p:nvSpPr>
+        <p:spPr>
+          <a:xfrm>
+            <a:off x="7147408" y="1691640"/>
+            <a:ext cx="4267048" cy="457200"/>
+          </a:xfrm>
+          <a:prstGeom prst="rect">
+            <a:avLst/>
+          </a:prstGeom>
+          <a:noFill/>
+          <a:ln/>
+        </p:spPr>
+        <p:txBody>
+          <a:bodyPr wrap="square" lIns="0" tIns="0" rIns="0" bIns="0" rtlCol="0" anchor="ctr"/>
+          <a:lstStyle/>
+          <a:p>
+            <a:pPr indent="0" marL="0">
+              <a:buNone/>
+            </a:pPr>
+            <a:r>
+              <a:rPr lang="en-US" sz="2000" dirty="0">
+                <a:solidFill>
+                  <a:srgbClr val="FFFFFF"/>
+                </a:solidFill>
+                <a:latin typeface="Arial Black" pitchFamily="34" charset="0"/>
+                <a:ea typeface="Arial Black" pitchFamily="34" charset="-122"/>
+                <a:cs typeface="Arial Black" pitchFamily="34" charset="-120"/>
+              </a:rPr>
+              <a:t>Propuestas</a:t>
+            </a:r>
+            <a:endParaRPr lang="en-US" sz="2000" dirty="0"/>
+          </a:p>
+        </p:txBody>
+      </p:sp>
+      <p:sp>
+        <p:nvSpPr>
+          <p:cNvPr id="11" name="Text 9"/>
+          <p:cNvSpPr txBox="1"/>
+          <p:nvPr/>
+        </p:nvSpPr>
+        <p:spPr>
+          <a:xfrm>
+            <a:off x="6553048" y="2377440"/>
+            <a:ext cx="4815688" cy="3611880"/>
+          </a:xfrm>
+          <a:prstGeom prst="rect">
+            <a:avLst/>
+          </a:prstGeom>
+          <a:noFill/>
+          <a:ln/>
+        </p:spPr>
+        <p:txBody>
+          <a:bodyPr wrap="square" lIns="0" tIns="0" rIns="0" bIns="0" rtlCol="0" anchor="t"/>
+          <a:lstStyle/>
+          <a:p>
+            <a:pPr marL="228600" indent="-228600">
+              <a:spcAft>
+                <a:spcPts val="1200"/>
+              </a:spcAft>
+              <a:buSzPct val="100000"/>
+              <a:buChar char="•"/>
+            </a:pPr>
+            <a:r>
+              <a:rPr lang="en-US" sz="1500" dirty="0">
+                <a:solidFill>
+                  <a:srgbClr val="FFFFFF"/>
+                </a:solidFill>
+                <a:latin typeface="Arial" pitchFamily="34" charset="0"/>
+                <a:ea typeface="Arial" pitchFamily="34" charset="-122"/>
+                <a:cs typeface="Arial" pitchFamily="34" charset="-120"/>
+              </a:rPr>
+              <a:t>Poder marcar «sólo en taquilla» desde el Admin, sin tocar el contenido a mano.</a:t>
+            </a:r>
+            <a:endParaRPr lang="en-US" sz="1500" dirty="0"/>
+          </a:p>
+          <a:p>
+            <a:pPr marL="228600" indent="-228600">
+              <a:spcAft>
+                <a:spcPts val="1200"/>
+              </a:spcAft>
+              <a:buSzPct val="100000"/>
+              <a:buChar char="•"/>
+            </a:pPr>
+            <a:r>
+              <a:rPr lang="en-US" sz="1500" dirty="0">
+                <a:solidFill>
+                  <a:srgbClr val="FFFFFF"/>
+                </a:solidFill>
+                <a:latin typeface="Arial" pitchFamily="34" charset="0"/>
+                <a:ea typeface="Arial" pitchFamily="34" charset="-122"/>
+                <a:cs typeface="Arial" pitchFamily="34" charset="-120"/>
+              </a:rPr>
+              <a:t>Una foto de cada fiesta pasada ya basta para que la página de fotos no salga vacía.</a:t>
+            </a:r>
+            <a:endParaRPr lang="en-US" sz="1500" dirty="0"/>
+          </a:p>
+          <a:p>
+            <a:pPr marL="228600" indent="-228600">
+              <a:spcAft>
+                <a:spcPts val="1200"/>
+              </a:spcAft>
+              <a:buSzPct val="100000"/>
+              <a:buChar char="•"/>
+            </a:pPr>
+            <a:r>
+              <a:rPr lang="en-US" sz="1500" dirty="0">
+                <a:solidFill>
+                  <a:srgbClr val="FFFFFF"/>
+                </a:solidFill>
+                <a:latin typeface="Arial" pitchFamily="34" charset="0"/>
+                <a:ea typeface="Arial" pitchFamily="34" charset="-122"/>
+                <a:cs typeface="Arial" pitchFamily="34" charset="-120"/>
+              </a:rPr>
+              <a:t>Poner precio orientativo a cada producto de la tienda para que nadie pregunte por Instagram.</a:t>
+            </a:r>
+            <a:endParaRPr lang="en-US" sz="1500" dirty="0"/>
           </a:p>
         </p:txBody>
       </p:sp>
@@ -4983,145 +8505,20 @@
       </p:grpSpPr>
       <p:sp>
         <p:nvSpPr>
-          <p:cNvPr id="2" name="Sección"/>
-          <p:cNvSpPr txBox="1"/>
-          <p:nvPr/>
-        </p:nvSpPr>
-        <p:spPr>
-          <a:xfrm>
-            <a:off x="548640" y="411480"/>
-            <a:ext cx="11094415" cy="274320"/>
-          </a:xfrm>
-          <a:prstGeom prst="rect">
-            <a:avLst/>
-          </a:prstGeom>
-          <a:noFill/>
-          <a:ln/>
-        </p:spPr>
-        <p:txBody>
-          <a:bodyPr wrap="square" lIns="0" tIns="0" rIns="0" bIns="0" rtlCol="0" anchor="ctr"/>
-          <a:lstStyle/>
-          <a:p>
-            <a:pPr indent="0" marL="0">
-              <a:buNone/>
-            </a:pPr>
-            <a:r>
-              <a:rPr lang="en-US" sz="1100" b="1" spc="200" kern="0" dirty="0">
-                <a:solidFill>
-                  <a:srgbClr val="EC4F24"/>
-                </a:solidFill>
-                <a:latin typeface="Arial" pitchFamily="34" charset="0"/>
-                <a:ea typeface="Arial" pitchFamily="34" charset="-122"/>
-                <a:cs typeface="Arial" pitchFamily="34" charset="-120"/>
-              </a:rPr>
-              <a:t>07  ·  ADMIN</a:t>
-            </a:r>
-            <a:endParaRPr lang="en-US" sz="1100" dirty="0"/>
-          </a:p>
-        </p:txBody>
-      </p:sp>
-      <p:sp>
-        <p:nvSpPr>
-          <p:cNvPr id="3" name="Text 0"/>
+          <p:cNvPr id="2" name="Shape 0"/>
           <p:cNvSpPr/>
-          <p:nvPr>
-            <p:ph idx="101" type="title" hasCustomPrompt="1"/>
-          </p:nvPr>
-        </p:nvSpPr>
-        <p:spPr>
-          <a:xfrm>
-            <a:off x="548640" y="713232"/>
-            <a:ext cx="11094415" cy="960120"/>
-          </a:xfrm>
-          <a:prstGeom prst="rect">
-            <a:avLst/>
-          </a:prstGeom>
-          <a:noFill/>
-          <a:ln/>
-        </p:spPr>
-        <p:txBody>
-          <a:bodyPr wrap="square" lIns="0" tIns="0" rIns="0" bIns="0" rtlCol="0" anchor="t"/>
-          <a:lstStyle/>
-          <a:p>
-            <a:pPr algn="l" indent="0" marL="0">
-              <a:buNone/>
-            </a:pPr>
-            <a:r>
-              <a:rPr lang="en-US" sz="2800" dirty="0">
-                <a:solidFill>
-                  <a:srgbClr val="FFFFFF"/>
-                </a:solidFill>
-                <a:latin typeface="Arial Black" pitchFamily="34" charset="0"/>
-                <a:ea typeface="Arial Black" pitchFamily="34" charset="-122"/>
-                <a:cs typeface="Arial Black" pitchFamily="34" charset="-120"/>
-              </a:rPr>
-              <a:t>Pendiente</a:t>
-            </a:r>
-            <a:endParaRPr lang="en-US" sz="2800" dirty="0"/>
-          </a:p>
-        </p:txBody>
-      </p:sp>
-      <p:sp>
-        <p:nvSpPr>
-          <p:cNvPr id="4" name="Text 2"/>
-          <p:cNvSpPr txBox="1"/>
-          <p:nvPr/>
-        </p:nvSpPr>
-        <p:spPr>
-          <a:xfrm>
-            <a:off x="548640" y="1828800"/>
-            <a:ext cx="6949440" cy="4251960"/>
-          </a:xfrm>
-          <a:prstGeom prst="rect">
-            <a:avLst/>
-          </a:prstGeom>
-          <a:noFill/>
-          <a:ln/>
-        </p:spPr>
-        <p:txBody>
-          <a:bodyPr wrap="square" lIns="0" tIns="0" rIns="0" bIns="0" rtlCol="0" anchor="t"/>
-          <a:lstStyle/>
-          <a:p>
-            <a:pPr indent="0" marL="0">
-              <a:lnSpc>
-                <a:spcPct val="105000"/>
-              </a:lnSpc>
-              <a:spcAft>
-                <a:spcPts val="1000"/>
-              </a:spcAft>
-              <a:buNone/>
-            </a:pPr>
-            <a:r>
-              <a:rPr lang="en-US" sz="1600" dirty="0">
-                <a:solidFill>
-                  <a:srgbClr val="FFFFFF"/>
-                </a:solidFill>
-                <a:latin typeface="Arial" pitchFamily="34" charset="0"/>
-                <a:ea typeface="Arial" pitchFamily="34" charset="-122"/>
-                <a:cs typeface="Arial" pitchFamily="34" charset="-120"/>
-              </a:rPr>
-              <a:t>Esta parte está por escribir: la escribe la tarea T210.</a:t>
-            </a:r>
-            <a:endParaRPr lang="en-US" sz="1600" dirty="0"/>
-          </a:p>
-        </p:txBody>
-      </p:sp>
-      <p:sp>
-        <p:nvSpPr>
-          <p:cNvPr id="5" name="Shape 3"/>
-          <p:cNvSpPr/>
-          <p:nvPr/>
-        </p:nvSpPr>
-        <p:spPr>
-          <a:xfrm>
-            <a:off x="8229600" y="1828800"/>
-            <a:ext cx="3383280" cy="3383280"/>
+          <p:nvPr/>
+        </p:nvSpPr>
+        <p:spPr>
+          <a:xfrm>
+            <a:off x="8001000" y="1325880"/>
+            <a:ext cx="3749040" cy="3749040"/>
           </a:xfrm>
           <a:prstGeom prst="ellipse">
             <a:avLst/>
           </a:prstGeom>
           <a:solidFill>
-            <a:srgbClr val="07101F"/>
+            <a:srgbClr val="0B1830"/>
           </a:solidFill>
           <a:ln w="25400">
             <a:solidFill>
@@ -5133,7 +8530,7 @@
       </p:sp>
       <p:pic>
         <p:nvPicPr>
-          <p:cNvPr id="6" name="Image 0" descr="La mascota de BOIA">    </p:cNvPr>
+          <p:cNvPr id="3" name="Image 0" descr="La mascota de BOIA">    </p:cNvPr>
           <p:cNvPicPr>
             <a:picLocks noChangeAspect="1"/>
           </p:cNvPicPr>
@@ -5147,14 +8544,131 @@
         </p:blipFill>
         <p:spPr>
           <a:xfrm>
-            <a:off x="8642359" y="2240280"/>
-            <a:ext cx="2557762" cy="2560320"/>
+            <a:off x="8459616" y="1783080"/>
+            <a:ext cx="2831808" cy="2834640"/>
           </a:xfrm>
           <a:prstGeom prst="rect">
             <a:avLst/>
           </a:prstGeom>
         </p:spPr>
       </p:pic>
+      <p:sp>
+        <p:nvSpPr>
+          <p:cNvPr id="4" name="Número de parte"/>
+          <p:cNvSpPr txBox="1"/>
+          <p:nvPr/>
+        </p:nvSpPr>
+        <p:spPr>
+          <a:xfrm>
+            <a:off x="548640" y="640080"/>
+            <a:ext cx="3657600" cy="1737360"/>
+          </a:xfrm>
+          <a:prstGeom prst="rect">
+            <a:avLst/>
+          </a:prstGeom>
+          <a:noFill/>
+          <a:ln/>
+        </p:spPr>
+        <p:txBody>
+          <a:bodyPr wrap="square" lIns="0" tIns="0" rIns="0" bIns="0" rtlCol="0" anchor="b"/>
+          <a:lstStyle/>
+          <a:p>
+            <a:pPr indent="0" marL="0">
+              <a:buNone/>
+            </a:pPr>
+            <a:r>
+              <a:rPr lang="en-US" sz="12000" dirty="0">
+                <a:solidFill>
+                  <a:srgbClr val="EC4F24"/>
+                </a:solidFill>
+                <a:latin typeface="Arial Black" pitchFamily="34" charset="0"/>
+                <a:ea typeface="Arial Black" pitchFamily="34" charset="-122"/>
+                <a:cs typeface="Arial Black" pitchFamily="34" charset="-120"/>
+              </a:rPr>
+              <a:t>04</a:t>
+            </a:r>
+            <a:endParaRPr lang="en-US" sz="12000" dirty="0"/>
+          </a:p>
+        </p:txBody>
+      </p:sp>
+      <p:sp>
+        <p:nvSpPr>
+          <p:cNvPr id="5" name="Título"/>
+          <p:cNvSpPr txBox="1"/>
+          <p:nvPr/>
+        </p:nvSpPr>
+        <p:spPr>
+          <a:xfrm>
+            <a:off x="548640" y="2606040"/>
+            <a:ext cx="7315200" cy="1417320"/>
+          </a:xfrm>
+          <a:prstGeom prst="rect">
+            <a:avLst/>
+          </a:prstGeom>
+          <a:noFill/>
+          <a:ln/>
+        </p:spPr>
+        <p:txBody>
+          <a:bodyPr wrap="square" lIns="0" tIns="0" rIns="0" bIns="0" rtlCol="0" anchor="t"/>
+          <a:lstStyle/>
+          <a:p>
+            <a:pPr indent="0" marL="0">
+              <a:buNone/>
+            </a:pPr>
+            <a:r>
+              <a:rPr lang="en-US" sz="4400" dirty="0">
+                <a:solidFill>
+                  <a:srgbClr val="FFFFFF"/>
+                </a:solidFill>
+                <a:latin typeface="Arial Black" pitchFamily="34" charset="0"/>
+                <a:ea typeface="Arial Black" pitchFamily="34" charset="-122"/>
+                <a:cs typeface="Arial Black" pitchFamily="34" charset="-120"/>
+              </a:rPr>
+              <a:t>Carnet BOIA y Ranking</a:t>
+            </a:r>
+            <a:endParaRPr lang="en-US" sz="4400" dirty="0"/>
+          </a:p>
+        </p:txBody>
+      </p:sp>
+      <p:sp>
+        <p:nvSpPr>
+          <p:cNvPr id="6" name="Text 3"/>
+          <p:cNvSpPr txBox="1"/>
+          <p:nvPr/>
+        </p:nvSpPr>
+        <p:spPr>
+          <a:xfrm>
+            <a:off x="548640" y="4114800"/>
+            <a:ext cx="6949440" cy="822960"/>
+          </a:xfrm>
+          <a:prstGeom prst="rect">
+            <a:avLst/>
+          </a:prstGeom>
+          <a:noFill/>
+          <a:ln/>
+        </p:spPr>
+        <p:txBody>
+          <a:bodyPr wrap="square" lIns="0" tIns="0" rIns="0" bIns="0" rtlCol="0" anchor="t"/>
+          <a:lstStyle/>
+          <a:p>
+            <a:pPr indent="0" marL="0">
+              <a:buNone/>
+            </a:pPr>
+            <a:r>
+              <a:rPr lang="en-US" sz="1800" dirty="0">
+                <a:solidFill>
+                  <a:srgbClr val="C9D4E6"/>
+                </a:solidFill>
+                <a:latin typeface="Arial" pitchFamily="34" charset="0"/>
+                <a:ea typeface="Arial" pitchFamily="34" charset="-122"/>
+                <a:cs typeface="Arial" pitchFamily="34" charset="-120"/>
+              </a:rPr>
+              <a:t>El Carnet con sus sellos, el sello de la fiesta y la clasificación</a:t>
+            </a:r>
+            <a:endParaRPr lang="en-US" sz="1800" dirty="0"/>
+          </a:p>
+        </p:txBody>
+      </p:sp>
       <p:sp>
         <p:nvSpPr>
           <p:cNvPr id="25" name="Slide Number Placeholder 0"/>
@@ -5230,20 +8744,145 @@
       </p:grpSpPr>
       <p:sp>
         <p:nvSpPr>
-          <p:cNvPr id="2" name="Shape 0"/>
+          <p:cNvPr id="2" name="Sección"/>
+          <p:cNvSpPr txBox="1"/>
+          <p:nvPr/>
+        </p:nvSpPr>
+        <p:spPr>
+          <a:xfrm>
+            <a:off x="548640" y="411480"/>
+            <a:ext cx="11094415" cy="274320"/>
+          </a:xfrm>
+          <a:prstGeom prst="rect">
+            <a:avLst/>
+          </a:prstGeom>
+          <a:noFill/>
+          <a:ln/>
+        </p:spPr>
+        <p:txBody>
+          <a:bodyPr wrap="square" lIns="0" tIns="0" rIns="0" bIns="0" rtlCol="0" anchor="ctr"/>
+          <a:lstStyle/>
+          <a:p>
+            <a:pPr indent="0" marL="0">
+              <a:buNone/>
+            </a:pPr>
+            <a:r>
+              <a:rPr lang="en-US" sz="1100" b="1" spc="200" kern="0" dirty="0">
+                <a:solidFill>
+                  <a:srgbClr val="EC4F24"/>
+                </a:solidFill>
+                <a:latin typeface="Arial" pitchFamily="34" charset="0"/>
+                <a:ea typeface="Arial" pitchFamily="34" charset="-122"/>
+                <a:cs typeface="Arial" pitchFamily="34" charset="-120"/>
+              </a:rPr>
+              <a:t>04  ·  CARNET BOIA Y RANKING</a:t>
+            </a:r>
+            <a:endParaRPr lang="en-US" sz="1100" dirty="0"/>
+          </a:p>
+        </p:txBody>
+      </p:sp>
+      <p:sp>
+        <p:nvSpPr>
+          <p:cNvPr id="3" name="Text 0"/>
           <p:cNvSpPr/>
-          <p:nvPr/>
-        </p:nvSpPr>
-        <p:spPr>
-          <a:xfrm>
-            <a:off x="8001000" y="1325880"/>
-            <a:ext cx="3749040" cy="3749040"/>
+          <p:nvPr>
+            <p:ph idx="101" type="title" hasCustomPrompt="1"/>
+          </p:nvPr>
+        </p:nvSpPr>
+        <p:spPr>
+          <a:xfrm>
+            <a:off x="548640" y="713232"/>
+            <a:ext cx="11094415" cy="960120"/>
+          </a:xfrm>
+          <a:prstGeom prst="rect">
+            <a:avLst/>
+          </a:prstGeom>
+          <a:noFill/>
+          <a:ln/>
+        </p:spPr>
+        <p:txBody>
+          <a:bodyPr wrap="square" lIns="0" tIns="0" rIns="0" bIns="0" rtlCol="0" anchor="t"/>
+          <a:lstStyle/>
+          <a:p>
+            <a:pPr algn="l" indent="0" marL="0">
+              <a:buNone/>
+            </a:pPr>
+            <a:r>
+              <a:rPr lang="en-US" sz="2800" dirty="0">
+                <a:solidFill>
+                  <a:srgbClr val="FFFFFF"/>
+                </a:solidFill>
+                <a:latin typeface="Arial Black" pitchFamily="34" charset="0"/>
+                <a:ea typeface="Arial Black" pitchFamily="34" charset="-122"/>
+                <a:cs typeface="Arial Black" pitchFamily="34" charset="-120"/>
+              </a:rPr>
+              <a:t>Pendiente</a:t>
+            </a:r>
+            <a:endParaRPr lang="en-US" sz="2800" dirty="0"/>
+          </a:p>
+        </p:txBody>
+      </p:sp>
+      <p:sp>
+        <p:nvSpPr>
+          <p:cNvPr id="4" name="Text 2"/>
+          <p:cNvSpPr txBox="1"/>
+          <p:nvPr/>
+        </p:nvSpPr>
+        <p:spPr>
+          <a:xfrm>
+            <a:off x="548640" y="1828800"/>
+            <a:ext cx="6949440" cy="4251960"/>
+          </a:xfrm>
+          <a:prstGeom prst="rect">
+            <a:avLst/>
+          </a:prstGeom>
+          <a:noFill/>
+          <a:ln/>
+        </p:spPr>
+        <p:txBody>
+          <a:bodyPr wrap="square" lIns="0" tIns="0" rIns="0" bIns="0" rtlCol="0" anchor="t"/>
+          <a:lstStyle/>
+          <a:p>
+            <a:pPr indent="0" marL="0">
+              <a:lnSpc>
+                <a:spcPct val="105000"/>
+              </a:lnSpc>
+              <a:spcAft>
+                <a:spcPts val="1000"/>
+              </a:spcAft>
+              <a:buNone/>
+            </a:pPr>
+            <a:r>
+              <a:rPr lang="en-US" sz="1600" dirty="0">
+                <a:solidFill>
+                  <a:srgbClr val="FFFFFF"/>
+                </a:solidFill>
+                <a:latin typeface="Arial" pitchFamily="34" charset="0"/>
+                <a:ea typeface="Arial" pitchFamily="34" charset="-122"/>
+                <a:cs typeface="Arial" pitchFamily="34" charset="-120"/>
+              </a:rPr>
+              <a:t>Esta parte está por escribir: la escribe la tarea T207.</a:t>
+            </a:r>
+            <a:endParaRPr lang="en-US" sz="1600" dirty="0"/>
+          </a:p>
+        </p:txBody>
+      </p:sp>
+      <p:sp>
+        <p:nvSpPr>
+          <p:cNvPr id="5" name="Shape 3"/>
+          <p:cNvSpPr/>
+          <p:nvPr/>
+        </p:nvSpPr>
+        <p:spPr>
+          <a:xfrm>
+            <a:off x="8229600" y="1828800"/>
+            <a:ext cx="3383280" cy="3383280"/>
           </a:xfrm>
           <a:prstGeom prst="ellipse">
             <a:avLst/>
           </a:prstGeom>
           <a:solidFill>
-            <a:srgbClr val="0B1830"/>
+            <a:srgbClr val="07101F"/>
           </a:solidFill>
           <a:ln w="25400">
             <a:solidFill>
@@ -5255,7 +8894,7 @@
       </p:sp>
       <p:pic>
         <p:nvPicPr>
-          <p:cNvPr id="3" name="Image 0" descr="La mascota de BOIA">    </p:cNvPr>
+          <p:cNvPr id="6" name="Image 0" descr="La mascota de BOIA">    </p:cNvPr>
           <p:cNvPicPr>
             <a:picLocks noChangeAspect="1"/>
           </p:cNvPicPr>
@@ -5269,131 +8908,14 @@
         </p:blipFill>
         <p:spPr>
           <a:xfrm>
-            <a:off x="8459616" y="1783080"/>
-            <a:ext cx="2831808" cy="2834640"/>
+            <a:off x="8642359" y="2240280"/>
+            <a:ext cx="2557762" cy="2560320"/>
           </a:xfrm>
           <a:prstGeom prst="rect">
             <a:avLst/>
           </a:prstGeom>
         </p:spPr>
       </p:pic>
-      <p:sp>
-        <p:nvSpPr>
-          <p:cNvPr id="4" name="Número de parte"/>
-          <p:cNvSpPr txBox="1"/>
-          <p:nvPr/>
-        </p:nvSpPr>
-        <p:spPr>
-          <a:xfrm>
-            <a:off x="548640" y="640080"/>
-            <a:ext cx="3657600" cy="1737360"/>
-          </a:xfrm>
-          <a:prstGeom prst="rect">
-            <a:avLst/>
-          </a:prstGeom>
-          <a:noFill/>
-          <a:ln/>
-        </p:spPr>
-        <p:txBody>
-          <a:bodyPr wrap="square" lIns="0" tIns="0" rIns="0" bIns="0" rtlCol="0" anchor="b"/>
-          <a:lstStyle/>
-          <a:p>
-            <a:pPr indent="0" marL="0">
-              <a:buNone/>
-            </a:pPr>
-            <a:r>
-              <a:rPr lang="en-US" sz="12000" dirty="0">
-                <a:solidFill>
-                  <a:srgbClr val="EC4F24"/>
-                </a:solidFill>
-                <a:latin typeface="Arial Black" pitchFamily="34" charset="0"/>
-                <a:ea typeface="Arial Black" pitchFamily="34" charset="-122"/>
-                <a:cs typeface="Arial Black" pitchFamily="34" charset="-120"/>
-              </a:rPr>
-              <a:t>08</a:t>
-            </a:r>
-            <a:endParaRPr lang="en-US" sz="12000" dirty="0"/>
-          </a:p>
-        </p:txBody>
-      </p:sp>
-      <p:sp>
-        <p:nvSpPr>
-          <p:cNvPr id="5" name="Título"/>
-          <p:cNvSpPr txBox="1"/>
-          <p:nvPr/>
-        </p:nvSpPr>
-        <p:spPr>
-          <a:xfrm>
-            <a:off x="548640" y="2606040"/>
-            <a:ext cx="7315200" cy="1417320"/>
-          </a:xfrm>
-          <a:prstGeom prst="rect">
-            <a:avLst/>
-          </a:prstGeom>
-          <a:noFill/>
-          <a:ln/>
-        </p:spPr>
-        <p:txBody>
-          <a:bodyPr wrap="square" lIns="0" tIns="0" rIns="0" bIns="0" rtlCol="0" anchor="t"/>
-          <a:lstStyle/>
-          <a:p>
-            <a:pPr indent="0" marL="0">
-              <a:buNone/>
-            </a:pPr>
-            <a:r>
-              <a:rPr lang="en-US" sz="4400" dirty="0">
-                <a:solidFill>
-                  <a:srgbClr val="FFFFFF"/>
-                </a:solidFill>
-                <a:latin typeface="Arial Black" pitchFamily="34" charset="0"/>
-                <a:ea typeface="Arial Black" pitchFamily="34" charset="-122"/>
-                <a:cs typeface="Arial Black" pitchFamily="34" charset="-120"/>
-              </a:rPr>
-              <a:t>Hoja de ruta para salir</a:t>
-            </a:r>
-            <a:endParaRPr lang="en-US" sz="4400" dirty="0"/>
-          </a:p>
-        </p:txBody>
-      </p:sp>
-      <p:sp>
-        <p:nvSpPr>
-          <p:cNvPr id="6" name="Text 3"/>
-          <p:cNvSpPr txBox="1"/>
-          <p:nvPr/>
-        </p:nvSpPr>
-        <p:spPr>
-          <a:xfrm>
-            <a:off x="548640" y="4114800"/>
-            <a:ext cx="6949440" cy="822960"/>
-          </a:xfrm>
-          <a:prstGeom prst="rect">
-            <a:avLst/>
-          </a:prstGeom>
-          <a:noFill/>
-          <a:ln/>
-        </p:spPr>
-        <p:txBody>
-          <a:bodyPr wrap="square" lIns="0" tIns="0" rIns="0" bIns="0" rtlCol="0" anchor="t"/>
-          <a:lstStyle/>
-          <a:p>
-            <a:pPr indent="0" marL="0">
-              <a:buNone/>
-            </a:pPr>
-            <a:r>
-              <a:rPr lang="en-US" sz="1800" dirty="0">
-                <a:solidFill>
-                  <a:srgbClr val="C9D4E6"/>
-                </a:solidFill>
-                <a:latin typeface="Arial" pitchFamily="34" charset="0"/>
-                <a:ea typeface="Arial" pitchFamily="34" charset="-122"/>
-                <a:cs typeface="Arial" pitchFamily="34" charset="-120"/>
-              </a:rPr>
-              <a:t>Todo lo necesario para publicar, quién lo hace y qué decidimos hoy</a:t>
-            </a:r>
-            <a:endParaRPr lang="en-US" sz="1800" dirty="0"/>
-          </a:p>
-        </p:txBody>
-      </p:sp>
       <p:sp>
         <p:nvSpPr>
           <p:cNvPr id="25" name="Slide Number Placeholder 0"/>
@@ -5469,145 +8991,20 @@
       </p:grpSpPr>
       <p:sp>
         <p:nvSpPr>
-          <p:cNvPr id="2" name="Sección"/>
-          <p:cNvSpPr txBox="1"/>
-          <p:nvPr/>
-        </p:nvSpPr>
-        <p:spPr>
-          <a:xfrm>
-            <a:off x="548640" y="411480"/>
-            <a:ext cx="11094415" cy="274320"/>
-          </a:xfrm>
-          <a:prstGeom prst="rect">
-            <a:avLst/>
-          </a:prstGeom>
-          <a:noFill/>
-          <a:ln/>
-        </p:spPr>
-        <p:txBody>
-          <a:bodyPr wrap="square" lIns="0" tIns="0" rIns="0" bIns="0" rtlCol="0" anchor="ctr"/>
-          <a:lstStyle/>
-          <a:p>
-            <a:pPr indent="0" marL="0">
-              <a:buNone/>
-            </a:pPr>
-            <a:r>
-              <a:rPr lang="en-US" sz="1100" b="1" spc="200" kern="0" dirty="0">
-                <a:solidFill>
-                  <a:srgbClr val="EC4F24"/>
-                </a:solidFill>
-                <a:latin typeface="Arial" pitchFamily="34" charset="0"/>
-                <a:ea typeface="Arial" pitchFamily="34" charset="-122"/>
-                <a:cs typeface="Arial" pitchFamily="34" charset="-120"/>
-              </a:rPr>
-              <a:t>08  ·  HOJA DE RUTA PARA SALIR</a:t>
-            </a:r>
-            <a:endParaRPr lang="en-US" sz="1100" dirty="0"/>
-          </a:p>
-        </p:txBody>
-      </p:sp>
-      <p:sp>
-        <p:nvSpPr>
-          <p:cNvPr id="3" name="Text 0"/>
+          <p:cNvPr id="2" name="Shape 0"/>
           <p:cNvSpPr/>
-          <p:nvPr>
-            <p:ph idx="101" type="title" hasCustomPrompt="1"/>
-          </p:nvPr>
-        </p:nvSpPr>
-        <p:spPr>
-          <a:xfrm>
-            <a:off x="548640" y="713232"/>
-            <a:ext cx="11094415" cy="960120"/>
-          </a:xfrm>
-          <a:prstGeom prst="rect">
-            <a:avLst/>
-          </a:prstGeom>
-          <a:noFill/>
-          <a:ln/>
-        </p:spPr>
-        <p:txBody>
-          <a:bodyPr wrap="square" lIns="0" tIns="0" rIns="0" bIns="0" rtlCol="0" anchor="t"/>
-          <a:lstStyle/>
-          <a:p>
-            <a:pPr algn="l" indent="0" marL="0">
-              <a:buNone/>
-            </a:pPr>
-            <a:r>
-              <a:rPr lang="en-US" sz="2800" dirty="0">
-                <a:solidFill>
-                  <a:srgbClr val="FFFFFF"/>
-                </a:solidFill>
-                <a:latin typeface="Arial Black" pitchFamily="34" charset="0"/>
-                <a:ea typeface="Arial Black" pitchFamily="34" charset="-122"/>
-                <a:cs typeface="Arial Black" pitchFamily="34" charset="-120"/>
-              </a:rPr>
-              <a:t>Pendiente</a:t>
-            </a:r>
-            <a:endParaRPr lang="en-US" sz="2800" dirty="0"/>
-          </a:p>
-        </p:txBody>
-      </p:sp>
-      <p:sp>
-        <p:nvSpPr>
-          <p:cNvPr id="4" name="Text 2"/>
-          <p:cNvSpPr txBox="1"/>
-          <p:nvPr/>
-        </p:nvSpPr>
-        <p:spPr>
-          <a:xfrm>
-            <a:off x="548640" y="1828800"/>
-            <a:ext cx="6949440" cy="4251960"/>
-          </a:xfrm>
-          <a:prstGeom prst="rect">
-            <a:avLst/>
-          </a:prstGeom>
-          <a:noFill/>
-          <a:ln/>
-        </p:spPr>
-        <p:txBody>
-          <a:bodyPr wrap="square" lIns="0" tIns="0" rIns="0" bIns="0" rtlCol="0" anchor="t"/>
-          <a:lstStyle/>
-          <a:p>
-            <a:pPr indent="0" marL="0">
-              <a:lnSpc>
-                <a:spcPct val="105000"/>
-              </a:lnSpc>
-              <a:spcAft>
-                <a:spcPts val="1000"/>
-              </a:spcAft>
-              <a:buNone/>
-            </a:pPr>
-            <a:r>
-              <a:rPr lang="en-US" sz="1600" dirty="0">
-                <a:solidFill>
-                  <a:srgbClr val="FFFFFF"/>
-                </a:solidFill>
-                <a:latin typeface="Arial" pitchFamily="34" charset="0"/>
-                <a:ea typeface="Arial" pitchFamily="34" charset="-122"/>
-                <a:cs typeface="Arial" pitchFamily="34" charset="-120"/>
-              </a:rPr>
-              <a:t>Esta parte está por escribir: la escribe la tarea T211.</a:t>
-            </a:r>
-            <a:endParaRPr lang="en-US" sz="1600" dirty="0"/>
-          </a:p>
-        </p:txBody>
-      </p:sp>
-      <p:sp>
-        <p:nvSpPr>
-          <p:cNvPr id="5" name="Shape 3"/>
-          <p:cNvSpPr/>
-          <p:nvPr/>
-        </p:nvSpPr>
-        <p:spPr>
-          <a:xfrm>
-            <a:off x="8229600" y="1828800"/>
-            <a:ext cx="3383280" cy="3383280"/>
+          <p:nvPr/>
+        </p:nvSpPr>
+        <p:spPr>
+          <a:xfrm>
+            <a:off x="8001000" y="1325880"/>
+            <a:ext cx="3749040" cy="3749040"/>
           </a:xfrm>
           <a:prstGeom prst="ellipse">
             <a:avLst/>
           </a:prstGeom>
           <a:solidFill>
-            <a:srgbClr val="07101F"/>
+            <a:srgbClr val="0B1830"/>
           </a:solidFill>
           <a:ln w="25400">
             <a:solidFill>
@@ -5619,7 +9016,7 @@
       </p:sp>
       <p:pic>
         <p:nvPicPr>
-          <p:cNvPr id="6" name="Image 0" descr="La mascota de BOIA">    </p:cNvPr>
+          <p:cNvPr id="3" name="Image 0" descr="La mascota de BOIA">    </p:cNvPr>
           <p:cNvPicPr>
             <a:picLocks noChangeAspect="1"/>
           </p:cNvPicPr>
@@ -5633,14 +9030,131 @@
         </p:blipFill>
         <p:spPr>
           <a:xfrm>
-            <a:off x="8642359" y="2240280"/>
-            <a:ext cx="2557762" cy="2560320"/>
+            <a:off x="8459616" y="1783080"/>
+            <a:ext cx="2831808" cy="2834640"/>
           </a:xfrm>
           <a:prstGeom prst="rect">
             <a:avLst/>
           </a:prstGeom>
         </p:spPr>
       </p:pic>
+      <p:sp>
+        <p:nvSpPr>
+          <p:cNvPr id="4" name="Número de parte"/>
+          <p:cNvSpPr txBox="1"/>
+          <p:nvPr/>
+        </p:nvSpPr>
+        <p:spPr>
+          <a:xfrm>
+            <a:off x="548640" y="640080"/>
+            <a:ext cx="3657600" cy="1737360"/>
+          </a:xfrm>
+          <a:prstGeom prst="rect">
+            <a:avLst/>
+          </a:prstGeom>
+          <a:noFill/>
+          <a:ln/>
+        </p:spPr>
+        <p:txBody>
+          <a:bodyPr wrap="square" lIns="0" tIns="0" rIns="0" bIns="0" rtlCol="0" anchor="b"/>
+          <a:lstStyle/>
+          <a:p>
+            <a:pPr indent="0" marL="0">
+              <a:buNone/>
+            </a:pPr>
+            <a:r>
+              <a:rPr lang="en-US" sz="12000" dirty="0">
+                <a:solidFill>
+                  <a:srgbClr val="EC4F24"/>
+                </a:solidFill>
+                <a:latin typeface="Arial Black" pitchFamily="34" charset="0"/>
+                <a:ea typeface="Arial Black" pitchFamily="34" charset="-122"/>
+                <a:cs typeface="Arial Black" pitchFamily="34" charset="-120"/>
+              </a:rPr>
+              <a:t>05</a:t>
+            </a:r>
+            <a:endParaRPr lang="en-US" sz="12000" dirty="0"/>
+          </a:p>
+        </p:txBody>
+      </p:sp>
+      <p:sp>
+        <p:nvSpPr>
+          <p:cNvPr id="5" name="Título"/>
+          <p:cNvSpPr txBox="1"/>
+          <p:nvPr/>
+        </p:nvSpPr>
+        <p:spPr>
+          <a:xfrm>
+            <a:off x="548640" y="2606040"/>
+            <a:ext cx="7315200" cy="1417320"/>
+          </a:xfrm>
+          <a:prstGeom prst="rect">
+            <a:avLst/>
+          </a:prstGeom>
+          <a:noFill/>
+          <a:ln/>
+        </p:spPr>
+        <p:txBody>
+          <a:bodyPr wrap="square" lIns="0" tIns="0" rIns="0" bIns="0" rtlCol="0" anchor="t"/>
+          <a:lstStyle/>
+          <a:p>
+            <a:pPr indent="0" marL="0">
+              <a:buNone/>
+            </a:pPr>
+            <a:r>
+              <a:rPr lang="en-US" sz="4400" dirty="0">
+                <a:solidFill>
+                  <a:srgbClr val="FFFFFF"/>
+                </a:solidFill>
+                <a:latin typeface="Arial Black" pitchFamily="34" charset="0"/>
+                <a:ea typeface="Arial Black" pitchFamily="34" charset="-122"/>
+                <a:cs typeface="Arial Black" pitchFamily="34" charset="-120"/>
+              </a:rPr>
+              <a:t>El océano</a:t>
+            </a:r>
+            <a:endParaRPr lang="en-US" sz="4400" dirty="0"/>
+          </a:p>
+        </p:txBody>
+      </p:sp>
+      <p:sp>
+        <p:nvSpPr>
+          <p:cNvPr id="6" name="Text 3"/>
+          <p:cNvSpPr txBox="1"/>
+          <p:nvPr/>
+        </p:nvSpPr>
+        <p:spPr>
+          <a:xfrm>
+            <a:off x="548640" y="4114800"/>
+            <a:ext cx="6949440" cy="822960"/>
+          </a:xfrm>
+          <a:prstGeom prst="rect">
+            <a:avLst/>
+          </a:prstGeom>
+          <a:noFill/>
+          <a:ln/>
+        </p:spPr>
+        <p:txBody>
+          <a:bodyPr wrap="square" lIns="0" tIns="0" rIns="0" bIns="0" rtlCol="0" anchor="t"/>
+          <a:lstStyle/>
+          <a:p>
+            <a:pPr indent="0" marL="0">
+              <a:buNone/>
+            </a:pPr>
+            <a:r>
+              <a:rPr lang="en-US" sz="1800" dirty="0">
+                <a:solidFill>
+                  <a:srgbClr val="C9D4E6"/>
+                </a:solidFill>
+                <a:latin typeface="Arial" pitchFamily="34" charset="0"/>
+                <a:ea typeface="Arial" pitchFamily="34" charset="-122"/>
+                <a:cs typeface="Arial" pitchFamily="34" charset="-120"/>
+              </a:rPr>
+              <a:t>El mundo en 3D que se recorre en barco: islas, personajes, secretos y descuentos</a:t>
+            </a:r>
+            <a:endParaRPr lang="en-US" sz="1800" dirty="0"/>
+          </a:p>
+        </p:txBody>
+      </p:sp>
       <p:sp>
         <p:nvSpPr>
           <p:cNvPr id="25" name="Slide Number Placeholder 0"/>
@@ -5944,6 +9458,1711 @@
 </p:sld>
 </file>
 
+<file path=ppt/slides/slide20.xml><?xml version="1.0" encoding="utf-8"?>
+<p:sld xmlns:a="http://schemas.openxmlformats.org/drawingml/2006/main" xmlns:r="http://schemas.openxmlformats.org/officeDocument/2006/relationships" xmlns:p="http://schemas.openxmlformats.org/presentationml/2006/main">
+  <p:cSld name="Slide 20">
+    <p:spTree>
+      <p:nvGrpSpPr>
+        <p:cNvPr id="1" name=""/>
+        <p:cNvGrpSpPr/>
+        <p:nvPr/>
+      </p:nvGrpSpPr>
+      <p:grpSpPr>
+        <a:xfrm>
+          <a:off x="0" y="0"/>
+          <a:ext cx="0" cy="0"/>
+          <a:chOff x="0" y="0"/>
+          <a:chExt cx="0" cy="0"/>
+        </a:xfrm>
+      </p:grpSpPr>
+      <p:sp>
+        <p:nvSpPr>
+          <p:cNvPr id="2" name="Sección"/>
+          <p:cNvSpPr txBox="1"/>
+          <p:nvPr/>
+        </p:nvSpPr>
+        <p:spPr>
+          <a:xfrm>
+            <a:off x="548640" y="411480"/>
+            <a:ext cx="11094415" cy="274320"/>
+          </a:xfrm>
+          <a:prstGeom prst="rect">
+            <a:avLst/>
+          </a:prstGeom>
+          <a:noFill/>
+          <a:ln/>
+        </p:spPr>
+        <p:txBody>
+          <a:bodyPr wrap="square" lIns="0" tIns="0" rIns="0" bIns="0" rtlCol="0" anchor="ctr"/>
+          <a:lstStyle/>
+          <a:p>
+            <a:pPr indent="0" marL="0">
+              <a:buNone/>
+            </a:pPr>
+            <a:r>
+              <a:rPr lang="en-US" sz="1100" b="1" spc="200" kern="0" dirty="0">
+                <a:solidFill>
+                  <a:srgbClr val="EC4F24"/>
+                </a:solidFill>
+                <a:latin typeface="Arial" pitchFamily="34" charset="0"/>
+                <a:ea typeface="Arial" pitchFamily="34" charset="-122"/>
+                <a:cs typeface="Arial" pitchFamily="34" charset="-120"/>
+              </a:rPr>
+              <a:t>05  ·  EL OCÉANO</a:t>
+            </a:r>
+            <a:endParaRPr lang="en-US" sz="1100" dirty="0"/>
+          </a:p>
+        </p:txBody>
+      </p:sp>
+      <p:sp>
+        <p:nvSpPr>
+          <p:cNvPr id="3" name="Text 0"/>
+          <p:cNvSpPr/>
+          <p:nvPr>
+            <p:ph idx="101" type="title" hasCustomPrompt="1"/>
+          </p:nvPr>
+        </p:nvSpPr>
+        <p:spPr>
+          <a:xfrm>
+            <a:off x="548640" y="713232"/>
+            <a:ext cx="11094415" cy="960120"/>
+          </a:xfrm>
+          <a:prstGeom prst="rect">
+            <a:avLst/>
+          </a:prstGeom>
+          <a:noFill/>
+          <a:ln/>
+        </p:spPr>
+        <p:txBody>
+          <a:bodyPr wrap="square" lIns="0" tIns="0" rIns="0" bIns="0" rtlCol="0" anchor="t"/>
+          <a:lstStyle/>
+          <a:p>
+            <a:pPr algn="l" indent="0" marL="0">
+              <a:buNone/>
+            </a:pPr>
+            <a:r>
+              <a:rPr lang="en-US" sz="2800" dirty="0">
+                <a:solidFill>
+                  <a:srgbClr val="FFFFFF"/>
+                </a:solidFill>
+                <a:latin typeface="Arial Black" pitchFamily="34" charset="0"/>
+                <a:ea typeface="Arial Black" pitchFamily="34" charset="-122"/>
+                <a:cs typeface="Arial Black" pitchFamily="34" charset="-120"/>
+              </a:rPr>
+              <a:t>Pendiente</a:t>
+            </a:r>
+            <a:endParaRPr lang="en-US" sz="2800" dirty="0"/>
+          </a:p>
+        </p:txBody>
+      </p:sp>
+      <p:sp>
+        <p:nvSpPr>
+          <p:cNvPr id="4" name="Text 2"/>
+          <p:cNvSpPr txBox="1"/>
+          <p:nvPr/>
+        </p:nvSpPr>
+        <p:spPr>
+          <a:xfrm>
+            <a:off x="548640" y="1828800"/>
+            <a:ext cx="6949440" cy="4251960"/>
+          </a:xfrm>
+          <a:prstGeom prst="rect">
+            <a:avLst/>
+          </a:prstGeom>
+          <a:noFill/>
+          <a:ln/>
+        </p:spPr>
+        <p:txBody>
+          <a:bodyPr wrap="square" lIns="0" tIns="0" rIns="0" bIns="0" rtlCol="0" anchor="t"/>
+          <a:lstStyle/>
+          <a:p>
+            <a:pPr indent="0" marL="0">
+              <a:lnSpc>
+                <a:spcPct val="105000"/>
+              </a:lnSpc>
+              <a:spcAft>
+                <a:spcPts val="1000"/>
+              </a:spcAft>
+              <a:buNone/>
+            </a:pPr>
+            <a:r>
+              <a:rPr lang="en-US" sz="1600" dirty="0">
+                <a:solidFill>
+                  <a:srgbClr val="FFFFFF"/>
+                </a:solidFill>
+                <a:latin typeface="Arial" pitchFamily="34" charset="0"/>
+                <a:ea typeface="Arial" pitchFamily="34" charset="-122"/>
+                <a:cs typeface="Arial" pitchFamily="34" charset="-120"/>
+              </a:rPr>
+              <a:t>Esta parte está por escribir: la escribe la tarea T208.</a:t>
+            </a:r>
+            <a:endParaRPr lang="en-US" sz="1600" dirty="0"/>
+          </a:p>
+        </p:txBody>
+      </p:sp>
+      <p:sp>
+        <p:nvSpPr>
+          <p:cNvPr id="5" name="Shape 3"/>
+          <p:cNvSpPr/>
+          <p:nvPr/>
+        </p:nvSpPr>
+        <p:spPr>
+          <a:xfrm>
+            <a:off x="8229600" y="1828800"/>
+            <a:ext cx="3383280" cy="3383280"/>
+          </a:xfrm>
+          <a:prstGeom prst="ellipse">
+            <a:avLst/>
+          </a:prstGeom>
+          <a:solidFill>
+            <a:srgbClr val="07101F"/>
+          </a:solidFill>
+          <a:ln w="25400">
+            <a:solidFill>
+              <a:srgbClr val="2F4A72"/>
+            </a:solidFill>
+            <a:prstDash val="solid"/>
+          </a:ln>
+        </p:spPr>
+      </p:sp>
+      <p:pic>
+        <p:nvPicPr>
+          <p:cNvPr id="6" name="Image 0" descr="La mascota de BOIA">    </p:cNvPr>
+          <p:cNvPicPr>
+            <a:picLocks noChangeAspect="1"/>
+          </p:cNvPicPr>
+          <p:nvPr/>
+        </p:nvPicPr>
+        <p:blipFill>
+          <a:blip r:embed="rId1"/>
+          <a:stretch>
+            <a:fillRect/>
+          </a:stretch>
+        </p:blipFill>
+        <p:spPr>
+          <a:xfrm>
+            <a:off x="8642359" y="2240280"/>
+            <a:ext cx="2557762" cy="2560320"/>
+          </a:xfrm>
+          <a:prstGeom prst="rect">
+            <a:avLst/>
+          </a:prstGeom>
+        </p:spPr>
+      </p:pic>
+      <p:sp>
+        <p:nvSpPr>
+          <p:cNvPr id="25" name="Slide Number Placeholder 0"/>
+          <p:cNvSpPr>
+            <a:spLocks noGrp="1"/>
+          </p:cNvSpPr>
+          <p:nvPr>
+            <p:ph type="sldNum" sz="quarter" idx="4294967295"/>
+          </p:nvPr>
+        </p:nvSpPr>
+        <p:spPr>
+          <a:xfrm>
+            <a:off x="548640" y="6382512"/>
+            <a:ext cx="731520" cy="320040"/>
+          </a:xfrm>
+          <a:prstGeom prst="rect">
+            <a:avLst/>
+          </a:prstGeom>
+          <a:extLst>
+            <a:ext uri="{C572A759-6A51-4108-AA02-DFA0A04FC94B}">
+              <ma14:wrappingTextBoxFlag xmlns:ma14="http://schemas.microsoft.com/office/mac/drawingml/2011/main" val="0"/>
+            </a:ext>
+          </a:extLst>
+        </p:spPr>
+        <p:txBody>
+          <a:bodyPr/>
+          <a:lstStyle>
+            <a:lvl1pPr>
+              <a:defRPr sz="1000">
+                <a:solidFill>
+                  <a:srgbClr val="C9D4E6"/>
+                </a:solidFill>
+                <a:latin typeface="Arial"/>
+                <a:ea typeface="Arial"/>
+                <a:cs typeface="Arial"/>
+              </a:defRPr>
+            </a:lvl1pPr>
+          </a:lstStyle>
+          <a:p>
+            <a:pPr algn="l"/>
+            <a:fld id="{F7021451-1387-4CA6-816F-3879F97B5CBC}" type="slidenum">
+              <a:rPr b="0" lang="en-US"/>
+              <a:t>20</a:t>
+            </a:fld>
+            <a:endParaRPr lang="en-US"/>
+          </a:p>
+        </p:txBody>
+      </p:sp>
+    </p:spTree>
+  </p:cSld>
+  <p:clrMapOvr>
+    <a:masterClrMapping/>
+  </p:clrMapOvr>
+</p:sld>
+</file>
+
+<file path=ppt/slides/slide21.xml><?xml version="1.0" encoding="utf-8"?>
+<p:sld xmlns:a="http://schemas.openxmlformats.org/drawingml/2006/main" xmlns:r="http://schemas.openxmlformats.org/officeDocument/2006/relationships" xmlns:p="http://schemas.openxmlformats.org/presentationml/2006/main">
+  <p:cSld name="Slide 21">
+    <p:spTree>
+      <p:nvGrpSpPr>
+        <p:cNvPr id="1" name=""/>
+        <p:cNvGrpSpPr/>
+        <p:nvPr/>
+      </p:nvGrpSpPr>
+      <p:grpSpPr>
+        <a:xfrm>
+          <a:off x="0" y="0"/>
+          <a:ext cx="0" cy="0"/>
+          <a:chOff x="0" y="0"/>
+          <a:chExt cx="0" cy="0"/>
+        </a:xfrm>
+      </p:grpSpPr>
+      <p:sp>
+        <p:nvSpPr>
+          <p:cNvPr id="2" name="Shape 0"/>
+          <p:cNvSpPr/>
+          <p:nvPr/>
+        </p:nvSpPr>
+        <p:spPr>
+          <a:xfrm>
+            <a:off x="8001000" y="1325880"/>
+            <a:ext cx="3749040" cy="3749040"/>
+          </a:xfrm>
+          <a:prstGeom prst="ellipse">
+            <a:avLst/>
+          </a:prstGeom>
+          <a:solidFill>
+            <a:srgbClr val="0B1830"/>
+          </a:solidFill>
+          <a:ln w="25400">
+            <a:solidFill>
+              <a:srgbClr val="2F4A72"/>
+            </a:solidFill>
+            <a:prstDash val="solid"/>
+          </a:ln>
+        </p:spPr>
+      </p:sp>
+      <p:pic>
+        <p:nvPicPr>
+          <p:cNvPr id="3" name="Image 0" descr="La mascota de BOIA">    </p:cNvPr>
+          <p:cNvPicPr>
+            <a:picLocks noChangeAspect="1"/>
+          </p:cNvPicPr>
+          <p:nvPr/>
+        </p:nvPicPr>
+        <p:blipFill>
+          <a:blip r:embed="rId1"/>
+          <a:stretch>
+            <a:fillRect/>
+          </a:stretch>
+        </p:blipFill>
+        <p:spPr>
+          <a:xfrm>
+            <a:off x="8459616" y="1783080"/>
+            <a:ext cx="2831808" cy="2834640"/>
+          </a:xfrm>
+          <a:prstGeom prst="rect">
+            <a:avLst/>
+          </a:prstGeom>
+        </p:spPr>
+      </p:pic>
+      <p:sp>
+        <p:nvSpPr>
+          <p:cNvPr id="4" name="Número de parte"/>
+          <p:cNvSpPr txBox="1"/>
+          <p:nvPr/>
+        </p:nvSpPr>
+        <p:spPr>
+          <a:xfrm>
+            <a:off x="548640" y="640080"/>
+            <a:ext cx="3657600" cy="1737360"/>
+          </a:xfrm>
+          <a:prstGeom prst="rect">
+            <a:avLst/>
+          </a:prstGeom>
+          <a:noFill/>
+          <a:ln/>
+        </p:spPr>
+        <p:txBody>
+          <a:bodyPr wrap="square" lIns="0" tIns="0" rIns="0" bIns="0" rtlCol="0" anchor="b"/>
+          <a:lstStyle/>
+          <a:p>
+            <a:pPr indent="0" marL="0">
+              <a:buNone/>
+            </a:pPr>
+            <a:r>
+              <a:rPr lang="en-US" sz="12000" dirty="0">
+                <a:solidFill>
+                  <a:srgbClr val="EC4F24"/>
+                </a:solidFill>
+                <a:latin typeface="Arial Black" pitchFamily="34" charset="0"/>
+                <a:ea typeface="Arial Black" pitchFamily="34" charset="-122"/>
+                <a:cs typeface="Arial Black" pitchFamily="34" charset="-120"/>
+              </a:rPr>
+              <a:t>06</a:t>
+            </a:r>
+            <a:endParaRPr lang="en-US" sz="12000" dirty="0"/>
+          </a:p>
+        </p:txBody>
+      </p:sp>
+      <p:sp>
+        <p:nvSpPr>
+          <p:cNvPr id="5" name="Título"/>
+          <p:cNvSpPr txBox="1"/>
+          <p:nvPr/>
+        </p:nvSpPr>
+        <p:spPr>
+          <a:xfrm>
+            <a:off x="548640" y="2606040"/>
+            <a:ext cx="7315200" cy="1417320"/>
+          </a:xfrm>
+          <a:prstGeom prst="rect">
+            <a:avLst/>
+          </a:prstGeom>
+          <a:noFill/>
+          <a:ln/>
+        </p:spPr>
+        <p:txBody>
+          <a:bodyPr wrap="square" lIns="0" tIns="0" rIns="0" bIns="0" rtlCol="0" anchor="t"/>
+          <a:lstStyle/>
+          <a:p>
+            <a:pPr indent="0" marL="0">
+              <a:buNone/>
+            </a:pPr>
+            <a:r>
+              <a:rPr lang="en-US" sz="4400" dirty="0">
+                <a:solidFill>
+                  <a:srgbClr val="FFFFFF"/>
+                </a:solidFill>
+                <a:latin typeface="Arial Black" pitchFamily="34" charset="0"/>
+                <a:ea typeface="Arial Black" pitchFamily="34" charset="-122"/>
+                <a:cs typeface="Arial Black" pitchFamily="34" charset="-120"/>
+              </a:rPr>
+              <a:t>Minijuegos</a:t>
+            </a:r>
+            <a:endParaRPr lang="en-US" sz="4400" dirty="0"/>
+          </a:p>
+        </p:txBody>
+      </p:sp>
+      <p:sp>
+        <p:nvSpPr>
+          <p:cNvPr id="6" name="Text 3"/>
+          <p:cNvSpPr txBox="1"/>
+          <p:nvPr/>
+        </p:nvSpPr>
+        <p:spPr>
+          <a:xfrm>
+            <a:off x="548640" y="4114800"/>
+            <a:ext cx="6949440" cy="822960"/>
+          </a:xfrm>
+          <a:prstGeom prst="rect">
+            <a:avLst/>
+          </a:prstGeom>
+          <a:noFill/>
+          <a:ln/>
+        </p:spPr>
+        <p:txBody>
+          <a:bodyPr wrap="square" lIns="0" tIns="0" rIns="0" bIns="0" rtlCol="0" anchor="t"/>
+          <a:lstStyle/>
+          <a:p>
+            <a:pPr indent="0" marL="0">
+              <a:buNone/>
+            </a:pPr>
+            <a:r>
+              <a:rPr lang="en-US" sz="1800" dirty="0">
+                <a:solidFill>
+                  <a:srgbClr val="C9D4E6"/>
+                </a:solidFill>
+                <a:latin typeface="Arial" pitchFamily="34" charset="0"/>
+                <a:ea typeface="Arial" pitchFamily="34" charset="-122"/>
+                <a:cs typeface="Arial" pitchFamily="34" charset="-120"/>
+              </a:rPr>
+              <a:t>Los Rápidos, el Cañón y la Defensa del Castillo</a:t>
+            </a:r>
+            <a:endParaRPr lang="en-US" sz="1800" dirty="0"/>
+          </a:p>
+        </p:txBody>
+      </p:sp>
+      <p:sp>
+        <p:nvSpPr>
+          <p:cNvPr id="25" name="Slide Number Placeholder 0"/>
+          <p:cNvSpPr>
+            <a:spLocks noGrp="1"/>
+          </p:cNvSpPr>
+          <p:nvPr>
+            <p:ph type="sldNum" sz="quarter" idx="4294967295"/>
+          </p:nvPr>
+        </p:nvSpPr>
+        <p:spPr>
+          <a:xfrm>
+            <a:off x="548640" y="6382512"/>
+            <a:ext cx="731520" cy="320040"/>
+          </a:xfrm>
+          <a:prstGeom prst="rect">
+            <a:avLst/>
+          </a:prstGeom>
+          <a:extLst>
+            <a:ext uri="{C572A759-6A51-4108-AA02-DFA0A04FC94B}">
+              <ma14:wrappingTextBoxFlag xmlns:ma14="http://schemas.microsoft.com/office/mac/drawingml/2011/main" val="0"/>
+            </a:ext>
+          </a:extLst>
+        </p:spPr>
+        <p:txBody>
+          <a:bodyPr/>
+          <a:lstStyle>
+            <a:lvl1pPr>
+              <a:defRPr sz="1000">
+                <a:solidFill>
+                  <a:srgbClr val="C9D4E6"/>
+                </a:solidFill>
+                <a:latin typeface="Arial"/>
+                <a:ea typeface="Arial"/>
+                <a:cs typeface="Arial"/>
+              </a:defRPr>
+            </a:lvl1pPr>
+          </a:lstStyle>
+          <a:p>
+            <a:pPr algn="l"/>
+            <a:fld id="{F7021451-1387-4CA6-816F-3879F97B5CBC}" type="slidenum">
+              <a:rPr b="0" lang="en-US"/>
+              <a:t>21</a:t>
+            </a:fld>
+            <a:endParaRPr lang="en-US"/>
+          </a:p>
+        </p:txBody>
+      </p:sp>
+    </p:spTree>
+  </p:cSld>
+  <p:clrMapOvr>
+    <a:masterClrMapping/>
+  </p:clrMapOvr>
+</p:sld>
+</file>
+
+<file path=ppt/slides/slide22.xml><?xml version="1.0" encoding="utf-8"?>
+<p:sld xmlns:a="http://schemas.openxmlformats.org/drawingml/2006/main" xmlns:r="http://schemas.openxmlformats.org/officeDocument/2006/relationships" xmlns:p="http://schemas.openxmlformats.org/presentationml/2006/main">
+  <p:cSld name="Slide 22">
+    <p:spTree>
+      <p:nvGrpSpPr>
+        <p:cNvPr id="1" name=""/>
+        <p:cNvGrpSpPr/>
+        <p:nvPr/>
+      </p:nvGrpSpPr>
+      <p:grpSpPr>
+        <a:xfrm>
+          <a:off x="0" y="0"/>
+          <a:ext cx="0" cy="0"/>
+          <a:chOff x="0" y="0"/>
+          <a:chExt cx="0" cy="0"/>
+        </a:xfrm>
+      </p:grpSpPr>
+      <p:sp>
+        <p:nvSpPr>
+          <p:cNvPr id="2" name="Sección"/>
+          <p:cNvSpPr txBox="1"/>
+          <p:nvPr/>
+        </p:nvSpPr>
+        <p:spPr>
+          <a:xfrm>
+            <a:off x="548640" y="411480"/>
+            <a:ext cx="11094415" cy="274320"/>
+          </a:xfrm>
+          <a:prstGeom prst="rect">
+            <a:avLst/>
+          </a:prstGeom>
+          <a:noFill/>
+          <a:ln/>
+        </p:spPr>
+        <p:txBody>
+          <a:bodyPr wrap="square" lIns="0" tIns="0" rIns="0" bIns="0" rtlCol="0" anchor="ctr"/>
+          <a:lstStyle/>
+          <a:p>
+            <a:pPr indent="0" marL="0">
+              <a:buNone/>
+            </a:pPr>
+            <a:r>
+              <a:rPr lang="en-US" sz="1100" b="1" spc="200" kern="0" dirty="0">
+                <a:solidFill>
+                  <a:srgbClr val="EC4F24"/>
+                </a:solidFill>
+                <a:latin typeface="Arial" pitchFamily="34" charset="0"/>
+                <a:ea typeface="Arial" pitchFamily="34" charset="-122"/>
+                <a:cs typeface="Arial" pitchFamily="34" charset="-120"/>
+              </a:rPr>
+              <a:t>06  ·  MINIJUEGOS</a:t>
+            </a:r>
+            <a:endParaRPr lang="en-US" sz="1100" dirty="0"/>
+          </a:p>
+        </p:txBody>
+      </p:sp>
+      <p:sp>
+        <p:nvSpPr>
+          <p:cNvPr id="3" name="Text 0"/>
+          <p:cNvSpPr/>
+          <p:nvPr>
+            <p:ph idx="101" type="title" hasCustomPrompt="1"/>
+          </p:nvPr>
+        </p:nvSpPr>
+        <p:spPr>
+          <a:xfrm>
+            <a:off x="548640" y="713232"/>
+            <a:ext cx="11094415" cy="960120"/>
+          </a:xfrm>
+          <a:prstGeom prst="rect">
+            <a:avLst/>
+          </a:prstGeom>
+          <a:noFill/>
+          <a:ln/>
+        </p:spPr>
+        <p:txBody>
+          <a:bodyPr wrap="square" lIns="0" tIns="0" rIns="0" bIns="0" rtlCol="0" anchor="t"/>
+          <a:lstStyle/>
+          <a:p>
+            <a:pPr algn="l" indent="0" marL="0">
+              <a:buNone/>
+            </a:pPr>
+            <a:r>
+              <a:rPr lang="en-US" sz="2800" dirty="0">
+                <a:solidFill>
+                  <a:srgbClr val="FFFFFF"/>
+                </a:solidFill>
+                <a:latin typeface="Arial Black" pitchFamily="34" charset="0"/>
+                <a:ea typeface="Arial Black" pitchFamily="34" charset="-122"/>
+                <a:cs typeface="Arial Black" pitchFamily="34" charset="-120"/>
+              </a:rPr>
+              <a:t>Pendiente</a:t>
+            </a:r>
+            <a:endParaRPr lang="en-US" sz="2800" dirty="0"/>
+          </a:p>
+        </p:txBody>
+      </p:sp>
+      <p:sp>
+        <p:nvSpPr>
+          <p:cNvPr id="4" name="Text 2"/>
+          <p:cNvSpPr txBox="1"/>
+          <p:nvPr/>
+        </p:nvSpPr>
+        <p:spPr>
+          <a:xfrm>
+            <a:off x="548640" y="1828800"/>
+            <a:ext cx="6949440" cy="4251960"/>
+          </a:xfrm>
+          <a:prstGeom prst="rect">
+            <a:avLst/>
+          </a:prstGeom>
+          <a:noFill/>
+          <a:ln/>
+        </p:spPr>
+        <p:txBody>
+          <a:bodyPr wrap="square" lIns="0" tIns="0" rIns="0" bIns="0" rtlCol="0" anchor="t"/>
+          <a:lstStyle/>
+          <a:p>
+            <a:pPr indent="0" marL="0">
+              <a:lnSpc>
+                <a:spcPct val="105000"/>
+              </a:lnSpc>
+              <a:spcAft>
+                <a:spcPts val="1000"/>
+              </a:spcAft>
+              <a:buNone/>
+            </a:pPr>
+            <a:r>
+              <a:rPr lang="en-US" sz="1600" dirty="0">
+                <a:solidFill>
+                  <a:srgbClr val="FFFFFF"/>
+                </a:solidFill>
+                <a:latin typeface="Arial" pitchFamily="34" charset="0"/>
+                <a:ea typeface="Arial" pitchFamily="34" charset="-122"/>
+                <a:cs typeface="Arial" pitchFamily="34" charset="-120"/>
+              </a:rPr>
+              <a:t>Esta parte está por escribir: la escribe la tarea T209.</a:t>
+            </a:r>
+            <a:endParaRPr lang="en-US" sz="1600" dirty="0"/>
+          </a:p>
+        </p:txBody>
+      </p:sp>
+      <p:sp>
+        <p:nvSpPr>
+          <p:cNvPr id="5" name="Shape 3"/>
+          <p:cNvSpPr/>
+          <p:nvPr/>
+        </p:nvSpPr>
+        <p:spPr>
+          <a:xfrm>
+            <a:off x="8229600" y="1828800"/>
+            <a:ext cx="3383280" cy="3383280"/>
+          </a:xfrm>
+          <a:prstGeom prst="ellipse">
+            <a:avLst/>
+          </a:prstGeom>
+          <a:solidFill>
+            <a:srgbClr val="07101F"/>
+          </a:solidFill>
+          <a:ln w="25400">
+            <a:solidFill>
+              <a:srgbClr val="2F4A72"/>
+            </a:solidFill>
+            <a:prstDash val="solid"/>
+          </a:ln>
+        </p:spPr>
+      </p:sp>
+      <p:pic>
+        <p:nvPicPr>
+          <p:cNvPr id="6" name="Image 0" descr="La mascota de BOIA">    </p:cNvPr>
+          <p:cNvPicPr>
+            <a:picLocks noChangeAspect="1"/>
+          </p:cNvPicPr>
+          <p:nvPr/>
+        </p:nvPicPr>
+        <p:blipFill>
+          <a:blip r:embed="rId1"/>
+          <a:stretch>
+            <a:fillRect/>
+          </a:stretch>
+        </p:blipFill>
+        <p:spPr>
+          <a:xfrm>
+            <a:off x="8642359" y="2240280"/>
+            <a:ext cx="2557762" cy="2560320"/>
+          </a:xfrm>
+          <a:prstGeom prst="rect">
+            <a:avLst/>
+          </a:prstGeom>
+        </p:spPr>
+      </p:pic>
+      <p:sp>
+        <p:nvSpPr>
+          <p:cNvPr id="25" name="Slide Number Placeholder 0"/>
+          <p:cNvSpPr>
+            <a:spLocks noGrp="1"/>
+          </p:cNvSpPr>
+          <p:nvPr>
+            <p:ph type="sldNum" sz="quarter" idx="4294967295"/>
+          </p:nvPr>
+        </p:nvSpPr>
+        <p:spPr>
+          <a:xfrm>
+            <a:off x="548640" y="6382512"/>
+            <a:ext cx="731520" cy="320040"/>
+          </a:xfrm>
+          <a:prstGeom prst="rect">
+            <a:avLst/>
+          </a:prstGeom>
+          <a:extLst>
+            <a:ext uri="{C572A759-6A51-4108-AA02-DFA0A04FC94B}">
+              <ma14:wrappingTextBoxFlag xmlns:ma14="http://schemas.microsoft.com/office/mac/drawingml/2011/main" val="0"/>
+            </a:ext>
+          </a:extLst>
+        </p:spPr>
+        <p:txBody>
+          <a:bodyPr/>
+          <a:lstStyle>
+            <a:lvl1pPr>
+              <a:defRPr sz="1000">
+                <a:solidFill>
+                  <a:srgbClr val="C9D4E6"/>
+                </a:solidFill>
+                <a:latin typeface="Arial"/>
+                <a:ea typeface="Arial"/>
+                <a:cs typeface="Arial"/>
+              </a:defRPr>
+            </a:lvl1pPr>
+          </a:lstStyle>
+          <a:p>
+            <a:pPr algn="l"/>
+            <a:fld id="{F7021451-1387-4CA6-816F-3879F97B5CBC}" type="slidenum">
+              <a:rPr b="0" lang="en-US"/>
+              <a:t>22</a:t>
+            </a:fld>
+            <a:endParaRPr lang="en-US"/>
+          </a:p>
+        </p:txBody>
+      </p:sp>
+    </p:spTree>
+  </p:cSld>
+  <p:clrMapOvr>
+    <a:masterClrMapping/>
+  </p:clrMapOvr>
+</p:sld>
+</file>
+
+<file path=ppt/slides/slide23.xml><?xml version="1.0" encoding="utf-8"?>
+<p:sld xmlns:a="http://schemas.openxmlformats.org/drawingml/2006/main" xmlns:r="http://schemas.openxmlformats.org/officeDocument/2006/relationships" xmlns:p="http://schemas.openxmlformats.org/presentationml/2006/main">
+  <p:cSld name="Slide 23">
+    <p:spTree>
+      <p:nvGrpSpPr>
+        <p:cNvPr id="1" name=""/>
+        <p:cNvGrpSpPr/>
+        <p:nvPr/>
+      </p:nvGrpSpPr>
+      <p:grpSpPr>
+        <a:xfrm>
+          <a:off x="0" y="0"/>
+          <a:ext cx="0" cy="0"/>
+          <a:chOff x="0" y="0"/>
+          <a:chExt cx="0" cy="0"/>
+        </a:xfrm>
+      </p:grpSpPr>
+      <p:sp>
+        <p:nvSpPr>
+          <p:cNvPr id="2" name="Shape 0"/>
+          <p:cNvSpPr/>
+          <p:nvPr/>
+        </p:nvSpPr>
+        <p:spPr>
+          <a:xfrm>
+            <a:off x="8001000" y="1325880"/>
+            <a:ext cx="3749040" cy="3749040"/>
+          </a:xfrm>
+          <a:prstGeom prst="ellipse">
+            <a:avLst/>
+          </a:prstGeom>
+          <a:solidFill>
+            <a:srgbClr val="0B1830"/>
+          </a:solidFill>
+          <a:ln w="25400">
+            <a:solidFill>
+              <a:srgbClr val="2F4A72"/>
+            </a:solidFill>
+            <a:prstDash val="solid"/>
+          </a:ln>
+        </p:spPr>
+      </p:sp>
+      <p:pic>
+        <p:nvPicPr>
+          <p:cNvPr id="3" name="Image 0" descr="La mascota de BOIA">    </p:cNvPr>
+          <p:cNvPicPr>
+            <a:picLocks noChangeAspect="1"/>
+          </p:cNvPicPr>
+          <p:nvPr/>
+        </p:nvPicPr>
+        <p:blipFill>
+          <a:blip r:embed="rId1"/>
+          <a:stretch>
+            <a:fillRect/>
+          </a:stretch>
+        </p:blipFill>
+        <p:spPr>
+          <a:xfrm>
+            <a:off x="8459616" y="1783080"/>
+            <a:ext cx="2831808" cy="2834640"/>
+          </a:xfrm>
+          <a:prstGeom prst="rect">
+            <a:avLst/>
+          </a:prstGeom>
+        </p:spPr>
+      </p:pic>
+      <p:sp>
+        <p:nvSpPr>
+          <p:cNvPr id="4" name="Número de parte"/>
+          <p:cNvSpPr txBox="1"/>
+          <p:nvPr/>
+        </p:nvSpPr>
+        <p:spPr>
+          <a:xfrm>
+            <a:off x="548640" y="640080"/>
+            <a:ext cx="3657600" cy="1737360"/>
+          </a:xfrm>
+          <a:prstGeom prst="rect">
+            <a:avLst/>
+          </a:prstGeom>
+          <a:noFill/>
+          <a:ln/>
+        </p:spPr>
+        <p:txBody>
+          <a:bodyPr wrap="square" lIns="0" tIns="0" rIns="0" bIns="0" rtlCol="0" anchor="b"/>
+          <a:lstStyle/>
+          <a:p>
+            <a:pPr indent="0" marL="0">
+              <a:buNone/>
+            </a:pPr>
+            <a:r>
+              <a:rPr lang="en-US" sz="12000" dirty="0">
+                <a:solidFill>
+                  <a:srgbClr val="EC4F24"/>
+                </a:solidFill>
+                <a:latin typeface="Arial Black" pitchFamily="34" charset="0"/>
+                <a:ea typeface="Arial Black" pitchFamily="34" charset="-122"/>
+                <a:cs typeface="Arial Black" pitchFamily="34" charset="-120"/>
+              </a:rPr>
+              <a:t>07</a:t>
+            </a:r>
+            <a:endParaRPr lang="en-US" sz="12000" dirty="0"/>
+          </a:p>
+        </p:txBody>
+      </p:sp>
+      <p:sp>
+        <p:nvSpPr>
+          <p:cNvPr id="5" name="Título"/>
+          <p:cNvSpPr txBox="1"/>
+          <p:nvPr/>
+        </p:nvSpPr>
+        <p:spPr>
+          <a:xfrm>
+            <a:off x="548640" y="2606040"/>
+            <a:ext cx="7315200" cy="1417320"/>
+          </a:xfrm>
+          <a:prstGeom prst="rect">
+            <a:avLst/>
+          </a:prstGeom>
+          <a:noFill/>
+          <a:ln/>
+        </p:spPr>
+        <p:txBody>
+          <a:bodyPr wrap="square" lIns="0" tIns="0" rIns="0" bIns="0" rtlCol="0" anchor="t"/>
+          <a:lstStyle/>
+          <a:p>
+            <a:pPr indent="0" marL="0">
+              <a:buNone/>
+            </a:pPr>
+            <a:r>
+              <a:rPr lang="en-US" sz="4400" dirty="0">
+                <a:solidFill>
+                  <a:srgbClr val="FFFFFF"/>
+                </a:solidFill>
+                <a:latin typeface="Arial Black" pitchFamily="34" charset="0"/>
+                <a:ea typeface="Arial Black" pitchFamily="34" charset="-122"/>
+                <a:cs typeface="Arial Black" pitchFamily="34" charset="-120"/>
+              </a:rPr>
+              <a:t>Admin</a:t>
+            </a:r>
+            <a:endParaRPr lang="en-US" sz="4400" dirty="0"/>
+          </a:p>
+        </p:txBody>
+      </p:sp>
+      <p:sp>
+        <p:nvSpPr>
+          <p:cNvPr id="6" name="Text 3"/>
+          <p:cNvSpPr txBox="1"/>
+          <p:nvPr/>
+        </p:nvSpPr>
+        <p:spPr>
+          <a:xfrm>
+            <a:off x="548640" y="4114800"/>
+            <a:ext cx="6949440" cy="822960"/>
+          </a:xfrm>
+          <a:prstGeom prst="rect">
+            <a:avLst/>
+          </a:prstGeom>
+          <a:noFill/>
+          <a:ln/>
+        </p:spPr>
+        <p:txBody>
+          <a:bodyPr wrap="square" lIns="0" tIns="0" rIns="0" bIns="0" rtlCol="0" anchor="t"/>
+          <a:lstStyle/>
+          <a:p>
+            <a:pPr indent="0" marL="0">
+              <a:buNone/>
+            </a:pPr>
+            <a:r>
+              <a:rPr lang="en-US" sz="1800" dirty="0">
+                <a:solidFill>
+                  <a:srgbClr val="C9D4E6"/>
+                </a:solidFill>
+                <a:latin typeface="Arial" pitchFamily="34" charset="0"/>
+                <a:ea typeface="Arial" pitchFamily="34" charset="-122"/>
+                <a:cs typeface="Arial" pitchFamily="34" charset="-120"/>
+              </a:rPr>
+              <a:t>El panel para cambiar la web sin tocar código</a:t>
+            </a:r>
+            <a:endParaRPr lang="en-US" sz="1800" dirty="0"/>
+          </a:p>
+        </p:txBody>
+      </p:sp>
+      <p:sp>
+        <p:nvSpPr>
+          <p:cNvPr id="25" name="Slide Number Placeholder 0"/>
+          <p:cNvSpPr>
+            <a:spLocks noGrp="1"/>
+          </p:cNvSpPr>
+          <p:nvPr>
+            <p:ph type="sldNum" sz="quarter" idx="4294967295"/>
+          </p:nvPr>
+        </p:nvSpPr>
+        <p:spPr>
+          <a:xfrm>
+            <a:off x="548640" y="6382512"/>
+            <a:ext cx="731520" cy="320040"/>
+          </a:xfrm>
+          <a:prstGeom prst="rect">
+            <a:avLst/>
+          </a:prstGeom>
+          <a:extLst>
+            <a:ext uri="{C572A759-6A51-4108-AA02-DFA0A04FC94B}">
+              <ma14:wrappingTextBoxFlag xmlns:ma14="http://schemas.microsoft.com/office/mac/drawingml/2011/main" val="0"/>
+            </a:ext>
+          </a:extLst>
+        </p:spPr>
+        <p:txBody>
+          <a:bodyPr/>
+          <a:lstStyle>
+            <a:lvl1pPr>
+              <a:defRPr sz="1000">
+                <a:solidFill>
+                  <a:srgbClr val="C9D4E6"/>
+                </a:solidFill>
+                <a:latin typeface="Arial"/>
+                <a:ea typeface="Arial"/>
+                <a:cs typeface="Arial"/>
+              </a:defRPr>
+            </a:lvl1pPr>
+          </a:lstStyle>
+          <a:p>
+            <a:pPr algn="l"/>
+            <a:fld id="{F7021451-1387-4CA6-816F-3879F97B5CBC}" type="slidenum">
+              <a:rPr b="0" lang="en-US"/>
+              <a:t>23</a:t>
+            </a:fld>
+            <a:endParaRPr lang="en-US"/>
+          </a:p>
+        </p:txBody>
+      </p:sp>
+    </p:spTree>
+  </p:cSld>
+  <p:clrMapOvr>
+    <a:masterClrMapping/>
+  </p:clrMapOvr>
+</p:sld>
+</file>
+
+<file path=ppt/slides/slide24.xml><?xml version="1.0" encoding="utf-8"?>
+<p:sld xmlns:a="http://schemas.openxmlformats.org/drawingml/2006/main" xmlns:r="http://schemas.openxmlformats.org/officeDocument/2006/relationships" xmlns:p="http://schemas.openxmlformats.org/presentationml/2006/main">
+  <p:cSld name="Slide 24">
+    <p:spTree>
+      <p:nvGrpSpPr>
+        <p:cNvPr id="1" name=""/>
+        <p:cNvGrpSpPr/>
+        <p:nvPr/>
+      </p:nvGrpSpPr>
+      <p:grpSpPr>
+        <a:xfrm>
+          <a:off x="0" y="0"/>
+          <a:ext cx="0" cy="0"/>
+          <a:chOff x="0" y="0"/>
+          <a:chExt cx="0" cy="0"/>
+        </a:xfrm>
+      </p:grpSpPr>
+      <p:sp>
+        <p:nvSpPr>
+          <p:cNvPr id="2" name="Sección"/>
+          <p:cNvSpPr txBox="1"/>
+          <p:nvPr/>
+        </p:nvSpPr>
+        <p:spPr>
+          <a:xfrm>
+            <a:off x="548640" y="411480"/>
+            <a:ext cx="11094415" cy="274320"/>
+          </a:xfrm>
+          <a:prstGeom prst="rect">
+            <a:avLst/>
+          </a:prstGeom>
+          <a:noFill/>
+          <a:ln/>
+        </p:spPr>
+        <p:txBody>
+          <a:bodyPr wrap="square" lIns="0" tIns="0" rIns="0" bIns="0" rtlCol="0" anchor="ctr"/>
+          <a:lstStyle/>
+          <a:p>
+            <a:pPr indent="0" marL="0">
+              <a:buNone/>
+            </a:pPr>
+            <a:r>
+              <a:rPr lang="en-US" sz="1100" b="1" spc="200" kern="0" dirty="0">
+                <a:solidFill>
+                  <a:srgbClr val="EC4F24"/>
+                </a:solidFill>
+                <a:latin typeface="Arial" pitchFamily="34" charset="0"/>
+                <a:ea typeface="Arial" pitchFamily="34" charset="-122"/>
+                <a:cs typeface="Arial" pitchFamily="34" charset="-120"/>
+              </a:rPr>
+              <a:t>07  ·  ADMIN</a:t>
+            </a:r>
+            <a:endParaRPr lang="en-US" sz="1100" dirty="0"/>
+          </a:p>
+        </p:txBody>
+      </p:sp>
+      <p:sp>
+        <p:nvSpPr>
+          <p:cNvPr id="3" name="Text 0"/>
+          <p:cNvSpPr/>
+          <p:nvPr>
+            <p:ph idx="101" type="title" hasCustomPrompt="1"/>
+          </p:nvPr>
+        </p:nvSpPr>
+        <p:spPr>
+          <a:xfrm>
+            <a:off x="548640" y="713232"/>
+            <a:ext cx="11094415" cy="960120"/>
+          </a:xfrm>
+          <a:prstGeom prst="rect">
+            <a:avLst/>
+          </a:prstGeom>
+          <a:noFill/>
+          <a:ln/>
+        </p:spPr>
+        <p:txBody>
+          <a:bodyPr wrap="square" lIns="0" tIns="0" rIns="0" bIns="0" rtlCol="0" anchor="t"/>
+          <a:lstStyle/>
+          <a:p>
+            <a:pPr algn="l" indent="0" marL="0">
+              <a:buNone/>
+            </a:pPr>
+            <a:r>
+              <a:rPr lang="en-US" sz="2800" dirty="0">
+                <a:solidFill>
+                  <a:srgbClr val="FFFFFF"/>
+                </a:solidFill>
+                <a:latin typeface="Arial Black" pitchFamily="34" charset="0"/>
+                <a:ea typeface="Arial Black" pitchFamily="34" charset="-122"/>
+                <a:cs typeface="Arial Black" pitchFamily="34" charset="-120"/>
+              </a:rPr>
+              <a:t>Pendiente</a:t>
+            </a:r>
+            <a:endParaRPr lang="en-US" sz="2800" dirty="0"/>
+          </a:p>
+        </p:txBody>
+      </p:sp>
+      <p:sp>
+        <p:nvSpPr>
+          <p:cNvPr id="4" name="Text 2"/>
+          <p:cNvSpPr txBox="1"/>
+          <p:nvPr/>
+        </p:nvSpPr>
+        <p:spPr>
+          <a:xfrm>
+            <a:off x="548640" y="1828800"/>
+            <a:ext cx="6949440" cy="4251960"/>
+          </a:xfrm>
+          <a:prstGeom prst="rect">
+            <a:avLst/>
+          </a:prstGeom>
+          <a:noFill/>
+          <a:ln/>
+        </p:spPr>
+        <p:txBody>
+          <a:bodyPr wrap="square" lIns="0" tIns="0" rIns="0" bIns="0" rtlCol="0" anchor="t"/>
+          <a:lstStyle/>
+          <a:p>
+            <a:pPr indent="0" marL="0">
+              <a:lnSpc>
+                <a:spcPct val="105000"/>
+              </a:lnSpc>
+              <a:spcAft>
+                <a:spcPts val="1000"/>
+              </a:spcAft>
+              <a:buNone/>
+            </a:pPr>
+            <a:r>
+              <a:rPr lang="en-US" sz="1600" dirty="0">
+                <a:solidFill>
+                  <a:srgbClr val="FFFFFF"/>
+                </a:solidFill>
+                <a:latin typeface="Arial" pitchFamily="34" charset="0"/>
+                <a:ea typeface="Arial" pitchFamily="34" charset="-122"/>
+                <a:cs typeface="Arial" pitchFamily="34" charset="-120"/>
+              </a:rPr>
+              <a:t>Esta parte está por escribir: la escribe la tarea T210.</a:t>
+            </a:r>
+            <a:endParaRPr lang="en-US" sz="1600" dirty="0"/>
+          </a:p>
+        </p:txBody>
+      </p:sp>
+      <p:sp>
+        <p:nvSpPr>
+          <p:cNvPr id="5" name="Shape 3"/>
+          <p:cNvSpPr/>
+          <p:nvPr/>
+        </p:nvSpPr>
+        <p:spPr>
+          <a:xfrm>
+            <a:off x="8229600" y="1828800"/>
+            <a:ext cx="3383280" cy="3383280"/>
+          </a:xfrm>
+          <a:prstGeom prst="ellipse">
+            <a:avLst/>
+          </a:prstGeom>
+          <a:solidFill>
+            <a:srgbClr val="07101F"/>
+          </a:solidFill>
+          <a:ln w="25400">
+            <a:solidFill>
+              <a:srgbClr val="2F4A72"/>
+            </a:solidFill>
+            <a:prstDash val="solid"/>
+          </a:ln>
+        </p:spPr>
+      </p:sp>
+      <p:pic>
+        <p:nvPicPr>
+          <p:cNvPr id="6" name="Image 0" descr="La mascota de BOIA">    </p:cNvPr>
+          <p:cNvPicPr>
+            <a:picLocks noChangeAspect="1"/>
+          </p:cNvPicPr>
+          <p:nvPr/>
+        </p:nvPicPr>
+        <p:blipFill>
+          <a:blip r:embed="rId1"/>
+          <a:stretch>
+            <a:fillRect/>
+          </a:stretch>
+        </p:blipFill>
+        <p:spPr>
+          <a:xfrm>
+            <a:off x="8642359" y="2240280"/>
+            <a:ext cx="2557762" cy="2560320"/>
+          </a:xfrm>
+          <a:prstGeom prst="rect">
+            <a:avLst/>
+          </a:prstGeom>
+        </p:spPr>
+      </p:pic>
+      <p:sp>
+        <p:nvSpPr>
+          <p:cNvPr id="25" name="Slide Number Placeholder 0"/>
+          <p:cNvSpPr>
+            <a:spLocks noGrp="1"/>
+          </p:cNvSpPr>
+          <p:nvPr>
+            <p:ph type="sldNum" sz="quarter" idx="4294967295"/>
+          </p:nvPr>
+        </p:nvSpPr>
+        <p:spPr>
+          <a:xfrm>
+            <a:off x="548640" y="6382512"/>
+            <a:ext cx="731520" cy="320040"/>
+          </a:xfrm>
+          <a:prstGeom prst="rect">
+            <a:avLst/>
+          </a:prstGeom>
+          <a:extLst>
+            <a:ext uri="{C572A759-6A51-4108-AA02-DFA0A04FC94B}">
+              <ma14:wrappingTextBoxFlag xmlns:ma14="http://schemas.microsoft.com/office/mac/drawingml/2011/main" val="0"/>
+            </a:ext>
+          </a:extLst>
+        </p:spPr>
+        <p:txBody>
+          <a:bodyPr/>
+          <a:lstStyle>
+            <a:lvl1pPr>
+              <a:defRPr sz="1000">
+                <a:solidFill>
+                  <a:srgbClr val="C9D4E6"/>
+                </a:solidFill>
+                <a:latin typeface="Arial"/>
+                <a:ea typeface="Arial"/>
+                <a:cs typeface="Arial"/>
+              </a:defRPr>
+            </a:lvl1pPr>
+          </a:lstStyle>
+          <a:p>
+            <a:pPr algn="l"/>
+            <a:fld id="{F7021451-1387-4CA6-816F-3879F97B5CBC}" type="slidenum">
+              <a:rPr b="0" lang="en-US"/>
+              <a:t>24</a:t>
+            </a:fld>
+            <a:endParaRPr lang="en-US"/>
+          </a:p>
+        </p:txBody>
+      </p:sp>
+    </p:spTree>
+  </p:cSld>
+  <p:clrMapOvr>
+    <a:masterClrMapping/>
+  </p:clrMapOvr>
+</p:sld>
+</file>
+
+<file path=ppt/slides/slide25.xml><?xml version="1.0" encoding="utf-8"?>
+<p:sld xmlns:a="http://schemas.openxmlformats.org/drawingml/2006/main" xmlns:r="http://schemas.openxmlformats.org/officeDocument/2006/relationships" xmlns:p="http://schemas.openxmlformats.org/presentationml/2006/main">
+  <p:cSld name="Slide 25">
+    <p:spTree>
+      <p:nvGrpSpPr>
+        <p:cNvPr id="1" name=""/>
+        <p:cNvGrpSpPr/>
+        <p:nvPr/>
+      </p:nvGrpSpPr>
+      <p:grpSpPr>
+        <a:xfrm>
+          <a:off x="0" y="0"/>
+          <a:ext cx="0" cy="0"/>
+          <a:chOff x="0" y="0"/>
+          <a:chExt cx="0" cy="0"/>
+        </a:xfrm>
+      </p:grpSpPr>
+      <p:sp>
+        <p:nvSpPr>
+          <p:cNvPr id="2" name="Shape 0"/>
+          <p:cNvSpPr/>
+          <p:nvPr/>
+        </p:nvSpPr>
+        <p:spPr>
+          <a:xfrm>
+            <a:off x="8001000" y="1325880"/>
+            <a:ext cx="3749040" cy="3749040"/>
+          </a:xfrm>
+          <a:prstGeom prst="ellipse">
+            <a:avLst/>
+          </a:prstGeom>
+          <a:solidFill>
+            <a:srgbClr val="0B1830"/>
+          </a:solidFill>
+          <a:ln w="25400">
+            <a:solidFill>
+              <a:srgbClr val="2F4A72"/>
+            </a:solidFill>
+            <a:prstDash val="solid"/>
+          </a:ln>
+        </p:spPr>
+      </p:sp>
+      <p:pic>
+        <p:nvPicPr>
+          <p:cNvPr id="3" name="Image 0" descr="La mascota de BOIA">    </p:cNvPr>
+          <p:cNvPicPr>
+            <a:picLocks noChangeAspect="1"/>
+          </p:cNvPicPr>
+          <p:nvPr/>
+        </p:nvPicPr>
+        <p:blipFill>
+          <a:blip r:embed="rId1"/>
+          <a:stretch>
+            <a:fillRect/>
+          </a:stretch>
+        </p:blipFill>
+        <p:spPr>
+          <a:xfrm>
+            <a:off x="8459616" y="1783080"/>
+            <a:ext cx="2831808" cy="2834640"/>
+          </a:xfrm>
+          <a:prstGeom prst="rect">
+            <a:avLst/>
+          </a:prstGeom>
+        </p:spPr>
+      </p:pic>
+      <p:sp>
+        <p:nvSpPr>
+          <p:cNvPr id="4" name="Número de parte"/>
+          <p:cNvSpPr txBox="1"/>
+          <p:nvPr/>
+        </p:nvSpPr>
+        <p:spPr>
+          <a:xfrm>
+            <a:off x="548640" y="640080"/>
+            <a:ext cx="3657600" cy="1737360"/>
+          </a:xfrm>
+          <a:prstGeom prst="rect">
+            <a:avLst/>
+          </a:prstGeom>
+          <a:noFill/>
+          <a:ln/>
+        </p:spPr>
+        <p:txBody>
+          <a:bodyPr wrap="square" lIns="0" tIns="0" rIns="0" bIns="0" rtlCol="0" anchor="b"/>
+          <a:lstStyle/>
+          <a:p>
+            <a:pPr indent="0" marL="0">
+              <a:buNone/>
+            </a:pPr>
+            <a:r>
+              <a:rPr lang="en-US" sz="12000" dirty="0">
+                <a:solidFill>
+                  <a:srgbClr val="EC4F24"/>
+                </a:solidFill>
+                <a:latin typeface="Arial Black" pitchFamily="34" charset="0"/>
+                <a:ea typeface="Arial Black" pitchFamily="34" charset="-122"/>
+                <a:cs typeface="Arial Black" pitchFamily="34" charset="-120"/>
+              </a:rPr>
+              <a:t>08</a:t>
+            </a:r>
+            <a:endParaRPr lang="en-US" sz="12000" dirty="0"/>
+          </a:p>
+        </p:txBody>
+      </p:sp>
+      <p:sp>
+        <p:nvSpPr>
+          <p:cNvPr id="5" name="Título"/>
+          <p:cNvSpPr txBox="1"/>
+          <p:nvPr/>
+        </p:nvSpPr>
+        <p:spPr>
+          <a:xfrm>
+            <a:off x="548640" y="2606040"/>
+            <a:ext cx="7315200" cy="1417320"/>
+          </a:xfrm>
+          <a:prstGeom prst="rect">
+            <a:avLst/>
+          </a:prstGeom>
+          <a:noFill/>
+          <a:ln/>
+        </p:spPr>
+        <p:txBody>
+          <a:bodyPr wrap="square" lIns="0" tIns="0" rIns="0" bIns="0" rtlCol="0" anchor="t"/>
+          <a:lstStyle/>
+          <a:p>
+            <a:pPr indent="0" marL="0">
+              <a:buNone/>
+            </a:pPr>
+            <a:r>
+              <a:rPr lang="en-US" sz="4400" dirty="0">
+                <a:solidFill>
+                  <a:srgbClr val="FFFFFF"/>
+                </a:solidFill>
+                <a:latin typeface="Arial Black" pitchFamily="34" charset="0"/>
+                <a:ea typeface="Arial Black" pitchFamily="34" charset="-122"/>
+                <a:cs typeface="Arial Black" pitchFamily="34" charset="-120"/>
+              </a:rPr>
+              <a:t>Hoja de ruta para salir</a:t>
+            </a:r>
+            <a:endParaRPr lang="en-US" sz="4400" dirty="0"/>
+          </a:p>
+        </p:txBody>
+      </p:sp>
+      <p:sp>
+        <p:nvSpPr>
+          <p:cNvPr id="6" name="Text 3"/>
+          <p:cNvSpPr txBox="1"/>
+          <p:nvPr/>
+        </p:nvSpPr>
+        <p:spPr>
+          <a:xfrm>
+            <a:off x="548640" y="4114800"/>
+            <a:ext cx="6949440" cy="822960"/>
+          </a:xfrm>
+          <a:prstGeom prst="rect">
+            <a:avLst/>
+          </a:prstGeom>
+          <a:noFill/>
+          <a:ln/>
+        </p:spPr>
+        <p:txBody>
+          <a:bodyPr wrap="square" lIns="0" tIns="0" rIns="0" bIns="0" rtlCol="0" anchor="t"/>
+          <a:lstStyle/>
+          <a:p>
+            <a:pPr indent="0" marL="0">
+              <a:buNone/>
+            </a:pPr>
+            <a:r>
+              <a:rPr lang="en-US" sz="1800" dirty="0">
+                <a:solidFill>
+                  <a:srgbClr val="C9D4E6"/>
+                </a:solidFill>
+                <a:latin typeface="Arial" pitchFamily="34" charset="0"/>
+                <a:ea typeface="Arial" pitchFamily="34" charset="-122"/>
+                <a:cs typeface="Arial" pitchFamily="34" charset="-120"/>
+              </a:rPr>
+              <a:t>Todo lo necesario para publicar, quién lo hace y qué decidimos hoy</a:t>
+            </a:r>
+            <a:endParaRPr lang="en-US" sz="1800" dirty="0"/>
+          </a:p>
+        </p:txBody>
+      </p:sp>
+      <p:sp>
+        <p:nvSpPr>
+          <p:cNvPr id="25" name="Slide Number Placeholder 0"/>
+          <p:cNvSpPr>
+            <a:spLocks noGrp="1"/>
+          </p:cNvSpPr>
+          <p:nvPr>
+            <p:ph type="sldNum" sz="quarter" idx="4294967295"/>
+          </p:nvPr>
+        </p:nvSpPr>
+        <p:spPr>
+          <a:xfrm>
+            <a:off x="548640" y="6382512"/>
+            <a:ext cx="731520" cy="320040"/>
+          </a:xfrm>
+          <a:prstGeom prst="rect">
+            <a:avLst/>
+          </a:prstGeom>
+          <a:extLst>
+            <a:ext uri="{C572A759-6A51-4108-AA02-DFA0A04FC94B}">
+              <ma14:wrappingTextBoxFlag xmlns:ma14="http://schemas.microsoft.com/office/mac/drawingml/2011/main" val="0"/>
+            </a:ext>
+          </a:extLst>
+        </p:spPr>
+        <p:txBody>
+          <a:bodyPr/>
+          <a:lstStyle>
+            <a:lvl1pPr>
+              <a:defRPr sz="1000">
+                <a:solidFill>
+                  <a:srgbClr val="C9D4E6"/>
+                </a:solidFill>
+                <a:latin typeface="Arial"/>
+                <a:ea typeface="Arial"/>
+                <a:cs typeface="Arial"/>
+              </a:defRPr>
+            </a:lvl1pPr>
+          </a:lstStyle>
+          <a:p>
+            <a:pPr algn="l"/>
+            <a:fld id="{F7021451-1387-4CA6-816F-3879F97B5CBC}" type="slidenum">
+              <a:rPr b="0" lang="en-US"/>
+              <a:t>25</a:t>
+            </a:fld>
+            <a:endParaRPr lang="en-US"/>
+          </a:p>
+        </p:txBody>
+      </p:sp>
+    </p:spTree>
+  </p:cSld>
+  <p:clrMapOvr>
+    <a:masterClrMapping/>
+  </p:clrMapOvr>
+</p:sld>
+</file>
+
+<file path=ppt/slides/slide26.xml><?xml version="1.0" encoding="utf-8"?>
+<p:sld xmlns:a="http://schemas.openxmlformats.org/drawingml/2006/main" xmlns:r="http://schemas.openxmlformats.org/officeDocument/2006/relationships" xmlns:p="http://schemas.openxmlformats.org/presentationml/2006/main">
+  <p:cSld name="Slide 26">
+    <p:spTree>
+      <p:nvGrpSpPr>
+        <p:cNvPr id="1" name=""/>
+        <p:cNvGrpSpPr/>
+        <p:nvPr/>
+      </p:nvGrpSpPr>
+      <p:grpSpPr>
+        <a:xfrm>
+          <a:off x="0" y="0"/>
+          <a:ext cx="0" cy="0"/>
+          <a:chOff x="0" y="0"/>
+          <a:chExt cx="0" cy="0"/>
+        </a:xfrm>
+      </p:grpSpPr>
+      <p:sp>
+        <p:nvSpPr>
+          <p:cNvPr id="2" name="Sección"/>
+          <p:cNvSpPr txBox="1"/>
+          <p:nvPr/>
+        </p:nvSpPr>
+        <p:spPr>
+          <a:xfrm>
+            <a:off x="548640" y="411480"/>
+            <a:ext cx="11094415" cy="274320"/>
+          </a:xfrm>
+          <a:prstGeom prst="rect">
+            <a:avLst/>
+          </a:prstGeom>
+          <a:noFill/>
+          <a:ln/>
+        </p:spPr>
+        <p:txBody>
+          <a:bodyPr wrap="square" lIns="0" tIns="0" rIns="0" bIns="0" rtlCol="0" anchor="ctr"/>
+          <a:lstStyle/>
+          <a:p>
+            <a:pPr indent="0" marL="0">
+              <a:buNone/>
+            </a:pPr>
+            <a:r>
+              <a:rPr lang="en-US" sz="1100" b="1" spc="200" kern="0" dirty="0">
+                <a:solidFill>
+                  <a:srgbClr val="EC4F24"/>
+                </a:solidFill>
+                <a:latin typeface="Arial" pitchFamily="34" charset="0"/>
+                <a:ea typeface="Arial" pitchFamily="34" charset="-122"/>
+                <a:cs typeface="Arial" pitchFamily="34" charset="-120"/>
+              </a:rPr>
+              <a:t>08  ·  HOJA DE RUTA PARA SALIR</a:t>
+            </a:r>
+            <a:endParaRPr lang="en-US" sz="1100" dirty="0"/>
+          </a:p>
+        </p:txBody>
+      </p:sp>
+      <p:sp>
+        <p:nvSpPr>
+          <p:cNvPr id="3" name="Text 0"/>
+          <p:cNvSpPr/>
+          <p:nvPr>
+            <p:ph idx="101" type="title" hasCustomPrompt="1"/>
+          </p:nvPr>
+        </p:nvSpPr>
+        <p:spPr>
+          <a:xfrm>
+            <a:off x="548640" y="713232"/>
+            <a:ext cx="11094415" cy="960120"/>
+          </a:xfrm>
+          <a:prstGeom prst="rect">
+            <a:avLst/>
+          </a:prstGeom>
+          <a:noFill/>
+          <a:ln/>
+        </p:spPr>
+        <p:txBody>
+          <a:bodyPr wrap="square" lIns="0" tIns="0" rIns="0" bIns="0" rtlCol="0" anchor="t"/>
+          <a:lstStyle/>
+          <a:p>
+            <a:pPr algn="l" indent="0" marL="0">
+              <a:buNone/>
+            </a:pPr>
+            <a:r>
+              <a:rPr lang="en-US" sz="2800" dirty="0">
+                <a:solidFill>
+                  <a:srgbClr val="FFFFFF"/>
+                </a:solidFill>
+                <a:latin typeface="Arial Black" pitchFamily="34" charset="0"/>
+                <a:ea typeface="Arial Black" pitchFamily="34" charset="-122"/>
+                <a:cs typeface="Arial Black" pitchFamily="34" charset="-120"/>
+              </a:rPr>
+              <a:t>Pendiente</a:t>
+            </a:r>
+            <a:endParaRPr lang="en-US" sz="2800" dirty="0"/>
+          </a:p>
+        </p:txBody>
+      </p:sp>
+      <p:sp>
+        <p:nvSpPr>
+          <p:cNvPr id="4" name="Text 2"/>
+          <p:cNvSpPr txBox="1"/>
+          <p:nvPr/>
+        </p:nvSpPr>
+        <p:spPr>
+          <a:xfrm>
+            <a:off x="548640" y="1828800"/>
+            <a:ext cx="6949440" cy="4251960"/>
+          </a:xfrm>
+          <a:prstGeom prst="rect">
+            <a:avLst/>
+          </a:prstGeom>
+          <a:noFill/>
+          <a:ln/>
+        </p:spPr>
+        <p:txBody>
+          <a:bodyPr wrap="square" lIns="0" tIns="0" rIns="0" bIns="0" rtlCol="0" anchor="t"/>
+          <a:lstStyle/>
+          <a:p>
+            <a:pPr indent="0" marL="0">
+              <a:lnSpc>
+                <a:spcPct val="105000"/>
+              </a:lnSpc>
+              <a:spcAft>
+                <a:spcPts val="1000"/>
+              </a:spcAft>
+              <a:buNone/>
+            </a:pPr>
+            <a:r>
+              <a:rPr lang="en-US" sz="1600" dirty="0">
+                <a:solidFill>
+                  <a:srgbClr val="FFFFFF"/>
+                </a:solidFill>
+                <a:latin typeface="Arial" pitchFamily="34" charset="0"/>
+                <a:ea typeface="Arial" pitchFamily="34" charset="-122"/>
+                <a:cs typeface="Arial" pitchFamily="34" charset="-120"/>
+              </a:rPr>
+              <a:t>Esta parte está por escribir: la escribe la tarea T211.</a:t>
+            </a:r>
+            <a:endParaRPr lang="en-US" sz="1600" dirty="0"/>
+          </a:p>
+        </p:txBody>
+      </p:sp>
+      <p:sp>
+        <p:nvSpPr>
+          <p:cNvPr id="5" name="Shape 3"/>
+          <p:cNvSpPr/>
+          <p:nvPr/>
+        </p:nvSpPr>
+        <p:spPr>
+          <a:xfrm>
+            <a:off x="8229600" y="1828800"/>
+            <a:ext cx="3383280" cy="3383280"/>
+          </a:xfrm>
+          <a:prstGeom prst="ellipse">
+            <a:avLst/>
+          </a:prstGeom>
+          <a:solidFill>
+            <a:srgbClr val="07101F"/>
+          </a:solidFill>
+          <a:ln w="25400">
+            <a:solidFill>
+              <a:srgbClr val="2F4A72"/>
+            </a:solidFill>
+            <a:prstDash val="solid"/>
+          </a:ln>
+        </p:spPr>
+      </p:sp>
+      <p:pic>
+        <p:nvPicPr>
+          <p:cNvPr id="6" name="Image 0" descr="La mascota de BOIA">    </p:cNvPr>
+          <p:cNvPicPr>
+            <a:picLocks noChangeAspect="1"/>
+          </p:cNvPicPr>
+          <p:nvPr/>
+        </p:nvPicPr>
+        <p:blipFill>
+          <a:blip r:embed="rId1"/>
+          <a:stretch>
+            <a:fillRect/>
+          </a:stretch>
+        </p:blipFill>
+        <p:spPr>
+          <a:xfrm>
+            <a:off x="8642359" y="2240280"/>
+            <a:ext cx="2557762" cy="2560320"/>
+          </a:xfrm>
+          <a:prstGeom prst="rect">
+            <a:avLst/>
+          </a:prstGeom>
+        </p:spPr>
+      </p:pic>
+      <p:sp>
+        <p:nvSpPr>
+          <p:cNvPr id="25" name="Slide Number Placeholder 0"/>
+          <p:cNvSpPr>
+            <a:spLocks noGrp="1"/>
+          </p:cNvSpPr>
+          <p:nvPr>
+            <p:ph type="sldNum" sz="quarter" idx="4294967295"/>
+          </p:nvPr>
+        </p:nvSpPr>
+        <p:spPr>
+          <a:xfrm>
+            <a:off x="548640" y="6382512"/>
+            <a:ext cx="731520" cy="320040"/>
+          </a:xfrm>
+          <a:prstGeom prst="rect">
+            <a:avLst/>
+          </a:prstGeom>
+          <a:extLst>
+            <a:ext uri="{C572A759-6A51-4108-AA02-DFA0A04FC94B}">
+              <ma14:wrappingTextBoxFlag xmlns:ma14="http://schemas.microsoft.com/office/mac/drawingml/2011/main" val="0"/>
+            </a:ext>
+          </a:extLst>
+        </p:spPr>
+        <p:txBody>
+          <a:bodyPr/>
+          <a:lstStyle>
+            <a:lvl1pPr>
+              <a:defRPr sz="1000">
+                <a:solidFill>
+                  <a:srgbClr val="C9D4E6"/>
+                </a:solidFill>
+                <a:latin typeface="Arial"/>
+                <a:ea typeface="Arial"/>
+                <a:cs typeface="Arial"/>
+              </a:defRPr>
+            </a:lvl1pPr>
+          </a:lstStyle>
+          <a:p>
+            <a:pPr algn="l"/>
+            <a:fld id="{F7021451-1387-4CA6-816F-3879F97B5CBC}" type="slidenum">
+              <a:rPr b="0" lang="en-US"/>
+              <a:t>26</a:t>
+            </a:fld>
+            <a:endParaRPr lang="en-US"/>
+          </a:p>
+        </p:txBody>
+      </p:sp>
+    </p:spTree>
+  </p:cSld>
+  <p:clrMapOvr>
+    <a:masterClrMapping/>
+  </p:clrMapOvr>
+</p:sld>
+</file>
+
 <file path=ppt/slides/slide3.xml><?xml version="1.0" encoding="utf-8"?>
 <p:sld xmlns:a="http://schemas.openxmlformats.org/drawingml/2006/main" xmlns:r="http://schemas.openxmlformats.org/officeDocument/2006/relationships" xmlns:p="http://schemas.openxmlformats.org/presentationml/2006/main">
   <p:cSld name="Slide 3">
@@ -8608,9 +13827,48 @@
                 <a:ea typeface="Arial" pitchFamily="34" charset="-122"/>
                 <a:cs typeface="Arial" pitchFamily="34" charset="-120"/>
               </a:rPr>
-              <a:t>Eventos, artistas, fotos, tienda y legales: las páginas de la web</a:t>
+              <a:t>Eventos, artistas, fotos, tienda y legales: las páginas que se abren por su enlace</a:t>
             </a:r>
             <a:endParaRPr lang="en-US" sz="1800" dirty="0"/>
+          </a:p>
+        </p:txBody>
+      </p:sp>
+      <p:sp>
+        <p:nvSpPr>
+          <p:cNvPr id="7" name="Secciones"/>
+          <p:cNvSpPr txBox="1"/>
+          <p:nvPr/>
+        </p:nvSpPr>
+        <p:spPr>
+          <a:xfrm>
+            <a:off x="548640" y="5029200"/>
+            <a:ext cx="6949440" cy="822960"/>
+          </a:xfrm>
+          <a:prstGeom prst="rect">
+            <a:avLst/>
+          </a:prstGeom>
+          <a:noFill/>
+          <a:ln/>
+        </p:spPr>
+        <p:txBody>
+          <a:bodyPr wrap="square" lIns="0" tIns="0" rIns="0" bIns="0" rtlCol="0" anchor="t"/>
+          <a:lstStyle/>
+          <a:p>
+            <a:pPr indent="0" marL="0">
+              <a:buNone/>
+            </a:pPr>
+            <a:r>
+              <a:rPr lang="en-US" sz="1400" b="1" dirty="0">
+                <a:solidFill>
+                  <a:srgbClr val="B9A6FF"/>
+                </a:solidFill>
+                <a:latin typeface="Arial" pitchFamily="34" charset="0"/>
+                <a:ea typeface="Arial" pitchFamily="34" charset="-122"/>
+                <a:cs typeface="Arial" pitchFamily="34" charset="-120"/>
+              </a:rPr>
+              <a:t>Eventos   ·   Artistas   ·   Enlace de artistas   ·   Fotos   ·   Tienda   ·   Legales</a:t>
+            </a:r>
+            <a:endParaRPr lang="en-US" sz="1400" dirty="0"/>
           </a:p>
         </p:txBody>
       </p:sp>
@@ -8696,7 +13954,7 @@
         <p:spPr>
           <a:xfrm>
             <a:off x="548640" y="411480"/>
-            <a:ext cx="11094415" cy="274320"/>
+            <a:ext cx="6035040" cy="274320"/>
           </a:xfrm>
           <a:prstGeom prst="rect">
             <a:avLst/>
@@ -8720,7 +13978,7 @@
                 <a:ea typeface="Arial" pitchFamily="34" charset="-122"/>
                 <a:cs typeface="Arial" pitchFamily="34" charset="-120"/>
               </a:rPr>
-              <a:t>03  ·  PÁGINAS</a:t>
+              <a:t>03  ·  PÁGINAS  ·  EVENTOS</a:t>
             </a:r>
             <a:endParaRPr lang="en-US" sz="1100" dirty="0"/>
           </a:p>
@@ -8737,7 +13995,7 @@
         <p:spPr>
           <a:xfrm>
             <a:off x="548640" y="713232"/>
-            <a:ext cx="11094415" cy="960120"/>
+            <a:ext cx="6035040" cy="960120"/>
           </a:xfrm>
           <a:prstGeom prst="rect">
             <a:avLst/>
@@ -8761,7 +14019,7 @@
                 <a:ea typeface="Arial Black" pitchFamily="34" charset="-122"/>
                 <a:cs typeface="Arial Black" pitchFamily="34" charset="-120"/>
               </a:rPr>
-              <a:t>Pendiente</a:t>
+              <a:t>La ficha de cada evento</a:t>
             </a:r>
             <a:endParaRPr lang="en-US" sz="2800" dirty="0"/>
           </a:p>
@@ -8776,7 +14034,7 @@
         <p:spPr>
           <a:xfrm>
             <a:off x="548640" y="1828800"/>
-            <a:ext cx="6949440" cy="4251960"/>
+            <a:ext cx="6035040" cy="4251960"/>
           </a:xfrm>
           <a:prstGeom prst="rect">
             <a:avLst/>
@@ -8788,17 +14046,15 @@
           <a:bodyPr wrap="square" lIns="0" tIns="0" rIns="0" bIns="0" rtlCol="0" anchor="t"/>
           <a:lstStyle/>
           <a:p>
-            <a:pPr indent="0" marL="0">
-              <a:lnSpc>
-                <a:spcPct val="105000"/>
-              </a:lnSpc>
+            <a:pPr marL="228600" indent="-228600">
               <a:spcAft>
-                <a:spcPts val="1000"/>
+                <a:spcPts val="900"/>
               </a:spcAft>
-              <a:buNone/>
-            </a:pPr>
-            <a:r>
-              <a:rPr lang="en-US" sz="1600" dirty="0">
+              <a:buSzPct val="100000"/>
+              <a:buChar char="•"/>
+            </a:pPr>
+            <a:r>
+              <a:rPr lang="en-US" sz="1500" dirty="0">
                 <a:solidFill>
                   <a:srgbClr val="FFFFFF"/>
                 </a:solidFill>
@@ -8806,40 +14062,160 @@
                 <a:ea typeface="Arial" pitchFamily="34" charset="-122"/>
                 <a:cs typeface="Arial" pitchFamily="34" charset="-120"/>
               </a:rPr>
-              <a:t>Esta parte está por escribir: la escribe la tarea T206.</a:t>
-            </a:r>
-            <a:endParaRPr lang="en-US" sz="1600" dirty="0"/>
-          </a:p>
-        </p:txBody>
-      </p:sp>
-      <p:sp>
-        <p:nvSpPr>
-          <p:cNvPr id="5" name="Shape 3"/>
+              <a:t>Una página por evento, con su enlace propio para compartir: /eventos/halloween-2026</a:t>
+            </a:r>
+            <a:endParaRPr lang="en-US" sz="1500" dirty="0"/>
+          </a:p>
+          <a:p>
+            <a:pPr marL="228600" indent="-228600">
+              <a:spcAft>
+                <a:spcPts val="900"/>
+              </a:spcAft>
+              <a:buSzPct val="100000"/>
+              <a:buChar char="•"/>
+            </a:pPr>
+            <a:r>
+              <a:rPr lang="en-US" sz="1500" dirty="0">
+                <a:solidFill>
+                  <a:srgbClr val="FFFFFF"/>
+                </a:solidFill>
+                <a:latin typeface="Arial" pitchFamily="34" charset="0"/>
+                <a:ea typeface="Arial" pitchFamily="34" charset="-122"/>
+                <a:cs typeface="Arial" pitchFamily="34" charset="-120"/>
+              </a:rPr>
+              <a:t>Cartel, fecha y hora, lugar, formato y precio; mientras no hay cartel, «Cartel próximamente»</a:t>
+            </a:r>
+            <a:endParaRPr lang="en-US" sz="1500" dirty="0"/>
+          </a:p>
+          <a:p>
+            <a:pPr marL="228600" indent="-228600">
+              <a:spcAft>
+                <a:spcPts val="900"/>
+              </a:spcAft>
+              <a:buSzPct val="100000"/>
+              <a:buChar char="•"/>
+            </a:pPr>
+            <a:r>
+              <a:rPr lang="en-US" sz="1500" dirty="0">
+                <a:solidFill>
+                  <a:srgbClr val="FFFFFF"/>
+                </a:solidFill>
+                <a:latin typeface="Arial" pitchFamily="34" charset="0"/>
+                <a:ea typeface="Arial" pitchFamily="34" charset="-122"/>
+                <a:cs typeface="Arial" pitchFamily="34" charset="-120"/>
+              </a:rPr>
+              <a:t>Artistas del cartel, actividades (comida, mercadillo…) y descripción</a:t>
+            </a:r>
+            <a:endParaRPr lang="en-US" sz="1500" dirty="0"/>
+          </a:p>
+          <a:p>
+            <a:pPr marL="228600" indent="-228600">
+              <a:spcAft>
+                <a:spcPts val="900"/>
+              </a:spcAft>
+              <a:buSzPct val="100000"/>
+              <a:buChar char="•"/>
+            </a:pPr>
+            <a:r>
+              <a:rPr lang="en-US" sz="1500" dirty="0">
+                <a:solidFill>
+                  <a:srgbClr val="FFFFFF"/>
+                </a:solidFill>
+                <a:latin typeface="Arial" pitchFamily="34" charset="0"/>
+                <a:ea typeface="Arial" pitchFamily="34" charset="-122"/>
+                <a:cs typeface="Arial" pitchFamily="34" charset="-120"/>
+              </a:rPr>
+              <a:t>«Comprar entradas» si está a la venta e «Ir a su isla», que lleva en barco a su isla del mar</a:t>
+            </a:r>
+            <a:endParaRPr lang="en-US" sz="1500" dirty="0"/>
+          </a:p>
+          <a:p>
+            <a:pPr marL="228600" indent="-228600">
+              <a:spcAft>
+                <a:spcPts val="900"/>
+              </a:spcAft>
+              <a:buSzPct val="100000"/>
+              <a:buChar char="•"/>
+            </a:pPr>
+            <a:r>
+              <a:rPr lang="en-US" sz="1500" dirty="0">
+                <a:solidFill>
+                  <a:srgbClr val="FFFFFF"/>
+                </a:solidFill>
+                <a:latin typeface="Arial" pitchFamily="34" charset="0"/>
+                <a:ea typeface="Arial" pitchFamily="34" charset="-122"/>
+                <a:cs typeface="Arial" pitchFamily="34" charset="-120"/>
+              </a:rPr>
+              <a:t>Si ya pasó: sin compra, con sus recuerdos (fotos) y «Ver sus fotos»</a:t>
+            </a:r>
+            <a:endParaRPr lang="en-US" sz="1500" dirty="0"/>
+          </a:p>
+        </p:txBody>
+      </p:sp>
+      <p:sp>
+        <p:nvSpPr>
+          <p:cNvPr id="5" name="Teléfono"/>
           <p:cNvSpPr/>
           <p:nvPr/>
         </p:nvSpPr>
         <p:spPr>
           <a:xfrm>
-            <a:off x="8229600" y="1828800"/>
-            <a:ext cx="3383280" cy="3383280"/>
-          </a:xfrm>
-          <a:prstGeom prst="ellipse">
-            <a:avLst/>
+            <a:off x="7984387" y="411480"/>
+            <a:ext cx="2623721" cy="5760720"/>
+          </a:xfrm>
+          <a:prstGeom prst="roundRect">
+            <a:avLst>
+              <a:gd name="adj" fmla="val 9758"/>
+            </a:avLst>
           </a:prstGeom>
           <a:solidFill>
-            <a:srgbClr val="07101F"/>
+            <a:srgbClr val="05080F"/>
           </a:solidFill>
-          <a:ln w="25400">
+          <a:ln w="15875">
             <a:solidFill>
               <a:srgbClr val="2F4A72"/>
             </a:solidFill>
             <a:prstDash val="solid"/>
           </a:ln>
+          <a:effectLst>
+            <a:outerShdw sx="100000" sy="100000" kx="0" ky="0" algn="bl" rotWithShape="0" blurRad="127000" dist="50800" dir="5400000">
+              <a:srgbClr val="000000">
+                <a:alpha val="45000"/>
+              </a:srgbClr>
+            </a:outerShdw>
+          </a:effectLst>
+        </p:spPr>
+      </p:sp>
+      <p:sp>
+        <p:nvSpPr>
+          <p:cNvPr id="6" name="Shape 4"/>
+          <p:cNvSpPr/>
+          <p:nvPr/>
+        </p:nvSpPr>
+        <p:spPr>
+          <a:xfrm>
+            <a:off x="9021928" y="493776"/>
+            <a:ext cx="548640" cy="64008"/>
+          </a:xfrm>
+          <a:prstGeom prst="roundRect">
+            <a:avLst>
+              <a:gd name="adj" fmla="val 50000"/>
+            </a:avLst>
+          </a:prstGeom>
+          <a:solidFill>
+            <a:srgbClr val="2F4A72"/>
+          </a:solidFill>
+          <a:ln w="12700">
+            <a:solidFill>
+              <a:srgbClr val="2F4A72"/>
+            </a:solidFill>
+            <a:prstDash val="solid"/>
+          </a:ln>
         </p:spPr>
       </p:sp>
       <p:pic>
         <p:nvPicPr>
-          <p:cNvPr id="6" name="Image 0" descr="La mascota de BOIA">    </p:cNvPr>
+          <p:cNvPr id="7" name="Image 0" descr="Captura de la web">    </p:cNvPr>
           <p:cNvPicPr>
             <a:picLocks noChangeAspect="1"/>
           </p:cNvPicPr>
@@ -8853,8 +14229,8 @@
         </p:blipFill>
         <p:spPr>
           <a:xfrm>
-            <a:off x="8642359" y="2240280"/>
-            <a:ext cx="2557762" cy="2560320"/>
+            <a:off x="8066683" y="630936"/>
+            <a:ext cx="2459129" cy="5321808"/>
           </a:xfrm>
           <a:prstGeom prst="rect">
             <a:avLst/>
